--- a/engenharia-software/software-corporativo/boas-praticas/aula-06-spring-security/spring-security.pptx
+++ b/engenharia-software/software-corporativo/boas-praticas/aula-06-spring-security/spring-security.pptx
@@ -15,9 +15,13 @@
     <p:sldId id="300" r:id="rId9"/>
     <p:sldId id="301" r:id="rId10"/>
     <p:sldId id="302" r:id="rId11"/>
-    <p:sldId id="303" r:id="rId12"/>
-    <p:sldId id="306" r:id="rId13"/>
-    <p:sldId id="307" r:id="rId14"/>
+    <p:sldId id="308" r:id="rId12"/>
+    <p:sldId id="303" r:id="rId13"/>
+    <p:sldId id="306" r:id="rId14"/>
+    <p:sldId id="307" r:id="rId15"/>
+    <p:sldId id="309" r:id="rId16"/>
+    <p:sldId id="310" r:id="rId17"/>
+    <p:sldId id="311" r:id="rId18"/>
   </p:sldIdLst>
   <p:sldSz cx="12192000" cy="6858000"/>
   <p:notesSz cx="6858000" cy="9144000"/>
@@ -131,9 +135,13 @@
             <p14:sldId id="300"/>
             <p14:sldId id="301"/>
             <p14:sldId id="302"/>
+            <p14:sldId id="308"/>
             <p14:sldId id="303"/>
             <p14:sldId id="306"/>
             <p14:sldId id="307"/>
+            <p14:sldId id="309"/>
+            <p14:sldId id="310"/>
+            <p14:sldId id="311"/>
           </p14:sldIdLst>
         </p14:section>
       </p14:sectionLst>
@@ -725,7 +733,7 @@
           <a:p>
             <a:fld id="{CDD55C27-F8C6-4481-8569-CAC50CAE9F1F}" type="datetimeFigureOut">
               <a:rPr lang="pt-BR" smtClean="0"/>
-              <a:t>09/09/2026</a:t>
+              <a:t>17/09/2026</a:t>
             </a:fld>
             <a:endParaRPr lang="pt-BR"/>
           </a:p>
@@ -862,7 +870,7 @@
           <a:p>
             <a:fld id="{CDD55C27-F8C6-4481-8569-CAC50CAE9F1F}" type="datetimeFigureOut">
               <a:rPr lang="pt-BR" smtClean="0"/>
-              <a:t>09/09/2026</a:t>
+              <a:t>17/09/2026</a:t>
             </a:fld>
             <a:endParaRPr lang="pt-BR"/>
           </a:p>
@@ -1582,7 +1590,7 @@
           <a:p>
             <a:fld id="{CDD55C27-F8C6-4481-8569-CAC50CAE9F1F}" type="datetimeFigureOut">
               <a:rPr lang="pt-BR" smtClean="0"/>
-              <a:t>09/09/2026</a:t>
+              <a:t>17/09/2026</a:t>
             </a:fld>
             <a:endParaRPr lang="pt-BR"/>
           </a:p>
@@ -1762,7 +1770,7 @@
           <a:p>
             <a:fld id="{CDD55C27-F8C6-4481-8569-CAC50CAE9F1F}" type="datetimeFigureOut">
               <a:rPr lang="pt-BR" smtClean="0"/>
-              <a:t>09/09/2026</a:t>
+              <a:t>17/09/2026</a:t>
             </a:fld>
             <a:endParaRPr lang="pt-BR"/>
           </a:p>
@@ -1942,7 +1950,7 @@
           <a:p>
             <a:fld id="{CDD55C27-F8C6-4481-8569-CAC50CAE9F1F}" type="datetimeFigureOut">
               <a:rPr lang="pt-BR" smtClean="0"/>
-              <a:t>09/09/2026</a:t>
+              <a:t>17/09/2026</a:t>
             </a:fld>
             <a:endParaRPr lang="pt-BR"/>
           </a:p>
@@ -2153,7 +2161,7 @@
           <a:p>
             <a:fld id="{CDD55C27-F8C6-4481-8569-CAC50CAE9F1F}" type="datetimeFigureOut">
               <a:rPr lang="pt-BR" smtClean="0"/>
-              <a:t>09/09/2026</a:t>
+              <a:t>17/09/2026</a:t>
             </a:fld>
             <a:endParaRPr lang="pt-BR"/>
           </a:p>
@@ -2608,7 +2616,7 @@
           <a:p>
             <a:fld id="{CDD55C27-F8C6-4481-8569-CAC50CAE9F1F}" type="datetimeFigureOut">
               <a:rPr lang="pt-BR" smtClean="0"/>
-              <a:t>09/09/2026</a:t>
+              <a:t>17/09/2026</a:t>
             </a:fld>
             <a:endParaRPr lang="pt-BR"/>
           </a:p>
@@ -3305,11 +3313,11 @@
               <a:t>Método </a:t>
             </a:r>
             <a:r>
-              <a:rPr lang="pt-BR" dirty="0" err="1"/>
+              <a:rPr lang="pt-BR" b="1" dirty="0" err="1"/>
               <a:t>loadUserByUsername</a:t>
             </a:r>
             <a:r>
-              <a:rPr lang="pt-BR" dirty="0"/>
+              <a:rPr lang="pt-BR" b="1" dirty="0"/>
               <a:t>()</a:t>
             </a:r>
           </a:p>
@@ -3342,18 +3350,25 @@
           <a:lstStyle/>
           <a:p>
             <a:r>
-              <a:rPr lang="pt-BR"/>
-              <a:t>O Método loadUserByUsername() é responsável por </a:t>
-            </a:r>
-            <a:r>
-              <a:rPr lang="pt-BR" b="1"/>
+              <a:rPr lang="pt-BR" dirty="0"/>
+              <a:t>O Método </a:t>
+            </a:r>
+            <a:r>
+              <a:rPr lang="pt-BR" dirty="0" err="1"/>
+              <a:t>loadUserByUsername</a:t>
+            </a:r>
+            <a:r>
+              <a:rPr lang="pt-BR" dirty="0"/>
+              <a:t>() é responsável por </a:t>
+            </a:r>
+            <a:r>
+              <a:rPr lang="pt-BR" b="1" dirty="0"/>
               <a:t>buscar no banco de dados o usuário que está tentando fazer login</a:t>
             </a:r>
             <a:r>
-              <a:rPr lang="pt-BR"/>
+              <a:rPr lang="pt-BR" dirty="0"/>
               <a:t> e entregar essas informações ao Spring Security.</a:t>
             </a:r>
-            <a:endParaRPr lang="pt-BR" dirty="0"/>
           </a:p>
         </p:txBody>
       </p:sp>
@@ -3371,7 +3386,7 @@
         </p:nvGrpSpPr>
         <p:grpSpPr>
           <a:xfrm>
-            <a:off x="736901" y="3630138"/>
+            <a:off x="736902" y="3647071"/>
             <a:ext cx="10718197" cy="2606760"/>
             <a:chOff x="668670" y="2879640"/>
             <a:chExt cx="10718197" cy="2606760"/>
@@ -3795,7 +3810,7 @@
           <p:cNvPr id="2" name="Título 1">
             <a:extLst>
               <a:ext uri="{FF2B5EF4-FFF2-40B4-BE49-F238E27FC236}">
-                <a16:creationId xmlns:a16="http://schemas.microsoft.com/office/drawing/2014/main" id="{5E43583B-0B6E-4C2D-B414-9D4FF2DC0611}"/>
+                <a16:creationId xmlns:a16="http://schemas.microsoft.com/office/drawing/2014/main" id="{D625B4D7-FFEC-4729-8581-F801D08C1501}"/>
               </a:ext>
             </a:extLst>
           </p:cNvPr>
@@ -3812,9 +3827,14 @@
           <a:lstStyle/>
           <a:p>
             <a:r>
-              <a:rPr lang="pt-BR" dirty="0"/>
-              <a:t>Anotação @Configuration</a:t>
-            </a:r>
+              <a:rPr lang="pt-BR" b="1" dirty="0"/>
+              <a:t>Autenticação </a:t>
+            </a:r>
+            <a:r>
+              <a:rPr lang="pt-BR" b="1" dirty="0" err="1"/>
+              <a:t>Stateless</a:t>
+            </a:r>
+            <a:endParaRPr lang="pt-BR" dirty="0"/>
           </a:p>
         </p:txBody>
       </p:sp>
@@ -3823,7 +3843,7 @@
           <p:cNvPr id="3" name="Espaço Reservado para Conteúdo 2">
             <a:extLst>
               <a:ext uri="{FF2B5EF4-FFF2-40B4-BE49-F238E27FC236}">
-                <a16:creationId xmlns:a16="http://schemas.microsoft.com/office/drawing/2014/main" id="{4DBC6764-C18B-47FD-8EEC-BBCCA3C12D83}"/>
+                <a16:creationId xmlns:a16="http://schemas.microsoft.com/office/drawing/2014/main" id="{D32CB1AC-4954-4F1E-94D5-06FE8802D72C}"/>
               </a:ext>
             </a:extLst>
           </p:cNvPr>
@@ -3840,6 +3860,195 @@
           <a:lstStyle/>
           <a:p>
             <a:r>
+              <a:rPr lang="pt-BR" sz="1600" dirty="0"/>
+              <a:t>Por padrão, em aplicações com autenticação por sessão, o servidor mantém o estado de autenticação do usuário entre as requisições (</a:t>
+            </a:r>
+            <a:r>
+              <a:rPr lang="pt-BR" sz="1600" b="1" dirty="0" err="1"/>
+              <a:t>Stateful</a:t>
+            </a:r>
+            <a:r>
+              <a:rPr lang="pt-BR" sz="1600" dirty="0"/>
+              <a:t>).</a:t>
+            </a:r>
+          </a:p>
+          <a:p>
+            <a:endParaRPr lang="pt-BR" sz="1600" dirty="0"/>
+          </a:p>
+          <a:p>
+            <a:r>
+              <a:rPr lang="pt-BR" sz="1600" dirty="0"/>
+              <a:t>Na nossa API, utilizaremos o modelo </a:t>
+            </a:r>
+            <a:r>
+              <a:rPr lang="pt-BR" sz="1600" b="1" dirty="0" err="1"/>
+              <a:t>Stateless</a:t>
+            </a:r>
+            <a:r>
+              <a:rPr lang="pt-BR" sz="1600" dirty="0"/>
+              <a:t>, em que cada requisição deve conter as informações necessárias para autenticar o usuário.</a:t>
+            </a:r>
+          </a:p>
+          <a:p>
+            <a:pPr marL="742950" lvl="1" indent="-285750">
+              <a:buFont typeface="Arial" panose="020B0604020202020204" pitchFamily="34" charset="0"/>
+              <a:buChar char="•"/>
+            </a:pPr>
+            <a:r>
+              <a:rPr lang="pt-BR" sz="1400" dirty="0"/>
+              <a:t>O Spring Security não cria nem utiliza uma sessão HTTP para manter a autenticação.</a:t>
+            </a:r>
+          </a:p>
+          <a:p>
+            <a:pPr marL="742950" lvl="1" indent="-285750">
+              <a:buFont typeface="Arial" panose="020B0604020202020204" pitchFamily="34" charset="0"/>
+              <a:buChar char="•"/>
+            </a:pPr>
+            <a:r>
+              <a:rPr lang="pt-BR" sz="1400" dirty="0"/>
+              <a:t>Após o login, o cliente recebe um </a:t>
+            </a:r>
+            <a:r>
+              <a:rPr lang="pt-BR" sz="1400" dirty="0" err="1"/>
+              <a:t>token</a:t>
+            </a:r>
+            <a:r>
+              <a:rPr lang="pt-BR" sz="1400" dirty="0"/>
+              <a:t> JWT.</a:t>
+            </a:r>
+          </a:p>
+          <a:p>
+            <a:pPr marL="742950" lvl="1" indent="-285750">
+              <a:buFont typeface="Arial" panose="020B0604020202020204" pitchFamily="34" charset="0"/>
+              <a:buChar char="•"/>
+            </a:pPr>
+            <a:r>
+              <a:rPr lang="pt-BR" sz="1400" dirty="0"/>
+              <a:t>O cliente envia esse </a:t>
+            </a:r>
+            <a:r>
+              <a:rPr lang="pt-BR" sz="1400" dirty="0" err="1"/>
+              <a:t>token</a:t>
+            </a:r>
+            <a:r>
+              <a:rPr lang="pt-BR" sz="1400" dirty="0"/>
+              <a:t> em cada requisição a uma rota protegida.</a:t>
+            </a:r>
+          </a:p>
+          <a:p>
+            <a:pPr marL="742950" lvl="1" indent="-285750">
+              <a:buFont typeface="Arial" panose="020B0604020202020204" pitchFamily="34" charset="0"/>
+              <a:buChar char="•"/>
+            </a:pPr>
+            <a:r>
+              <a:rPr lang="pt-BR" sz="1400" dirty="0"/>
+              <a:t>A API valida o </a:t>
+            </a:r>
+            <a:r>
+              <a:rPr lang="pt-BR" sz="1400" dirty="0" err="1"/>
+              <a:t>token</a:t>
+            </a:r>
+            <a:r>
+              <a:rPr lang="pt-BR" sz="1400" dirty="0"/>
+              <a:t> antes de permitir o acesso.</a:t>
+            </a:r>
+          </a:p>
+          <a:p>
+            <a:pPr lvl="1"/>
+            <a:endParaRPr lang="pt-BR" sz="1400" dirty="0"/>
+          </a:p>
+          <a:p>
+            <a:r>
+              <a:rPr lang="pt-BR" sz="1600" dirty="0"/>
+              <a:t>A configuração STATELESS desabilita o uso da sessão para manter a autenticação. A geração e a validação do JWT serão implementadas separadamente.</a:t>
+            </a:r>
+          </a:p>
+        </p:txBody>
+      </p:sp>
+    </p:spTree>
+    <p:extLst>
+      <p:ext uri="{BB962C8B-B14F-4D97-AF65-F5344CB8AC3E}">
+        <p14:creationId xmlns:p14="http://schemas.microsoft.com/office/powerpoint/2010/main" val="3311506928"/>
+      </p:ext>
+    </p:extLst>
+  </p:cSld>
+  <p:clrMapOvr>
+    <a:masterClrMapping/>
+  </p:clrMapOvr>
+</p:sld>
+</file>
+
+<file path=ppt/slides/slide12.xml><?xml version="1.0" encoding="utf-8"?>
+<p:sld xmlns:a="http://schemas.openxmlformats.org/drawingml/2006/main" xmlns:r="http://schemas.openxmlformats.org/officeDocument/2006/relationships" xmlns:p="http://schemas.openxmlformats.org/presentationml/2006/main">
+  <p:cSld>
+    <p:spTree>
+      <p:nvGrpSpPr>
+        <p:cNvPr id="1" name=""/>
+        <p:cNvGrpSpPr/>
+        <p:nvPr/>
+      </p:nvGrpSpPr>
+      <p:grpSpPr>
+        <a:xfrm>
+          <a:off x="0" y="0"/>
+          <a:ext cx="0" cy="0"/>
+          <a:chOff x="0" y="0"/>
+          <a:chExt cx="0" cy="0"/>
+        </a:xfrm>
+      </p:grpSpPr>
+      <p:sp>
+        <p:nvSpPr>
+          <p:cNvPr id="2" name="Título 1">
+            <a:extLst>
+              <a:ext uri="{FF2B5EF4-FFF2-40B4-BE49-F238E27FC236}">
+                <a16:creationId xmlns:a16="http://schemas.microsoft.com/office/drawing/2014/main" id="{5E43583B-0B6E-4C2D-B414-9D4FF2DC0611}"/>
+              </a:ext>
+            </a:extLst>
+          </p:cNvPr>
+          <p:cNvSpPr>
+            <a:spLocks noGrp="1"/>
+          </p:cNvSpPr>
+          <p:nvPr>
+            <p:ph type="title"/>
+          </p:nvPr>
+        </p:nvSpPr>
+        <p:spPr/>
+        <p:txBody>
+          <a:bodyPr/>
+          <a:lstStyle/>
+          <a:p>
+            <a:r>
+              <a:rPr lang="pt-BR" dirty="0"/>
+              <a:t>Anotação </a:t>
+            </a:r>
+            <a:r>
+              <a:rPr lang="pt-BR" b="1" dirty="0"/>
+              <a:t>@Configuration</a:t>
+            </a:r>
+          </a:p>
+        </p:txBody>
+      </p:sp>
+      <p:sp>
+        <p:nvSpPr>
+          <p:cNvPr id="3" name="Espaço Reservado para Conteúdo 2">
+            <a:extLst>
+              <a:ext uri="{FF2B5EF4-FFF2-40B4-BE49-F238E27FC236}">
+                <a16:creationId xmlns:a16="http://schemas.microsoft.com/office/drawing/2014/main" id="{4DBC6764-C18B-47FD-8EEC-BBCCA3C12D83}"/>
+              </a:ext>
+            </a:extLst>
+          </p:cNvPr>
+          <p:cNvSpPr>
+            <a:spLocks noGrp="1"/>
+          </p:cNvSpPr>
+          <p:nvPr>
+            <p:ph idx="1"/>
+          </p:nvPr>
+        </p:nvSpPr>
+        <p:spPr/>
+        <p:txBody>
+          <a:bodyPr/>
+          <a:lstStyle/>
+          <a:p>
+            <a:r>
               <a:rPr lang="pt-BR" dirty="0"/>
               <a:t>O </a:t>
             </a:r>
@@ -3862,6 +4071,42 @@
           </a:p>
         </p:txBody>
       </p:sp>
+      <p:pic>
+        <p:nvPicPr>
+          <p:cNvPr id="5" name="Imagem 4">
+            <a:extLst>
+              <a:ext uri="{FF2B5EF4-FFF2-40B4-BE49-F238E27FC236}">
+                <a16:creationId xmlns:a16="http://schemas.microsoft.com/office/drawing/2014/main" id="{8D5D52A4-E898-46AB-96A9-73A47EACF6DA}"/>
+              </a:ext>
+            </a:extLst>
+          </p:cNvPr>
+          <p:cNvPicPr>
+            <a:picLocks noChangeAspect="1"/>
+          </p:cNvPicPr>
+          <p:nvPr/>
+        </p:nvPicPr>
+        <p:blipFill>
+          <a:blip r:embed="rId2">
+            <a:extLst>
+              <a:ext uri="{28A0092B-C50C-407E-A947-70E740481C1C}">
+                <a14:useLocalDpi xmlns:a14="http://schemas.microsoft.com/office/drawing/2010/main" val="0"/>
+              </a:ext>
+            </a:extLst>
+          </a:blip>
+          <a:stretch>
+            <a:fillRect/>
+          </a:stretch>
+        </p:blipFill>
+        <p:spPr>
+          <a:xfrm>
+            <a:off x="3219450" y="2902295"/>
+            <a:ext cx="5753100" cy="3835400"/>
+          </a:xfrm>
+          <a:prstGeom prst="rect">
+            <a:avLst/>
+          </a:prstGeom>
+        </p:spPr>
+      </p:pic>
     </p:spTree>
     <p:extLst>
       <p:ext uri="{BB962C8B-B14F-4D97-AF65-F5344CB8AC3E}">
@@ -3875,7 +4120,7 @@
 </p:sld>
 </file>
 
-<file path=ppt/slides/slide12.xml><?xml version="1.0" encoding="utf-8"?>
+<file path=ppt/slides/slide13.xml><?xml version="1.0" encoding="utf-8"?>
 <p:sld xmlns:a="http://schemas.openxmlformats.org/drawingml/2006/main" xmlns:r="http://schemas.openxmlformats.org/officeDocument/2006/relationships" xmlns:p="http://schemas.openxmlformats.org/presentationml/2006/main">
   <p:cSld>
     <p:spTree>
@@ -4265,7 +4510,7 @@
 </p:sld>
 </file>
 
-<file path=ppt/slides/slide13.xml><?xml version="1.0" encoding="utf-8"?>
+<file path=ppt/slides/slide14.xml><?xml version="1.0" encoding="utf-8"?>
 <p:sld xmlns:a="http://schemas.openxmlformats.org/drawingml/2006/main" xmlns:r="http://schemas.openxmlformats.org/officeDocument/2006/relationships" xmlns:p="http://schemas.openxmlformats.org/presentationml/2006/main">
   <p:cSld>
     <p:spTree>
@@ -4304,8 +4549,16 @@
           <a:lstStyle/>
           <a:p>
             <a:r>
+              <a:rPr lang="pt-BR" b="1" dirty="0"/>
+              <a:t>@Configuration </a:t>
+            </a:r>
+            <a:r>
               <a:rPr lang="pt-BR" dirty="0"/>
-              <a:t>@Configuration + @EnableWebSecurity </a:t>
+              <a:t>+ </a:t>
+            </a:r>
+            <a:r>
+              <a:rPr lang="pt-BR" b="1" dirty="0"/>
+              <a:t>@EnableWebSecurity </a:t>
             </a:r>
           </a:p>
         </p:txBody>
@@ -4337,23 +4590,41 @@
           <a:lstStyle/>
           <a:p>
             <a:r>
+              <a:rPr lang="pt-BR" b="1" dirty="0"/>
+              <a:t>@</a:t>
+            </a:r>
+            <a:r>
+              <a:rPr lang="pt-BR" b="1" dirty="0" err="1"/>
+              <a:t>Configuration</a:t>
+            </a:r>
+            <a:r>
+              <a:rPr lang="pt-BR" b="1" dirty="0"/>
+              <a:t>: </a:t>
+            </a:r>
+            <a:r>
               <a:rPr lang="pt-BR" dirty="0"/>
-              <a:t>@Configuration</a:t>
-            </a:r>
-          </a:p>
-          <a:p>
+              <a:t>Informa que a classe contém configurações.</a:t>
+            </a:r>
+          </a:p>
+          <a:p>
+            <a:endParaRPr lang="pt-BR" dirty="0"/>
+          </a:p>
+          <a:p>
+            <a:r>
+              <a:rPr lang="pt-BR" b="1" dirty="0"/>
+              <a:t>@</a:t>
+            </a:r>
+            <a:r>
+              <a:rPr lang="pt-BR" b="1" dirty="0" err="1"/>
+              <a:t>EnableWebSecuritydiz</a:t>
+            </a:r>
+            <a:r>
+              <a:rPr lang="pt-BR" b="1" dirty="0"/>
+              <a:t>: </a:t>
+            </a:r>
             <a:r>
               <a:rPr lang="pt-BR" dirty="0"/>
-              <a:t>diz que a classe contém configurações.</a:t>
-            </a:r>
-          </a:p>
-          <a:p>
-            <a:endParaRPr lang="pt-BR" dirty="0"/>
-          </a:p>
-          <a:p>
-            <a:r>
-              <a:rPr lang="pt-BR" dirty="0"/>
-              <a:t>@EnableWebSecuritydiz que essas configurações estão relacionadas à segurança web do Spring Security, com o intuito de definir as regras de segurança da aplicação.</a:t>
+              <a:t>Informa que essas configurações estão relacionadas à segurança web do Spring Security, com o intuito de definir as regras de segurança da aplicação.</a:t>
             </a:r>
           </a:p>
           <a:p>
@@ -4374,6 +4645,1074 @@
     <p:extLst>
       <p:ext uri="{BB962C8B-B14F-4D97-AF65-F5344CB8AC3E}">
         <p14:creationId xmlns:p14="http://schemas.microsoft.com/office/powerpoint/2010/main" val="510671022"/>
+      </p:ext>
+    </p:extLst>
+  </p:cSld>
+  <p:clrMapOvr>
+    <a:masterClrMapping/>
+  </p:clrMapOvr>
+</p:sld>
+</file>
+
+<file path=ppt/slides/slide15.xml><?xml version="1.0" encoding="utf-8"?>
+<p:sld xmlns:a="http://schemas.openxmlformats.org/drawingml/2006/main" xmlns:r="http://schemas.openxmlformats.org/officeDocument/2006/relationships" xmlns:p="http://schemas.openxmlformats.org/presentationml/2006/main">
+  <p:cSld>
+    <p:spTree>
+      <p:nvGrpSpPr>
+        <p:cNvPr id="1" name=""/>
+        <p:cNvGrpSpPr/>
+        <p:nvPr/>
+      </p:nvGrpSpPr>
+      <p:grpSpPr>
+        <a:xfrm>
+          <a:off x="0" y="0"/>
+          <a:ext cx="0" cy="0"/>
+          <a:chOff x="0" y="0"/>
+          <a:chExt cx="0" cy="0"/>
+        </a:xfrm>
+      </p:grpSpPr>
+      <p:sp>
+        <p:nvSpPr>
+          <p:cNvPr id="2" name="Título 1">
+            <a:extLst>
+              <a:ext uri="{FF2B5EF4-FFF2-40B4-BE49-F238E27FC236}">
+                <a16:creationId xmlns:a16="http://schemas.microsoft.com/office/drawing/2014/main" id="{A3E448DB-F761-4238-93B4-DA908273D0B9}"/>
+              </a:ext>
+            </a:extLst>
+          </p:cNvPr>
+          <p:cNvSpPr>
+            <a:spLocks noGrp="1"/>
+          </p:cNvSpPr>
+          <p:nvPr>
+            <p:ph type="title"/>
+          </p:nvPr>
+        </p:nvSpPr>
+        <p:spPr/>
+        <p:txBody>
+          <a:bodyPr/>
+          <a:lstStyle/>
+          <a:p>
+            <a:r>
+              <a:rPr lang="pt-BR" dirty="0"/>
+              <a:t>Como definir como STATELLES</a:t>
+            </a:r>
+          </a:p>
+        </p:txBody>
+      </p:sp>
+      <p:grpSp>
+        <p:nvGrpSpPr>
+          <p:cNvPr id="12" name="Agrupar 11">
+            <a:extLst>
+              <a:ext uri="{FF2B5EF4-FFF2-40B4-BE49-F238E27FC236}">
+                <a16:creationId xmlns:a16="http://schemas.microsoft.com/office/drawing/2014/main" id="{4A24E51E-6BA4-4D41-8D0F-830F70C5B693}"/>
+              </a:ext>
+            </a:extLst>
+          </p:cNvPr>
+          <p:cNvGrpSpPr/>
+          <p:nvPr/>
+        </p:nvGrpSpPr>
+        <p:grpSpPr>
+          <a:xfrm>
+            <a:off x="1027293" y="2319792"/>
+            <a:ext cx="10137413" cy="3925590"/>
+            <a:chOff x="749185" y="2285286"/>
+            <a:chExt cx="6794615" cy="3925590"/>
+          </a:xfrm>
+        </p:grpSpPr>
+        <p:sp>
+          <p:nvSpPr>
+            <p:cNvPr id="10" name="Shape 20">
+              <a:extLst>
+                <a:ext uri="{FF2B5EF4-FFF2-40B4-BE49-F238E27FC236}">
+                  <a16:creationId xmlns:a16="http://schemas.microsoft.com/office/drawing/2014/main" id="{2DB2A50A-D986-4FB0-93B6-EACEECD789BB}"/>
+                </a:ext>
+              </a:extLst>
+            </p:cNvPr>
+            <p:cNvSpPr/>
+            <p:nvPr/>
+          </p:nvSpPr>
+          <p:spPr>
+            <a:xfrm>
+              <a:off x="749185" y="2285286"/>
+              <a:ext cx="6794615" cy="3925590"/>
+            </a:xfrm>
+            <a:prstGeom prst="roundRect">
+              <a:avLst>
+                <a:gd name="adj" fmla="val 8081"/>
+              </a:avLst>
+            </a:prstGeom>
+            <a:solidFill>
+              <a:srgbClr val="191A1C"/>
+            </a:solidFill>
+            <a:ln/>
+          </p:spPr>
+          <p:txBody>
+            <a:bodyPr/>
+            <a:lstStyle/>
+            <a:p>
+              <a:endParaRPr lang="pt-BR"/>
+            </a:p>
+          </p:txBody>
+        </p:sp>
+        <p:sp>
+          <p:nvSpPr>
+            <p:cNvPr id="7" name="Retângulo 6">
+              <a:extLst>
+                <a:ext uri="{FF2B5EF4-FFF2-40B4-BE49-F238E27FC236}">
+                  <a16:creationId xmlns:a16="http://schemas.microsoft.com/office/drawing/2014/main" id="{4A35801F-679B-4713-9557-FDEA683E30B2}"/>
+                </a:ext>
+              </a:extLst>
+            </p:cNvPr>
+            <p:cNvSpPr/>
+            <p:nvPr/>
+          </p:nvSpPr>
+          <p:spPr>
+            <a:xfrm>
+              <a:off x="1098364" y="2538081"/>
+              <a:ext cx="6096256" cy="3420000"/>
+            </a:xfrm>
+            <a:prstGeom prst="rect">
+              <a:avLst/>
+            </a:prstGeom>
+          </p:spPr>
+          <p:txBody>
+            <a:bodyPr wrap="square">
+              <a:spAutoFit/>
+            </a:bodyPr>
+            <a:lstStyle/>
+            <a:p>
+              <a:pPr lvl="0" eaLnBrk="0" fontAlgn="base" hangingPunct="0">
+                <a:lnSpc>
+                  <a:spcPct val="150000"/>
+                </a:lnSpc>
+                <a:spcBef>
+                  <a:spcPct val="0"/>
+                </a:spcBef>
+                <a:spcAft>
+                  <a:spcPct val="0"/>
+                </a:spcAft>
+              </a:pPr>
+              <a:r>
+                <a:rPr lang="pt-BR" altLang="pt-BR" dirty="0">
+                  <a:solidFill>
+                    <a:srgbClr val="B3AE60"/>
+                  </a:solidFill>
+                  <a:latin typeface="JetBrains Mono"/>
+                </a:rPr>
+                <a:t>@</a:t>
+              </a:r>
+              <a:r>
+                <a:rPr lang="pt-BR" altLang="pt-BR" dirty="0" err="1">
+                  <a:solidFill>
+                    <a:srgbClr val="B3AE60"/>
+                  </a:solidFill>
+                  <a:latin typeface="JetBrains Mono"/>
+                </a:rPr>
+                <a:t>Bean</a:t>
+              </a:r>
+              <a:br>
+                <a:rPr lang="pt-BR" altLang="pt-BR" dirty="0">
+                  <a:solidFill>
+                    <a:srgbClr val="B3AE60"/>
+                  </a:solidFill>
+                  <a:latin typeface="JetBrains Mono"/>
+                </a:rPr>
+              </a:br>
+              <a:r>
+                <a:rPr lang="pt-BR" altLang="pt-BR" dirty="0" err="1">
+                  <a:solidFill>
+                    <a:srgbClr val="CF8E6D"/>
+                  </a:solidFill>
+                  <a:latin typeface="JetBrains Mono"/>
+                </a:rPr>
+                <a:t>public</a:t>
+              </a:r>
+              <a:r>
+                <a:rPr lang="pt-BR" altLang="pt-BR" dirty="0">
+                  <a:solidFill>
+                    <a:srgbClr val="CF8E6D"/>
+                  </a:solidFill>
+                  <a:latin typeface="JetBrains Mono"/>
+                </a:rPr>
+                <a:t> </a:t>
+              </a:r>
+              <a:r>
+                <a:rPr lang="pt-BR" altLang="pt-BR" dirty="0" err="1">
+                  <a:solidFill>
+                    <a:srgbClr val="BCBEC4"/>
+                  </a:solidFill>
+                  <a:latin typeface="JetBrains Mono"/>
+                </a:rPr>
+                <a:t>SecurityFilterChain</a:t>
+              </a:r>
+              <a:r>
+                <a:rPr lang="pt-BR" altLang="pt-BR" dirty="0">
+                  <a:solidFill>
+                    <a:srgbClr val="BCBEC4"/>
+                  </a:solidFill>
+                  <a:latin typeface="JetBrains Mono"/>
+                </a:rPr>
+                <a:t> </a:t>
+              </a:r>
+              <a:r>
+                <a:rPr lang="pt-BR" altLang="pt-BR" dirty="0" err="1">
+                  <a:solidFill>
+                    <a:srgbClr val="56A8F5"/>
+                  </a:solidFill>
+                  <a:latin typeface="JetBrains Mono"/>
+                </a:rPr>
+                <a:t>securityFilterChain</a:t>
+              </a:r>
+              <a:r>
+                <a:rPr lang="pt-BR" altLang="pt-BR" dirty="0">
+                  <a:solidFill>
+                    <a:srgbClr val="BCBEC4"/>
+                  </a:solidFill>
+                  <a:latin typeface="JetBrains Mono"/>
+                </a:rPr>
+                <a:t>(</a:t>
+              </a:r>
+              <a:r>
+                <a:rPr lang="pt-BR" altLang="pt-BR" dirty="0" err="1">
+                  <a:solidFill>
+                    <a:srgbClr val="BCBEC4"/>
+                  </a:solidFill>
+                  <a:latin typeface="JetBrains Mono"/>
+                </a:rPr>
+                <a:t>HttpSecurity</a:t>
+              </a:r>
+              <a:r>
+                <a:rPr lang="pt-BR" altLang="pt-BR" dirty="0">
+                  <a:solidFill>
+                    <a:srgbClr val="BCBEC4"/>
+                  </a:solidFill>
+                  <a:latin typeface="JetBrains Mono"/>
+                </a:rPr>
+                <a:t> http){</a:t>
+              </a:r>
+              <a:br>
+                <a:rPr lang="pt-BR" altLang="pt-BR" dirty="0">
+                  <a:solidFill>
+                    <a:srgbClr val="BCBEC4"/>
+                  </a:solidFill>
+                  <a:latin typeface="JetBrains Mono"/>
+                </a:rPr>
+              </a:br>
+              <a:r>
+                <a:rPr lang="pt-BR" altLang="pt-BR" dirty="0">
+                  <a:solidFill>
+                    <a:srgbClr val="BCBEC4"/>
+                  </a:solidFill>
+                  <a:latin typeface="JetBrains Mono"/>
+                </a:rPr>
+                <a:t>    </a:t>
+              </a:r>
+              <a:r>
+                <a:rPr lang="pt-BR" altLang="pt-BR" dirty="0" err="1">
+                  <a:solidFill>
+                    <a:srgbClr val="CF8E6D"/>
+                  </a:solidFill>
+                  <a:latin typeface="JetBrains Mono"/>
+                </a:rPr>
+                <a:t>return</a:t>
+              </a:r>
+              <a:r>
+                <a:rPr lang="pt-BR" altLang="pt-BR" dirty="0">
+                  <a:solidFill>
+                    <a:srgbClr val="CF8E6D"/>
+                  </a:solidFill>
+                  <a:latin typeface="JetBrains Mono"/>
+                </a:rPr>
+                <a:t> </a:t>
+              </a:r>
+              <a:r>
+                <a:rPr lang="pt-BR" altLang="pt-BR" dirty="0" err="1">
+                  <a:solidFill>
+                    <a:srgbClr val="BCBEC4"/>
+                  </a:solidFill>
+                  <a:latin typeface="JetBrains Mono"/>
+                </a:rPr>
+                <a:t>http.csrf</a:t>
+              </a:r>
+              <a:r>
+                <a:rPr lang="pt-BR" altLang="pt-BR" dirty="0">
+                  <a:solidFill>
+                    <a:srgbClr val="BCBEC4"/>
+                  </a:solidFill>
+                  <a:latin typeface="JetBrains Mono"/>
+                </a:rPr>
+                <a:t>(</a:t>
+              </a:r>
+              <a:r>
+                <a:rPr lang="pt-BR" altLang="pt-BR" dirty="0" err="1">
+                  <a:solidFill>
+                    <a:srgbClr val="BCBEC4"/>
+                  </a:solidFill>
+                  <a:latin typeface="JetBrains Mono"/>
+                </a:rPr>
+                <a:t>csrf</a:t>
+              </a:r>
+              <a:r>
+                <a:rPr lang="pt-BR" altLang="pt-BR" dirty="0">
+                  <a:solidFill>
+                    <a:srgbClr val="BCBEC4"/>
+                  </a:solidFill>
+                  <a:latin typeface="JetBrains Mono"/>
+                </a:rPr>
+                <a:t> -&gt; </a:t>
+              </a:r>
+              <a:r>
+                <a:rPr lang="pt-BR" altLang="pt-BR" dirty="0" err="1">
+                  <a:solidFill>
+                    <a:srgbClr val="BCBEC4"/>
+                  </a:solidFill>
+                  <a:latin typeface="JetBrains Mono"/>
+                </a:rPr>
+                <a:t>csrf.disable</a:t>
+              </a:r>
+              <a:r>
+                <a:rPr lang="pt-BR" altLang="pt-BR" dirty="0">
+                  <a:solidFill>
+                    <a:srgbClr val="BCBEC4"/>
+                  </a:solidFill>
+                  <a:latin typeface="JetBrains Mono"/>
+                </a:rPr>
+                <a:t>()).</a:t>
+              </a:r>
+              <a:br>
+                <a:rPr lang="pt-BR" altLang="pt-BR" dirty="0">
+                  <a:solidFill>
+                    <a:srgbClr val="BCBEC4"/>
+                  </a:solidFill>
+                  <a:latin typeface="JetBrains Mono"/>
+                </a:rPr>
+              </a:br>
+              <a:r>
+                <a:rPr lang="pt-BR" altLang="pt-BR" dirty="0">
+                  <a:solidFill>
+                    <a:srgbClr val="BCBEC4"/>
+                  </a:solidFill>
+                  <a:latin typeface="JetBrains Mono"/>
+                </a:rPr>
+                <a:t>            </a:t>
+              </a:r>
+              <a:r>
+                <a:rPr lang="pt-BR" altLang="pt-BR" dirty="0" err="1">
+                  <a:solidFill>
+                    <a:srgbClr val="BCBEC4"/>
+                  </a:solidFill>
+                  <a:latin typeface="JetBrains Mono"/>
+                </a:rPr>
+                <a:t>sessionManagement</a:t>
+              </a:r>
+              <a:r>
+                <a:rPr lang="pt-BR" altLang="pt-BR" dirty="0">
+                  <a:solidFill>
+                    <a:srgbClr val="BCBEC4"/>
+                  </a:solidFill>
+                  <a:latin typeface="JetBrains Mono"/>
+                </a:rPr>
+                <a:t>(</a:t>
+              </a:r>
+              <a:r>
+                <a:rPr lang="pt-BR" altLang="pt-BR" dirty="0" err="1">
+                  <a:solidFill>
+                    <a:srgbClr val="BCBEC4"/>
+                  </a:solidFill>
+                  <a:latin typeface="JetBrains Mono"/>
+                </a:rPr>
+                <a:t>session</a:t>
+              </a:r>
+              <a:r>
+                <a:rPr lang="pt-BR" altLang="pt-BR" dirty="0">
+                  <a:solidFill>
+                    <a:srgbClr val="BCBEC4"/>
+                  </a:solidFill>
+                  <a:latin typeface="JetBrains Mono"/>
+                </a:rPr>
+                <a:t> -&gt; </a:t>
+              </a:r>
+              <a:r>
+                <a:rPr lang="pt-BR" altLang="pt-BR" dirty="0" err="1">
+                  <a:solidFill>
+                    <a:srgbClr val="BCBEC4"/>
+                  </a:solidFill>
+                  <a:latin typeface="JetBrains Mono"/>
+                </a:rPr>
+                <a:t>session</a:t>
+              </a:r>
+              <a:br>
+                <a:rPr lang="pt-BR" altLang="pt-BR" dirty="0">
+                  <a:solidFill>
+                    <a:srgbClr val="BCBEC4"/>
+                  </a:solidFill>
+                  <a:latin typeface="JetBrains Mono"/>
+                </a:rPr>
+              </a:br>
+              <a:r>
+                <a:rPr lang="pt-BR" altLang="pt-BR" dirty="0">
+                  <a:solidFill>
+                    <a:srgbClr val="BCBEC4"/>
+                  </a:solidFill>
+                  <a:latin typeface="JetBrains Mono"/>
+                </a:rPr>
+                <a:t>            .</a:t>
+              </a:r>
+              <a:r>
+                <a:rPr lang="pt-BR" altLang="pt-BR" dirty="0" err="1">
+                  <a:solidFill>
+                    <a:srgbClr val="BCBEC4"/>
+                  </a:solidFill>
+                  <a:latin typeface="JetBrains Mono"/>
+                </a:rPr>
+                <a:t>sessionCreationPolicy</a:t>
+              </a:r>
+              <a:r>
+                <a:rPr lang="pt-BR" altLang="pt-BR" dirty="0">
+                  <a:solidFill>
+                    <a:srgbClr val="BCBEC4"/>
+                  </a:solidFill>
+                  <a:latin typeface="JetBrains Mono"/>
+                </a:rPr>
+                <a:t>(</a:t>
+              </a:r>
+              <a:r>
+                <a:rPr lang="pt-BR" altLang="pt-BR" dirty="0" err="1">
+                  <a:solidFill>
+                    <a:srgbClr val="BCBEC4"/>
+                  </a:solidFill>
+                  <a:latin typeface="JetBrains Mono"/>
+                </a:rPr>
+                <a:t>SessionCreationPolicy.</a:t>
+              </a:r>
+              <a:r>
+                <a:rPr lang="pt-BR" altLang="pt-BR" i="1" dirty="0" err="1">
+                  <a:solidFill>
+                    <a:srgbClr val="C77DBB"/>
+                  </a:solidFill>
+                  <a:latin typeface="JetBrains Mono"/>
+                </a:rPr>
+                <a:t>STATELESS</a:t>
+              </a:r>
+              <a:r>
+                <a:rPr lang="pt-BR" altLang="pt-BR" dirty="0">
+                  <a:solidFill>
+                    <a:srgbClr val="BCBEC4"/>
+                  </a:solidFill>
+                  <a:latin typeface="JetBrains Mono"/>
+                </a:rPr>
+                <a:t>)</a:t>
+              </a:r>
+              <a:br>
+                <a:rPr lang="pt-BR" altLang="pt-BR" dirty="0">
+                  <a:solidFill>
+                    <a:srgbClr val="BCBEC4"/>
+                  </a:solidFill>
+                  <a:latin typeface="JetBrains Mono"/>
+                </a:rPr>
+              </a:br>
+              <a:r>
+                <a:rPr lang="pt-BR" altLang="pt-BR" dirty="0">
+                  <a:solidFill>
+                    <a:srgbClr val="BCBEC4"/>
+                  </a:solidFill>
+                  <a:latin typeface="JetBrains Mono"/>
+                </a:rPr>
+                <a:t>    ).build();</a:t>
+              </a:r>
+              <a:br>
+                <a:rPr lang="pt-BR" altLang="pt-BR" dirty="0">
+                  <a:solidFill>
+                    <a:srgbClr val="BCBEC4"/>
+                  </a:solidFill>
+                  <a:latin typeface="JetBrains Mono"/>
+                </a:rPr>
+              </a:br>
+              <a:r>
+                <a:rPr lang="pt-BR" altLang="pt-BR" dirty="0">
+                  <a:solidFill>
+                    <a:srgbClr val="BCBEC4"/>
+                  </a:solidFill>
+                  <a:latin typeface="JetBrains Mono"/>
+                </a:rPr>
+                <a:t>}</a:t>
+              </a:r>
+              <a:endParaRPr lang="pt-BR" altLang="pt-BR" sz="4000" dirty="0">
+                <a:latin typeface="Arial" panose="020B0604020202020204" pitchFamily="34" charset="0"/>
+              </a:endParaRPr>
+            </a:p>
+          </p:txBody>
+        </p:sp>
+      </p:grpSp>
+    </p:spTree>
+    <p:extLst>
+      <p:ext uri="{BB962C8B-B14F-4D97-AF65-F5344CB8AC3E}">
+        <p14:creationId xmlns:p14="http://schemas.microsoft.com/office/powerpoint/2010/main" val="1660194238"/>
+      </p:ext>
+    </p:extLst>
+  </p:cSld>
+  <p:clrMapOvr>
+    <a:masterClrMapping/>
+  </p:clrMapOvr>
+</p:sld>
+</file>
+
+<file path=ppt/slides/slide16.xml><?xml version="1.0" encoding="utf-8"?>
+<p:sld xmlns:a="http://schemas.openxmlformats.org/drawingml/2006/main" xmlns:r="http://schemas.openxmlformats.org/officeDocument/2006/relationships" xmlns:p="http://schemas.openxmlformats.org/presentationml/2006/main">
+  <p:cSld>
+    <p:spTree>
+      <p:nvGrpSpPr>
+        <p:cNvPr id="1" name=""/>
+        <p:cNvGrpSpPr/>
+        <p:nvPr/>
+      </p:nvGrpSpPr>
+      <p:grpSpPr>
+        <a:xfrm>
+          <a:off x="0" y="0"/>
+          <a:ext cx="0" cy="0"/>
+          <a:chOff x="0" y="0"/>
+          <a:chExt cx="0" cy="0"/>
+        </a:xfrm>
+      </p:grpSpPr>
+      <p:sp>
+        <p:nvSpPr>
+          <p:cNvPr id="4" name="Shape 4">
+            <a:extLst>
+              <a:ext uri="{FF2B5EF4-FFF2-40B4-BE49-F238E27FC236}">
+                <a16:creationId xmlns:a16="http://schemas.microsoft.com/office/drawing/2014/main" id="{4705F5DA-0E06-40C7-B849-48716A42182F}"/>
+              </a:ext>
+            </a:extLst>
+          </p:cNvPr>
+          <p:cNvSpPr/>
+          <p:nvPr/>
+        </p:nvSpPr>
+        <p:spPr>
+          <a:xfrm>
+            <a:off x="749185" y="1811868"/>
+            <a:ext cx="11107643" cy="4670092"/>
+          </a:xfrm>
+          <a:prstGeom prst="roundRect">
+            <a:avLst>
+              <a:gd name="adj" fmla="val 3224"/>
+            </a:avLst>
+          </a:prstGeom>
+          <a:solidFill>
+            <a:srgbClr val="DADBF1"/>
+          </a:solidFill>
+          <a:ln w="6350">
+            <a:solidFill>
+              <a:srgbClr val="C0C1D7"/>
+            </a:solidFill>
+            <a:prstDash val="solid"/>
+          </a:ln>
+        </p:spPr>
+        <p:txBody>
+          <a:bodyPr/>
+          <a:lstStyle/>
+          <a:p>
+            <a:endParaRPr lang="pt-BR"/>
+          </a:p>
+        </p:txBody>
+      </p:sp>
+      <p:sp>
+        <p:nvSpPr>
+          <p:cNvPr id="2" name="Título 1">
+            <a:extLst>
+              <a:ext uri="{FF2B5EF4-FFF2-40B4-BE49-F238E27FC236}">
+                <a16:creationId xmlns:a16="http://schemas.microsoft.com/office/drawing/2014/main" id="{ECB7C75F-A38A-40B1-B68A-8885637D9390}"/>
+              </a:ext>
+            </a:extLst>
+          </p:cNvPr>
+          <p:cNvSpPr>
+            <a:spLocks noGrp="1"/>
+          </p:cNvSpPr>
+          <p:nvPr>
+            <p:ph type="title"/>
+          </p:nvPr>
+        </p:nvSpPr>
+        <p:spPr/>
+        <p:txBody>
+          <a:bodyPr/>
+          <a:lstStyle/>
+          <a:p>
+            <a:r>
+              <a:rPr lang="pt-BR" dirty="0"/>
+              <a:t>O que são cada um desses itens</a:t>
+            </a:r>
+          </a:p>
+        </p:txBody>
+      </p:sp>
+      <p:sp>
+        <p:nvSpPr>
+          <p:cNvPr id="12" name="Shape 5">
+            <a:extLst>
+              <a:ext uri="{FF2B5EF4-FFF2-40B4-BE49-F238E27FC236}">
+                <a16:creationId xmlns:a16="http://schemas.microsoft.com/office/drawing/2014/main" id="{D963DA3C-6C6A-4B8A-B045-12383E65269F}"/>
+              </a:ext>
+            </a:extLst>
+          </p:cNvPr>
+          <p:cNvSpPr/>
+          <p:nvPr/>
+        </p:nvSpPr>
+        <p:spPr>
+          <a:xfrm>
+            <a:off x="1028265" y="1995920"/>
+            <a:ext cx="567021" cy="567035"/>
+          </a:xfrm>
+          <a:prstGeom prst="ellipse">
+            <a:avLst/>
+          </a:prstGeom>
+          <a:solidFill>
+            <a:srgbClr val="4950BC"/>
+          </a:solidFill>
+          <a:ln/>
+        </p:spPr>
+        <p:txBody>
+          <a:bodyPr/>
+          <a:lstStyle/>
+          <a:p>
+            <a:endParaRPr lang="pt-BR" dirty="0"/>
+          </a:p>
+        </p:txBody>
+      </p:sp>
+      <p:sp>
+        <p:nvSpPr>
+          <p:cNvPr id="5" name="Text 7">
+            <a:extLst>
+              <a:ext uri="{FF2B5EF4-FFF2-40B4-BE49-F238E27FC236}">
+                <a16:creationId xmlns:a16="http://schemas.microsoft.com/office/drawing/2014/main" id="{A73A8F9F-F031-4EB6-893A-F8C166E2C391}"/>
+              </a:ext>
+            </a:extLst>
+          </p:cNvPr>
+          <p:cNvSpPr/>
+          <p:nvPr/>
+        </p:nvSpPr>
+        <p:spPr>
+          <a:xfrm>
+            <a:off x="1028264" y="2687160"/>
+            <a:ext cx="10545667" cy="3619438"/>
+          </a:xfrm>
+          <a:prstGeom prst="rect">
+            <a:avLst/>
+          </a:prstGeom>
+          <a:noFill/>
+          <a:ln/>
+        </p:spPr>
+        <p:txBody>
+          <a:bodyPr wrap="square" lIns="0" tIns="0" rIns="0" bIns="0" rtlCol="0" anchor="t">
+            <a:normAutofit lnSpcReduction="10000"/>
+          </a:bodyPr>
+          <a:lstStyle/>
+          <a:p>
+            <a:pPr algn="just">
+              <a:lnSpc>
+                <a:spcPct val="150000"/>
+              </a:lnSpc>
+            </a:pPr>
+            <a:r>
+              <a:rPr lang="pt-BR" b="1" dirty="0">
+                <a:latin typeface="Times New Roman" panose="02020603050405020304" pitchFamily="18" charset="0"/>
+                <a:cs typeface="Times New Roman" panose="02020603050405020304" pitchFamily="18" charset="0"/>
+              </a:rPr>
+              <a:t>@</a:t>
+            </a:r>
+            <a:r>
+              <a:rPr lang="pt-BR" b="1" dirty="0" err="1">
+                <a:latin typeface="Times New Roman" panose="02020603050405020304" pitchFamily="18" charset="0"/>
+                <a:cs typeface="Times New Roman" panose="02020603050405020304" pitchFamily="18" charset="0"/>
+              </a:rPr>
+              <a:t>Bean</a:t>
+            </a:r>
+            <a:r>
+              <a:rPr lang="pt-BR" b="1" dirty="0">
+                <a:latin typeface="Times New Roman" panose="02020603050405020304" pitchFamily="18" charset="0"/>
+                <a:cs typeface="Times New Roman" panose="02020603050405020304" pitchFamily="18" charset="0"/>
+              </a:rPr>
+              <a:t> </a:t>
+            </a:r>
+            <a:r>
+              <a:rPr lang="pt-BR" dirty="0">
+                <a:latin typeface="Times New Roman" panose="02020603050405020304" pitchFamily="18" charset="0"/>
+                <a:cs typeface="Times New Roman" panose="02020603050405020304" pitchFamily="18" charset="0"/>
+              </a:rPr>
+              <a:t>– Registra o objeto retornado pelo método para que seja gerenciado pelo Spring.</a:t>
+            </a:r>
+          </a:p>
+          <a:p>
+            <a:pPr algn="just">
+              <a:lnSpc>
+                <a:spcPct val="150000"/>
+              </a:lnSpc>
+            </a:pPr>
+            <a:r>
+              <a:rPr lang="pt-BR" b="1" dirty="0" err="1">
+                <a:latin typeface="Times New Roman" panose="02020603050405020304" pitchFamily="18" charset="0"/>
+                <a:cs typeface="Times New Roman" panose="02020603050405020304" pitchFamily="18" charset="0"/>
+              </a:rPr>
+              <a:t>SecurityFilterChain</a:t>
+            </a:r>
+            <a:r>
+              <a:rPr lang="pt-BR" b="1" dirty="0">
+                <a:latin typeface="Times New Roman" panose="02020603050405020304" pitchFamily="18" charset="0"/>
+                <a:cs typeface="Times New Roman" panose="02020603050405020304" pitchFamily="18" charset="0"/>
+              </a:rPr>
+              <a:t> </a:t>
+            </a:r>
+            <a:r>
+              <a:rPr lang="pt-BR" dirty="0">
+                <a:latin typeface="Times New Roman" panose="02020603050405020304" pitchFamily="18" charset="0"/>
+                <a:cs typeface="Times New Roman" panose="02020603050405020304" pitchFamily="18" charset="0"/>
+              </a:rPr>
+              <a:t>– Representa a cadeia de filtros que aplica a segurança às requisições.</a:t>
+            </a:r>
+          </a:p>
+          <a:p>
+            <a:pPr algn="just">
+              <a:lnSpc>
+                <a:spcPct val="150000"/>
+              </a:lnSpc>
+            </a:pPr>
+            <a:r>
+              <a:rPr lang="pt-BR" b="1" dirty="0" err="1">
+                <a:latin typeface="Times New Roman" panose="02020603050405020304" pitchFamily="18" charset="0"/>
+                <a:cs typeface="Times New Roman" panose="02020603050405020304" pitchFamily="18" charset="0"/>
+              </a:rPr>
+              <a:t>HttpSecurity</a:t>
+            </a:r>
+            <a:r>
+              <a:rPr lang="pt-BR" b="1" dirty="0">
+                <a:latin typeface="Times New Roman" panose="02020603050405020304" pitchFamily="18" charset="0"/>
+                <a:cs typeface="Times New Roman" panose="02020603050405020304" pitchFamily="18" charset="0"/>
+              </a:rPr>
+              <a:t> </a:t>
+            </a:r>
+            <a:r>
+              <a:rPr lang="pt-BR" dirty="0">
+                <a:latin typeface="Times New Roman" panose="02020603050405020304" pitchFamily="18" charset="0"/>
+                <a:cs typeface="Times New Roman" panose="02020603050405020304" pitchFamily="18" charset="0"/>
+              </a:rPr>
+              <a:t>– Permite configurar a segurança HTTP da aplicação.</a:t>
+            </a:r>
+          </a:p>
+          <a:p>
+            <a:pPr algn="just">
+              <a:lnSpc>
+                <a:spcPct val="150000"/>
+              </a:lnSpc>
+            </a:pPr>
+            <a:r>
+              <a:rPr lang="pt-BR" b="1" dirty="0" err="1">
+                <a:latin typeface="Times New Roman" panose="02020603050405020304" pitchFamily="18" charset="0"/>
+                <a:cs typeface="Times New Roman" panose="02020603050405020304" pitchFamily="18" charset="0"/>
+              </a:rPr>
+              <a:t>csrf</a:t>
+            </a:r>
+            <a:r>
+              <a:rPr lang="pt-BR" b="1" dirty="0">
+                <a:latin typeface="Times New Roman" panose="02020603050405020304" pitchFamily="18" charset="0"/>
+                <a:cs typeface="Times New Roman" panose="02020603050405020304" pitchFamily="18" charset="0"/>
+              </a:rPr>
+              <a:t> </a:t>
+            </a:r>
+            <a:r>
+              <a:rPr lang="pt-BR" dirty="0">
+                <a:latin typeface="Times New Roman" panose="02020603050405020304" pitchFamily="18" charset="0"/>
+                <a:cs typeface="Times New Roman" panose="02020603050405020304" pitchFamily="18" charset="0"/>
+              </a:rPr>
+              <a:t>– Configura a proteção contra requisições forjadas. O método </a:t>
+            </a:r>
+            <a:r>
+              <a:rPr lang="pt-BR" dirty="0" err="1">
+                <a:latin typeface="Times New Roman" panose="02020603050405020304" pitchFamily="18" charset="0"/>
+                <a:cs typeface="Times New Roman" panose="02020603050405020304" pitchFamily="18" charset="0"/>
+              </a:rPr>
+              <a:t>disable</a:t>
+            </a:r>
+            <a:r>
+              <a:rPr lang="pt-BR" dirty="0">
+                <a:latin typeface="Times New Roman" panose="02020603050405020304" pitchFamily="18" charset="0"/>
+                <a:cs typeface="Times New Roman" panose="02020603050405020304" pitchFamily="18" charset="0"/>
+              </a:rPr>
+              <a:t>() desabilita essa proteção.</a:t>
+            </a:r>
+          </a:p>
+          <a:p>
+            <a:pPr algn="just">
+              <a:lnSpc>
+                <a:spcPct val="150000"/>
+              </a:lnSpc>
+            </a:pPr>
+            <a:r>
+              <a:rPr lang="pt-BR" b="1" dirty="0" err="1">
+                <a:latin typeface="Times New Roman" panose="02020603050405020304" pitchFamily="18" charset="0"/>
+                <a:cs typeface="Times New Roman" panose="02020603050405020304" pitchFamily="18" charset="0"/>
+              </a:rPr>
+              <a:t>sessionManagement</a:t>
+            </a:r>
+            <a:r>
+              <a:rPr lang="pt-BR" b="1" dirty="0">
+                <a:latin typeface="Times New Roman" panose="02020603050405020304" pitchFamily="18" charset="0"/>
+                <a:cs typeface="Times New Roman" panose="02020603050405020304" pitchFamily="18" charset="0"/>
+              </a:rPr>
+              <a:t> </a:t>
+            </a:r>
+            <a:r>
+              <a:rPr lang="pt-BR" dirty="0">
+                <a:latin typeface="Times New Roman" panose="02020603050405020304" pitchFamily="18" charset="0"/>
+                <a:cs typeface="Times New Roman" panose="02020603050405020304" pitchFamily="18" charset="0"/>
+              </a:rPr>
+              <a:t>– Configura como o Spring Security gerencia as sessões.</a:t>
+            </a:r>
+          </a:p>
+          <a:p>
+            <a:pPr algn="just">
+              <a:lnSpc>
+                <a:spcPct val="150000"/>
+              </a:lnSpc>
+            </a:pPr>
+            <a:r>
+              <a:rPr lang="pt-BR" b="1" dirty="0" err="1">
+                <a:latin typeface="Times New Roman" panose="02020603050405020304" pitchFamily="18" charset="0"/>
+                <a:cs typeface="Times New Roman" panose="02020603050405020304" pitchFamily="18" charset="0"/>
+              </a:rPr>
+              <a:t>sessionCreationPolicy</a:t>
+            </a:r>
+            <a:r>
+              <a:rPr lang="pt-BR" dirty="0">
+                <a:latin typeface="Times New Roman" panose="02020603050405020304" pitchFamily="18" charset="0"/>
+                <a:cs typeface="Times New Roman" panose="02020603050405020304" pitchFamily="18" charset="0"/>
+              </a:rPr>
+              <a:t> – Define a política de criação e utilização de sessões HTTP.</a:t>
+            </a:r>
+          </a:p>
+          <a:p>
+            <a:pPr algn="just">
+              <a:lnSpc>
+                <a:spcPct val="150000"/>
+              </a:lnSpc>
+            </a:pPr>
+            <a:r>
+              <a:rPr lang="pt-BR" b="1" dirty="0" err="1">
+                <a:latin typeface="Times New Roman" panose="02020603050405020304" pitchFamily="18" charset="0"/>
+                <a:cs typeface="Times New Roman" panose="02020603050405020304" pitchFamily="18" charset="0"/>
+              </a:rPr>
+              <a:t>SessionCreationPolicy.STATELESS</a:t>
+            </a:r>
+            <a:r>
+              <a:rPr lang="pt-BR" b="1" dirty="0">
+                <a:latin typeface="Times New Roman" panose="02020603050405020304" pitchFamily="18" charset="0"/>
+                <a:cs typeface="Times New Roman" panose="02020603050405020304" pitchFamily="18" charset="0"/>
+              </a:rPr>
+              <a:t> </a:t>
+            </a:r>
+            <a:r>
+              <a:rPr lang="pt-BR" dirty="0">
+                <a:latin typeface="Times New Roman" panose="02020603050405020304" pitchFamily="18" charset="0"/>
+                <a:cs typeface="Times New Roman" panose="02020603050405020304" pitchFamily="18" charset="0"/>
+              </a:rPr>
+              <a:t>– Determina que o Spring Security não crie nem utilize sessões para manter a autenticação.</a:t>
+            </a:r>
+          </a:p>
+          <a:p>
+            <a:pPr algn="just">
+              <a:lnSpc>
+                <a:spcPct val="150000"/>
+              </a:lnSpc>
+            </a:pPr>
+            <a:r>
+              <a:rPr lang="pt-BR" b="1" dirty="0">
+                <a:latin typeface="Times New Roman" panose="02020603050405020304" pitchFamily="18" charset="0"/>
+                <a:cs typeface="Times New Roman" panose="02020603050405020304" pitchFamily="18" charset="0"/>
+              </a:rPr>
+              <a:t>build() </a:t>
+            </a:r>
+            <a:r>
+              <a:rPr lang="pt-BR" dirty="0">
+                <a:latin typeface="Times New Roman" panose="02020603050405020304" pitchFamily="18" charset="0"/>
+                <a:cs typeface="Times New Roman" panose="02020603050405020304" pitchFamily="18" charset="0"/>
+              </a:rPr>
+              <a:t>– Finaliza a configuração e cria a cadeia de filtros de segurança.</a:t>
+            </a:r>
+            <a:endParaRPr lang="pt-BR" sz="1600" dirty="0">
+              <a:latin typeface="Times New Roman" panose="02020603050405020304" pitchFamily="18" charset="0"/>
+              <a:cs typeface="Times New Roman" panose="02020603050405020304" pitchFamily="18" charset="0"/>
+            </a:endParaRPr>
+          </a:p>
+        </p:txBody>
+      </p:sp>
+      <p:pic>
+        <p:nvPicPr>
+          <p:cNvPr id="6" name="Gráfico 5" descr="Ponto de interrogação com preenchimento sólido">
+            <a:extLst>
+              <a:ext uri="{FF2B5EF4-FFF2-40B4-BE49-F238E27FC236}">
+                <a16:creationId xmlns:a16="http://schemas.microsoft.com/office/drawing/2014/main" id="{E22C5352-300F-495F-9E33-96B2CFA85E07}"/>
+              </a:ext>
+            </a:extLst>
+          </p:cNvPr>
+          <p:cNvPicPr>
+            <a:picLocks noChangeAspect="1"/>
+          </p:cNvPicPr>
+          <p:nvPr/>
+        </p:nvPicPr>
+        <p:blipFill>
+          <a:blip r:embed="rId2">
+            <a:extLst>
+              <a:ext uri="{96DAC541-7B7A-43D3-8B79-37D633B846F1}">
+                <asvg:svgBlip xmlns:asvg="http://schemas.microsoft.com/office/drawing/2016/SVG/main" r:embed="rId3"/>
+              </a:ext>
+            </a:extLst>
+          </a:blip>
+          <a:stretch>
+            <a:fillRect/>
+          </a:stretch>
+        </p:blipFill>
+        <p:spPr>
+          <a:xfrm>
+            <a:off x="1152462" y="2120125"/>
+            <a:ext cx="318625" cy="318625"/>
+          </a:xfrm>
+          <a:prstGeom prst="rect">
+            <a:avLst/>
+          </a:prstGeom>
+        </p:spPr>
+      </p:pic>
+      <p:sp>
+        <p:nvSpPr>
+          <p:cNvPr id="7" name="Título 4">
+            <a:extLst>
+              <a:ext uri="{FF2B5EF4-FFF2-40B4-BE49-F238E27FC236}">
+                <a16:creationId xmlns:a16="http://schemas.microsoft.com/office/drawing/2014/main" id="{A6029976-3324-4121-9393-F0263BDFE0E9}"/>
+              </a:ext>
+            </a:extLst>
+          </p:cNvPr>
+          <p:cNvSpPr txBox="1">
+            <a:spLocks/>
+          </p:cNvSpPr>
+          <p:nvPr/>
+        </p:nvSpPr>
+        <p:spPr>
+          <a:xfrm>
+            <a:off x="1826927" y="2081773"/>
+            <a:ext cx="9747005" cy="395329"/>
+          </a:xfrm>
+          <a:prstGeom prst="rect">
+            <a:avLst/>
+          </a:prstGeom>
+        </p:spPr>
+        <p:txBody>
+          <a:bodyPr/>
+          <a:lstStyle>
+            <a:lvl1pPr algn="l" defTabSz="914400" rtl="0" eaLnBrk="1" latinLnBrk="0" hangingPunct="1">
+              <a:lnSpc>
+                <a:spcPct val="90000"/>
+              </a:lnSpc>
+              <a:spcBef>
+                <a:spcPct val="0"/>
+              </a:spcBef>
+              <a:buNone/>
+              <a:defRPr sz="2800" kern="1200">
+                <a:solidFill>
+                  <a:schemeClr val="tx1"/>
+                </a:solidFill>
+                <a:latin typeface="Times New Roman" panose="02020603050405020304" pitchFamily="18" charset="0"/>
+                <a:ea typeface="+mj-ea"/>
+                <a:cs typeface="Times New Roman" panose="02020603050405020304" pitchFamily="18" charset="0"/>
+              </a:defRPr>
+            </a:lvl1pPr>
+          </a:lstStyle>
+          <a:p>
+            <a:r>
+              <a:rPr lang="pt-BR" sz="2000" b="1" dirty="0"/>
+              <a:t>O que significa cada item da configuração de segurança?</a:t>
+            </a:r>
+            <a:endParaRPr lang="pt-BR" sz="2000" dirty="0"/>
+          </a:p>
+        </p:txBody>
+      </p:sp>
+    </p:spTree>
+    <p:extLst>
+      <p:ext uri="{BB962C8B-B14F-4D97-AF65-F5344CB8AC3E}">
+        <p14:creationId xmlns:p14="http://schemas.microsoft.com/office/powerpoint/2010/main" val="4205379269"/>
+      </p:ext>
+    </p:extLst>
+  </p:cSld>
+  <p:clrMapOvr>
+    <a:masterClrMapping/>
+  </p:clrMapOvr>
+</p:sld>
+</file>
+
+<file path=ppt/slides/slide17.xml><?xml version="1.0" encoding="utf-8"?>
+<p:sld xmlns:a="http://schemas.openxmlformats.org/drawingml/2006/main" xmlns:r="http://schemas.openxmlformats.org/officeDocument/2006/relationships" xmlns:p="http://schemas.openxmlformats.org/presentationml/2006/main">
+  <p:cSld>
+    <p:spTree>
+      <p:nvGrpSpPr>
+        <p:cNvPr id="1" name=""/>
+        <p:cNvGrpSpPr/>
+        <p:nvPr/>
+      </p:nvGrpSpPr>
+      <p:grpSpPr>
+        <a:xfrm>
+          <a:off x="0" y="0"/>
+          <a:ext cx="0" cy="0"/>
+          <a:chOff x="0" y="0"/>
+          <a:chExt cx="0" cy="0"/>
+        </a:xfrm>
+      </p:grpSpPr>
+      <p:sp>
+        <p:nvSpPr>
+          <p:cNvPr id="2" name="Título 1">
+            <a:extLst>
+              <a:ext uri="{FF2B5EF4-FFF2-40B4-BE49-F238E27FC236}">
+                <a16:creationId xmlns:a16="http://schemas.microsoft.com/office/drawing/2014/main" id="{40222ED1-4D9C-4C6F-A26D-52FA0E4306F5}"/>
+              </a:ext>
+            </a:extLst>
+          </p:cNvPr>
+          <p:cNvSpPr>
+            <a:spLocks noGrp="1"/>
+          </p:cNvSpPr>
+          <p:nvPr>
+            <p:ph type="title"/>
+          </p:nvPr>
+        </p:nvSpPr>
+        <p:spPr/>
+        <p:txBody>
+          <a:bodyPr/>
+          <a:lstStyle/>
+          <a:p>
+            <a:endParaRPr lang="pt-BR"/>
+          </a:p>
+        </p:txBody>
+      </p:sp>
+      <p:sp>
+        <p:nvSpPr>
+          <p:cNvPr id="3" name="Espaço Reservado para Conteúdo 2">
+            <a:extLst>
+              <a:ext uri="{FF2B5EF4-FFF2-40B4-BE49-F238E27FC236}">
+                <a16:creationId xmlns:a16="http://schemas.microsoft.com/office/drawing/2014/main" id="{E8449CF5-6BFB-4FEE-A601-AAEAF1457C1E}"/>
+              </a:ext>
+            </a:extLst>
+          </p:cNvPr>
+          <p:cNvSpPr>
+            <a:spLocks noGrp="1"/>
+          </p:cNvSpPr>
+          <p:nvPr>
+            <p:ph idx="1"/>
+          </p:nvPr>
+        </p:nvSpPr>
+        <p:spPr/>
+        <p:txBody>
+          <a:bodyPr/>
+          <a:lstStyle/>
+          <a:p>
+            <a:endParaRPr lang="pt-BR"/>
+          </a:p>
+        </p:txBody>
+      </p:sp>
+    </p:spTree>
+    <p:extLst>
+      <p:ext uri="{BB962C8B-B14F-4D97-AF65-F5344CB8AC3E}">
+        <p14:creationId xmlns:p14="http://schemas.microsoft.com/office/powerpoint/2010/main" val="3287424128"/>
       </p:ext>
     </p:extLst>
   </p:cSld>
@@ -5485,13 +6824,13 @@
           <p:nvPr/>
         </p:nvPicPr>
         <p:blipFill>
-          <a:blip>
+          <a:blip r:embed="rId2">
             <a:extLst>
               <a:ext uri="{28A0092B-C50C-407E-A947-70E740481C1C}">
                 <a14:useLocalDpi xmlns:a14="http://schemas.microsoft.com/office/drawing/2010/main" val="0"/>
               </a:ext>
               <a:ext uri="{96DAC541-7B7A-43D3-8B79-37D633B846F1}">
-                <asvg:svgBlip xmlns:asvg="http://schemas.microsoft.com/office/drawing/2016/SVG/main" r:embed="rId2"/>
+                <asvg:svgBlip xmlns:asvg="http://schemas.microsoft.com/office/drawing/2016/SVG/main" r:embed="rId3"/>
               </a:ext>
             </a:extLst>
           </a:blip>
@@ -5524,13 +6863,13 @@
           <p:nvPr/>
         </p:nvPicPr>
         <p:blipFill>
-          <a:blip>
+          <a:blip r:embed="rId4">
             <a:extLst>
               <a:ext uri="{28A0092B-C50C-407E-A947-70E740481C1C}">
                 <a14:useLocalDpi xmlns:a14="http://schemas.microsoft.com/office/drawing/2010/main" val="0"/>
               </a:ext>
               <a:ext uri="{96DAC541-7B7A-43D3-8B79-37D633B846F1}">
-                <asvg:svgBlip xmlns:asvg="http://schemas.microsoft.com/office/drawing/2016/SVG/main" r:embed="rId3"/>
+                <asvg:svgBlip xmlns:asvg="http://schemas.microsoft.com/office/drawing/2016/SVG/main" r:embed="rId5"/>
               </a:ext>
             </a:extLst>
           </a:blip>
@@ -5884,13 +7223,13 @@
           <p:nvPr/>
         </p:nvPicPr>
         <p:blipFill>
-          <a:blip>
+          <a:blip r:embed="rId6">
             <a:extLst>
               <a:ext uri="{28A0092B-C50C-407E-A947-70E740481C1C}">
                 <a14:useLocalDpi xmlns:a14="http://schemas.microsoft.com/office/drawing/2010/main" val="0"/>
               </a:ext>
               <a:ext uri="{96DAC541-7B7A-43D3-8B79-37D633B846F1}">
-                <asvg:svgBlip xmlns:asvg="http://schemas.microsoft.com/office/drawing/2016/SVG/main" r:embed="rId4"/>
+                <asvg:svgBlip xmlns:asvg="http://schemas.microsoft.com/office/drawing/2016/SVG/main" r:embed="rId7"/>
               </a:ext>
             </a:extLst>
           </a:blip>
@@ -6181,13 +7520,13 @@
           <p:nvPr/>
         </p:nvPicPr>
         <p:blipFill>
-          <a:blip>
+          <a:blip r:embed="rId2">
             <a:extLst>
               <a:ext uri="{28A0092B-C50C-407E-A947-70E740481C1C}">
                 <a14:useLocalDpi xmlns:a14="http://schemas.microsoft.com/office/drawing/2010/main" val="0"/>
               </a:ext>
               <a:ext uri="{96DAC541-7B7A-43D3-8B79-37D633B846F1}">
-                <asvg:svgBlip xmlns:asvg="http://schemas.microsoft.com/office/drawing/2016/SVG/main" r:embed="rId2"/>
+                <asvg:svgBlip xmlns:asvg="http://schemas.microsoft.com/office/drawing/2016/SVG/main" r:embed="rId3"/>
               </a:ext>
             </a:extLst>
           </a:blip>
@@ -6220,13 +7559,13 @@
           <p:nvPr/>
         </p:nvPicPr>
         <p:blipFill>
-          <a:blip>
+          <a:blip r:embed="rId4">
             <a:extLst>
               <a:ext uri="{28A0092B-C50C-407E-A947-70E740481C1C}">
                 <a14:useLocalDpi xmlns:a14="http://schemas.microsoft.com/office/drawing/2010/main" val="0"/>
               </a:ext>
               <a:ext uri="{96DAC541-7B7A-43D3-8B79-37D633B846F1}">
-                <asvg:svgBlip xmlns:asvg="http://schemas.microsoft.com/office/drawing/2016/SVG/main" r:embed="rId3"/>
+                <asvg:svgBlip xmlns:asvg="http://schemas.microsoft.com/office/drawing/2016/SVG/main" r:embed="rId5"/>
               </a:ext>
             </a:extLst>
           </a:blip>
@@ -6580,13 +7919,13 @@
           <p:nvPr/>
         </p:nvPicPr>
         <p:blipFill>
-          <a:blip>
+          <a:blip r:embed="rId6">
             <a:extLst>
               <a:ext uri="{28A0092B-C50C-407E-A947-70E740481C1C}">
                 <a14:useLocalDpi xmlns:a14="http://schemas.microsoft.com/office/drawing/2010/main" val="0"/>
               </a:ext>
               <a:ext uri="{96DAC541-7B7A-43D3-8B79-37D633B846F1}">
-                <asvg:svgBlip xmlns:asvg="http://schemas.microsoft.com/office/drawing/2016/SVG/main" r:embed="rId4"/>
+                <asvg:svgBlip xmlns:asvg="http://schemas.microsoft.com/office/drawing/2016/SVG/main" r:embed="rId7"/>
               </a:ext>
             </a:extLst>
           </a:blip>
@@ -6852,13 +8191,13 @@
           <p:nvPr/>
         </p:nvPicPr>
         <p:blipFill>
-          <a:blip>
+          <a:blip r:embed="rId2">
             <a:extLst>
               <a:ext uri="{28A0092B-C50C-407E-A947-70E740481C1C}">
                 <a14:useLocalDpi xmlns:a14="http://schemas.microsoft.com/office/drawing/2010/main" val="0"/>
               </a:ext>
               <a:ext uri="{96DAC541-7B7A-43D3-8B79-37D633B846F1}">
-                <asvg:svgBlip xmlns:asvg="http://schemas.microsoft.com/office/drawing/2016/SVG/main" r:embed="rId2"/>
+                <asvg:svgBlip xmlns:asvg="http://schemas.microsoft.com/office/drawing/2016/SVG/main" r:embed="rId3"/>
               </a:ext>
             </a:extLst>
           </a:blip>
@@ -6891,13 +8230,13 @@
           <p:nvPr/>
         </p:nvPicPr>
         <p:blipFill>
-          <a:blip>
+          <a:blip r:embed="rId4">
             <a:extLst>
               <a:ext uri="{28A0092B-C50C-407E-A947-70E740481C1C}">
                 <a14:useLocalDpi xmlns:a14="http://schemas.microsoft.com/office/drawing/2010/main" val="0"/>
               </a:ext>
               <a:ext uri="{96DAC541-7B7A-43D3-8B79-37D633B846F1}">
-                <asvg:svgBlip xmlns:asvg="http://schemas.microsoft.com/office/drawing/2016/SVG/main" r:embed="rId3"/>
+                <asvg:svgBlip xmlns:asvg="http://schemas.microsoft.com/office/drawing/2016/SVG/main" r:embed="rId5"/>
               </a:ext>
             </a:extLst>
           </a:blip>
@@ -7244,13 +8583,13 @@
           <p:nvPr/>
         </p:nvPicPr>
         <p:blipFill>
-          <a:blip>
+          <a:blip r:embed="rId6">
             <a:extLst>
               <a:ext uri="{28A0092B-C50C-407E-A947-70E740481C1C}">
                 <a14:useLocalDpi xmlns:a14="http://schemas.microsoft.com/office/drawing/2010/main" val="0"/>
               </a:ext>
               <a:ext uri="{96DAC541-7B7A-43D3-8B79-37D633B846F1}">
-                <asvg:svgBlip xmlns:asvg="http://schemas.microsoft.com/office/drawing/2016/SVG/main" r:embed="rId4"/>
+                <asvg:svgBlip xmlns:asvg="http://schemas.microsoft.com/office/drawing/2016/SVG/main" r:embed="rId7"/>
               </a:ext>
             </a:extLst>
           </a:blip>
@@ -8301,7 +9640,11 @@
           <a:p>
             <a:r>
               <a:rPr lang="pt-BR" dirty="0"/>
-              <a:t>Anotação @Service	</a:t>
+              <a:t>Anotação </a:t>
+            </a:r>
+            <a:r>
+              <a:rPr lang="pt-BR" b="1" dirty="0"/>
+              <a:t>@Service	</a:t>
             </a:r>
           </a:p>
         </p:txBody>
@@ -8391,7 +9734,7 @@
         </p:blipFill>
         <p:spPr>
           <a:xfrm>
-            <a:off x="3508144" y="3159596"/>
+            <a:off x="3508144" y="3176529"/>
             <a:ext cx="5175712" cy="3450475"/>
           </a:xfrm>
           <a:prstGeom prst="rect">
@@ -8455,10 +9798,10 @@
               <a:t>Interface </a:t>
             </a:r>
             <a:r>
-              <a:rPr lang="pt-BR" dirty="0" err="1"/>
+              <a:rPr lang="pt-BR" b="1" dirty="0" err="1"/>
               <a:t>UserDetailsService</a:t>
             </a:r>
-            <a:endParaRPr lang="pt-BR" dirty="0"/>
+            <a:endParaRPr lang="pt-BR" b="1" dirty="0"/>
           </a:p>
         </p:txBody>
       </p:sp>
@@ -8481,7 +9824,7 @@
         <p:spPr>
           <a:xfrm>
             <a:off x="592347" y="1844675"/>
-            <a:ext cx="11007306" cy="1200450"/>
+            <a:ext cx="11007306" cy="2270126"/>
           </a:xfrm>
         </p:spPr>
         <p:txBody>
@@ -8489,24 +9832,80 @@
           <a:lstStyle/>
           <a:p>
             <a:r>
-              <a:rPr lang="pt-BR" dirty="0"/>
-              <a:t>O </a:t>
-            </a:r>
-            <a:r>
-              <a:rPr lang="pt-BR" dirty="0" err="1"/>
+              <a:rPr lang="pt-BR" sz="1600" dirty="0"/>
+              <a:t>A interface </a:t>
+            </a:r>
+            <a:r>
+              <a:rPr lang="pt-BR" sz="1600" b="1" dirty="0" err="1"/>
               <a:t>UserDetailsService</a:t>
             </a:r>
             <a:r>
-              <a:rPr lang="pt-BR" dirty="0"/>
-              <a:t> é uma </a:t>
-            </a:r>
-            <a:r>
-              <a:rPr lang="pt-BR" b="1" dirty="0"/>
-              <a:t>interface do Spring Security responsável por buscar os dados do usuário durante o processo de autenticação</a:t>
-            </a:r>
-            <a:r>
-              <a:rPr lang="pt-BR" dirty="0"/>
+              <a:rPr lang="pt-BR" sz="1600" dirty="0"/>
+              <a:t> define como o Spring Security deve buscar os dados de um usuário durante a autenticação. Ao implementar essa interface, a classe deve implementar o método </a:t>
+            </a:r>
+            <a:r>
+              <a:rPr lang="pt-BR" sz="1600" dirty="0" err="1"/>
+              <a:t>loadUserByUsername</a:t>
+            </a:r>
+            <a:r>
+              <a:rPr lang="pt-BR" sz="1600" dirty="0"/>
+              <a:t>(), responsável por:</a:t>
+            </a:r>
+          </a:p>
+          <a:p>
+            <a:pPr marL="742950" lvl="1" indent="-285750">
+              <a:buFont typeface="Arial" panose="020B0604020202020204" pitchFamily="34" charset="0"/>
+              <a:buChar char="•"/>
+            </a:pPr>
+            <a:r>
+              <a:rPr lang="pt-BR" sz="1400" dirty="0"/>
+              <a:t>Receber o login informado pelo usuário.</a:t>
+            </a:r>
+          </a:p>
+          <a:p>
+            <a:pPr marL="742950" lvl="1" indent="-285750">
+              <a:buFont typeface="Arial" panose="020B0604020202020204" pitchFamily="34" charset="0"/>
+              <a:buChar char="•"/>
+            </a:pPr>
+            <a:r>
+              <a:rPr lang="pt-BR" sz="1400" dirty="0"/>
+              <a:t>Buscar o usuário no banco de dados.</a:t>
+            </a:r>
+          </a:p>
+          <a:p>
+            <a:pPr marL="742950" lvl="1" indent="-285750">
+              <a:buFont typeface="Arial" panose="020B0604020202020204" pitchFamily="34" charset="0"/>
+              <a:buChar char="•"/>
+            </a:pPr>
+            <a:r>
+              <a:rPr lang="pt-BR" sz="1400" dirty="0"/>
+              <a:t>Retornar os dados encontrados em um objeto do tipo </a:t>
+            </a:r>
+            <a:r>
+              <a:rPr lang="pt-BR" sz="1400" dirty="0" err="1"/>
+              <a:t>UserDetails</a:t>
+            </a:r>
+            <a:r>
+              <a:rPr lang="pt-BR" sz="1400" dirty="0"/>
               <a:t>.</a:t>
+            </a:r>
+          </a:p>
+          <a:p>
+            <a:pPr marL="742950" lvl="1" indent="-285750">
+              <a:buFont typeface="Arial" panose="020B0604020202020204" pitchFamily="34" charset="0"/>
+              <a:buChar char="•"/>
+            </a:pPr>
+            <a:r>
+              <a:rPr lang="pt-BR" sz="1400" dirty="0"/>
+              <a:t>Lançar a exceção </a:t>
+            </a:r>
+            <a:r>
+              <a:rPr lang="pt-BR" sz="1400" dirty="0" err="1"/>
+              <a:t>UsernameNotFoundException</a:t>
+            </a:r>
+            <a:r>
+              <a:rPr lang="pt-BR" sz="1400" dirty="0"/>
+              <a:t> caso o usuário não seja encontrado.</a:t>
             </a:r>
           </a:p>
         </p:txBody>
@@ -8525,7 +9924,7 @@
         </p:nvGrpSpPr>
         <p:grpSpPr>
           <a:xfrm>
-            <a:off x="2436962" y="3586806"/>
+            <a:off x="2436961" y="4628206"/>
             <a:ext cx="7318077" cy="1873715"/>
             <a:chOff x="1972572" y="3586806"/>
             <a:chExt cx="7318077" cy="1873715"/>

--- a/engenharia-software/software-corporativo/boas-praticas/aula-06-spring-security/spring-security.pptx
+++ b/engenharia-software/software-corporativo/boas-praticas/aula-06-spring-security/spring-security.pptx
@@ -22,6 +22,7 @@
     <p:sldId id="309" r:id="rId16"/>
     <p:sldId id="310" r:id="rId17"/>
     <p:sldId id="311" r:id="rId18"/>
+    <p:sldId id="312" r:id="rId19"/>
   </p:sldIdLst>
   <p:sldSz cx="12192000" cy="6858000"/>
   <p:notesSz cx="6858000" cy="9144000"/>
@@ -142,6 +143,7 @@
             <p14:sldId id="309"/>
             <p14:sldId id="310"/>
             <p14:sldId id="311"/>
+            <p14:sldId id="312"/>
           </p14:sldIdLst>
         </p14:section>
       </p14:sectionLst>
@@ -5300,7 +5302,7 @@
         </p:spPr>
         <p:txBody>
           <a:bodyPr wrap="square" lIns="0" tIns="0" rIns="0" bIns="0" rtlCol="0" anchor="t">
-            <a:normAutofit lnSpcReduction="10000"/>
+            <a:normAutofit/>
           </a:bodyPr>
           <a:lstStyle/>
           <a:p>
@@ -5310,28 +5312,28 @@
               </a:lnSpc>
             </a:pPr>
             <a:r>
-              <a:rPr lang="pt-BR" b="1" dirty="0">
+              <a:rPr lang="pt-BR" sz="1600" b="1" dirty="0">
                 <a:latin typeface="Times New Roman" panose="02020603050405020304" pitchFamily="18" charset="0"/>
                 <a:cs typeface="Times New Roman" panose="02020603050405020304" pitchFamily="18" charset="0"/>
               </a:rPr>
               <a:t>@</a:t>
             </a:r>
             <a:r>
-              <a:rPr lang="pt-BR" b="1" dirty="0" err="1">
+              <a:rPr lang="pt-BR" sz="1600" b="1" dirty="0" err="1">
                 <a:latin typeface="Times New Roman" panose="02020603050405020304" pitchFamily="18" charset="0"/>
                 <a:cs typeface="Times New Roman" panose="02020603050405020304" pitchFamily="18" charset="0"/>
               </a:rPr>
               <a:t>Bean</a:t>
             </a:r>
             <a:r>
-              <a:rPr lang="pt-BR" b="1" dirty="0">
+              <a:rPr lang="pt-BR" sz="1600" b="1" dirty="0">
                 <a:latin typeface="Times New Roman" panose="02020603050405020304" pitchFamily="18" charset="0"/>
                 <a:cs typeface="Times New Roman" panose="02020603050405020304" pitchFamily="18" charset="0"/>
               </a:rPr>
               <a:t> </a:t>
             </a:r>
             <a:r>
-              <a:rPr lang="pt-BR" dirty="0">
+              <a:rPr lang="pt-BR" sz="1600" dirty="0">
                 <a:latin typeface="Times New Roman" panose="02020603050405020304" pitchFamily="18" charset="0"/>
                 <a:cs typeface="Times New Roman" panose="02020603050405020304" pitchFamily="18" charset="0"/>
               </a:rPr>
@@ -5345,21 +5347,21 @@
               </a:lnSpc>
             </a:pPr>
             <a:r>
-              <a:rPr lang="pt-BR" b="1" dirty="0" err="1">
+              <a:rPr lang="pt-BR" sz="1600" b="1" dirty="0" err="1">
                 <a:latin typeface="Times New Roman" panose="02020603050405020304" pitchFamily="18" charset="0"/>
                 <a:cs typeface="Times New Roman" panose="02020603050405020304" pitchFamily="18" charset="0"/>
               </a:rPr>
               <a:t>SecurityFilterChain</a:t>
             </a:r>
             <a:r>
-              <a:rPr lang="pt-BR" b="1" dirty="0">
+              <a:rPr lang="pt-BR" sz="1600" b="1" dirty="0">
                 <a:latin typeface="Times New Roman" panose="02020603050405020304" pitchFamily="18" charset="0"/>
                 <a:cs typeface="Times New Roman" panose="02020603050405020304" pitchFamily="18" charset="0"/>
               </a:rPr>
               <a:t> </a:t>
             </a:r>
             <a:r>
-              <a:rPr lang="pt-BR" dirty="0">
+              <a:rPr lang="pt-BR" sz="1600" dirty="0">
                 <a:latin typeface="Times New Roman" panose="02020603050405020304" pitchFamily="18" charset="0"/>
                 <a:cs typeface="Times New Roman" panose="02020603050405020304" pitchFamily="18" charset="0"/>
               </a:rPr>
@@ -5373,21 +5375,21 @@
               </a:lnSpc>
             </a:pPr>
             <a:r>
-              <a:rPr lang="pt-BR" b="1" dirty="0" err="1">
+              <a:rPr lang="pt-BR" sz="1600" b="1" dirty="0" err="1">
                 <a:latin typeface="Times New Roman" panose="02020603050405020304" pitchFamily="18" charset="0"/>
                 <a:cs typeface="Times New Roman" panose="02020603050405020304" pitchFamily="18" charset="0"/>
               </a:rPr>
               <a:t>HttpSecurity</a:t>
             </a:r>
             <a:r>
-              <a:rPr lang="pt-BR" b="1" dirty="0">
+              <a:rPr lang="pt-BR" sz="1600" b="1" dirty="0">
                 <a:latin typeface="Times New Roman" panose="02020603050405020304" pitchFamily="18" charset="0"/>
                 <a:cs typeface="Times New Roman" panose="02020603050405020304" pitchFamily="18" charset="0"/>
               </a:rPr>
               <a:t> </a:t>
             </a:r>
             <a:r>
-              <a:rPr lang="pt-BR" dirty="0">
+              <a:rPr lang="pt-BR" sz="1600" dirty="0">
                 <a:latin typeface="Times New Roman" panose="02020603050405020304" pitchFamily="18" charset="0"/>
                 <a:cs typeface="Times New Roman" panose="02020603050405020304" pitchFamily="18" charset="0"/>
               </a:rPr>
@@ -5401,35 +5403,35 @@
               </a:lnSpc>
             </a:pPr>
             <a:r>
-              <a:rPr lang="pt-BR" b="1" dirty="0" err="1">
+              <a:rPr lang="pt-BR" sz="1600" b="1" dirty="0" err="1">
                 <a:latin typeface="Times New Roman" panose="02020603050405020304" pitchFamily="18" charset="0"/>
                 <a:cs typeface="Times New Roman" panose="02020603050405020304" pitchFamily="18" charset="0"/>
               </a:rPr>
               <a:t>csrf</a:t>
             </a:r>
             <a:r>
-              <a:rPr lang="pt-BR" b="1" dirty="0">
+              <a:rPr lang="pt-BR" sz="1600" b="1" dirty="0">
                 <a:latin typeface="Times New Roman" panose="02020603050405020304" pitchFamily="18" charset="0"/>
                 <a:cs typeface="Times New Roman" panose="02020603050405020304" pitchFamily="18" charset="0"/>
               </a:rPr>
               <a:t> </a:t>
             </a:r>
             <a:r>
-              <a:rPr lang="pt-BR" dirty="0">
+              <a:rPr lang="pt-BR" sz="1600" dirty="0">
                 <a:latin typeface="Times New Roman" panose="02020603050405020304" pitchFamily="18" charset="0"/>
                 <a:cs typeface="Times New Roman" panose="02020603050405020304" pitchFamily="18" charset="0"/>
               </a:rPr>
               <a:t>– Configura a proteção contra requisições forjadas. O método </a:t>
             </a:r>
             <a:r>
-              <a:rPr lang="pt-BR" dirty="0" err="1">
+              <a:rPr lang="pt-BR" sz="1600" dirty="0" err="1">
                 <a:latin typeface="Times New Roman" panose="02020603050405020304" pitchFamily="18" charset="0"/>
                 <a:cs typeface="Times New Roman" panose="02020603050405020304" pitchFamily="18" charset="0"/>
               </a:rPr>
               <a:t>disable</a:t>
             </a:r>
             <a:r>
-              <a:rPr lang="pt-BR" dirty="0">
+              <a:rPr lang="pt-BR" sz="1600" dirty="0">
                 <a:latin typeface="Times New Roman" panose="02020603050405020304" pitchFamily="18" charset="0"/>
                 <a:cs typeface="Times New Roman" panose="02020603050405020304" pitchFamily="18" charset="0"/>
               </a:rPr>
@@ -5443,21 +5445,21 @@
               </a:lnSpc>
             </a:pPr>
             <a:r>
-              <a:rPr lang="pt-BR" b="1" dirty="0" err="1">
+              <a:rPr lang="pt-BR" sz="1600" b="1" dirty="0" err="1">
                 <a:latin typeface="Times New Roman" panose="02020603050405020304" pitchFamily="18" charset="0"/>
                 <a:cs typeface="Times New Roman" panose="02020603050405020304" pitchFamily="18" charset="0"/>
               </a:rPr>
               <a:t>sessionManagement</a:t>
             </a:r>
             <a:r>
-              <a:rPr lang="pt-BR" b="1" dirty="0">
+              <a:rPr lang="pt-BR" sz="1600" b="1" dirty="0">
                 <a:latin typeface="Times New Roman" panose="02020603050405020304" pitchFamily="18" charset="0"/>
                 <a:cs typeface="Times New Roman" panose="02020603050405020304" pitchFamily="18" charset="0"/>
               </a:rPr>
               <a:t> </a:t>
             </a:r>
             <a:r>
-              <a:rPr lang="pt-BR" dirty="0">
+              <a:rPr lang="pt-BR" sz="1600" dirty="0">
                 <a:latin typeface="Times New Roman" panose="02020603050405020304" pitchFamily="18" charset="0"/>
                 <a:cs typeface="Times New Roman" panose="02020603050405020304" pitchFamily="18" charset="0"/>
               </a:rPr>
@@ -5471,14 +5473,14 @@
               </a:lnSpc>
             </a:pPr>
             <a:r>
-              <a:rPr lang="pt-BR" b="1" dirty="0" err="1">
+              <a:rPr lang="pt-BR" sz="1600" b="1" dirty="0" err="1">
                 <a:latin typeface="Times New Roman" panose="02020603050405020304" pitchFamily="18" charset="0"/>
                 <a:cs typeface="Times New Roman" panose="02020603050405020304" pitchFamily="18" charset="0"/>
               </a:rPr>
               <a:t>sessionCreationPolicy</a:t>
             </a:r>
             <a:r>
-              <a:rPr lang="pt-BR" dirty="0">
+              <a:rPr lang="pt-BR" sz="1600" dirty="0">
                 <a:latin typeface="Times New Roman" panose="02020603050405020304" pitchFamily="18" charset="0"/>
                 <a:cs typeface="Times New Roman" panose="02020603050405020304" pitchFamily="18" charset="0"/>
               </a:rPr>
@@ -5492,21 +5494,21 @@
               </a:lnSpc>
             </a:pPr>
             <a:r>
-              <a:rPr lang="pt-BR" b="1" dirty="0" err="1">
+              <a:rPr lang="pt-BR" sz="1600" b="1" dirty="0" err="1">
                 <a:latin typeface="Times New Roman" panose="02020603050405020304" pitchFamily="18" charset="0"/>
                 <a:cs typeface="Times New Roman" panose="02020603050405020304" pitchFamily="18" charset="0"/>
               </a:rPr>
               <a:t>SessionCreationPolicy.STATELESS</a:t>
             </a:r>
             <a:r>
-              <a:rPr lang="pt-BR" b="1" dirty="0">
+              <a:rPr lang="pt-BR" sz="1600" b="1" dirty="0">
                 <a:latin typeface="Times New Roman" panose="02020603050405020304" pitchFamily="18" charset="0"/>
                 <a:cs typeface="Times New Roman" panose="02020603050405020304" pitchFamily="18" charset="0"/>
               </a:rPr>
               <a:t> </a:t>
             </a:r>
             <a:r>
-              <a:rPr lang="pt-BR" dirty="0">
+              <a:rPr lang="pt-BR" sz="1600" dirty="0">
                 <a:latin typeface="Times New Roman" panose="02020603050405020304" pitchFamily="18" charset="0"/>
                 <a:cs typeface="Times New Roman" panose="02020603050405020304" pitchFamily="18" charset="0"/>
               </a:rPr>
@@ -5520,18 +5522,25 @@
               </a:lnSpc>
             </a:pPr>
             <a:r>
-              <a:rPr lang="pt-BR" b="1" dirty="0">
+              <a:rPr lang="pt-BR" sz="1600" b="1" dirty="0">
                 <a:latin typeface="Times New Roman" panose="02020603050405020304" pitchFamily="18" charset="0"/>
                 <a:cs typeface="Times New Roman" panose="02020603050405020304" pitchFamily="18" charset="0"/>
               </a:rPr>
               <a:t>build() </a:t>
             </a:r>
             <a:r>
+              <a:rPr lang="pt-BR" sz="1600" dirty="0">
+                <a:latin typeface="Times New Roman" panose="02020603050405020304" pitchFamily="18" charset="0"/>
+                <a:cs typeface="Times New Roman" panose="02020603050405020304" pitchFamily="18" charset="0"/>
+              </a:rPr>
+              <a:t>– Finaliza a configuração e cria a cadeia de filtros de segurança</a:t>
+            </a:r>
+            <a:r>
               <a:rPr lang="pt-BR" dirty="0">
                 <a:latin typeface="Times New Roman" panose="02020603050405020304" pitchFamily="18" charset="0"/>
                 <a:cs typeface="Times New Roman" panose="02020603050405020304" pitchFamily="18" charset="0"/>
               </a:rPr>
-              <a:t>– Finaliza a configuração e cria a cadeia de filtros de segurança.</a:t>
+              <a:t>.</a:t>
             </a:r>
             <a:endParaRPr lang="pt-BR" sz="1600" dirty="0">
               <a:latin typeface="Times New Roman" panose="02020603050405020304" pitchFamily="18" charset="0"/>
@@ -5661,10 +5670,1124 @@
       </p:grpSpPr>
       <p:sp>
         <p:nvSpPr>
+          <p:cNvPr id="4" name="Título 1">
+            <a:extLst>
+              <a:ext uri="{FF2B5EF4-FFF2-40B4-BE49-F238E27FC236}">
+                <a16:creationId xmlns:a16="http://schemas.microsoft.com/office/drawing/2014/main" id="{EAEAB793-5EE6-490B-85D5-34D898F47AA7}"/>
+              </a:ext>
+            </a:extLst>
+          </p:cNvPr>
+          <p:cNvSpPr>
+            <a:spLocks noGrp="1"/>
+          </p:cNvSpPr>
+          <p:nvPr>
+            <p:ph type="title"/>
+          </p:nvPr>
+        </p:nvSpPr>
+        <p:spPr>
+          <a:xfrm>
+            <a:off x="749185" y="854420"/>
+            <a:ext cx="9409981" cy="448573"/>
+          </a:xfrm>
+        </p:spPr>
+        <p:txBody>
+          <a:bodyPr/>
+          <a:lstStyle/>
+          <a:p>
+            <a:r>
+              <a:rPr lang="pt-BR" dirty="0"/>
+              <a:t>Exemplo de Autenticação</a:t>
+            </a:r>
+          </a:p>
+        </p:txBody>
+      </p:sp>
+      <p:pic>
+        <p:nvPicPr>
+          <p:cNvPr id="5" name="Gráfico 4" descr="Monitor">
+            <a:extLst>
+              <a:ext uri="{FF2B5EF4-FFF2-40B4-BE49-F238E27FC236}">
+                <a16:creationId xmlns:a16="http://schemas.microsoft.com/office/drawing/2014/main" id="{46F5F4C7-69B9-4BF9-A6CB-AC07383203A9}"/>
+              </a:ext>
+            </a:extLst>
+          </p:cNvPr>
+          <p:cNvPicPr>
+            <a:picLocks noChangeAspect="1"/>
+          </p:cNvPicPr>
+          <p:nvPr/>
+        </p:nvPicPr>
+        <p:blipFill>
+          <a:blip r:embed="rId2">
+            <a:extLst>
+              <a:ext uri="{28A0092B-C50C-407E-A947-70E740481C1C}">
+                <a14:useLocalDpi xmlns:a14="http://schemas.microsoft.com/office/drawing/2010/main" val="0"/>
+              </a:ext>
+              <a:ext uri="{96DAC541-7B7A-43D3-8B79-37D633B846F1}">
+                <asvg:svgBlip xmlns:asvg="http://schemas.microsoft.com/office/drawing/2016/SVG/main" r:embed="rId3"/>
+              </a:ext>
+            </a:extLst>
+          </a:blip>
+          <a:stretch>
+            <a:fillRect/>
+          </a:stretch>
+        </p:blipFill>
+        <p:spPr>
+          <a:xfrm>
+            <a:off x="2434927" y="2981684"/>
+            <a:ext cx="1515533" cy="1515533"/>
+          </a:xfrm>
+          <a:prstGeom prst="rect">
+            <a:avLst/>
+          </a:prstGeom>
+        </p:spPr>
+      </p:pic>
+      <p:pic>
+        <p:nvPicPr>
+          <p:cNvPr id="6" name="Gráfico 5" descr="Servidor">
+            <a:extLst>
+              <a:ext uri="{FF2B5EF4-FFF2-40B4-BE49-F238E27FC236}">
+                <a16:creationId xmlns:a16="http://schemas.microsoft.com/office/drawing/2014/main" id="{C820F0BF-8216-4110-8480-5F500684FE4F}"/>
+              </a:ext>
+            </a:extLst>
+          </p:cNvPr>
+          <p:cNvPicPr>
+            <a:picLocks noChangeAspect="1"/>
+          </p:cNvPicPr>
+          <p:nvPr/>
+        </p:nvPicPr>
+        <p:blipFill>
+          <a:blip r:embed="rId4">
+            <a:extLst>
+              <a:ext uri="{28A0092B-C50C-407E-A947-70E740481C1C}">
+                <a14:useLocalDpi xmlns:a14="http://schemas.microsoft.com/office/drawing/2010/main" val="0"/>
+              </a:ext>
+              <a:ext uri="{96DAC541-7B7A-43D3-8B79-37D633B846F1}">
+                <asvg:svgBlip xmlns:asvg="http://schemas.microsoft.com/office/drawing/2016/SVG/main" r:embed="rId5"/>
+              </a:ext>
+            </a:extLst>
+          </a:blip>
+          <a:stretch>
+            <a:fillRect/>
+          </a:stretch>
+        </p:blipFill>
+        <p:spPr>
+          <a:xfrm>
+            <a:off x="6270326" y="2922417"/>
+            <a:ext cx="1574800" cy="1574800"/>
+          </a:xfrm>
+          <a:prstGeom prst="rect">
+            <a:avLst/>
+          </a:prstGeom>
+        </p:spPr>
+      </p:pic>
+      <p:grpSp>
+        <p:nvGrpSpPr>
+          <p:cNvPr id="7" name="Agrupar 6">
+            <a:extLst>
+              <a:ext uri="{FF2B5EF4-FFF2-40B4-BE49-F238E27FC236}">
+                <a16:creationId xmlns:a16="http://schemas.microsoft.com/office/drawing/2014/main" id="{D1340034-08AC-49B5-B4D5-9D9A839A2D9A}"/>
+              </a:ext>
+            </a:extLst>
+          </p:cNvPr>
+          <p:cNvGrpSpPr/>
+          <p:nvPr/>
+        </p:nvGrpSpPr>
+        <p:grpSpPr>
+          <a:xfrm>
+            <a:off x="750062" y="2688976"/>
+            <a:ext cx="1363134" cy="1635098"/>
+            <a:chOff x="1481667" y="4270218"/>
+            <a:chExt cx="1363134" cy="1635098"/>
+          </a:xfrm>
+        </p:grpSpPr>
+        <p:sp>
+          <p:nvSpPr>
+            <p:cNvPr id="8" name="Retângulo: Cantos Arredondados 7">
+              <a:extLst>
+                <a:ext uri="{FF2B5EF4-FFF2-40B4-BE49-F238E27FC236}">
+                  <a16:creationId xmlns:a16="http://schemas.microsoft.com/office/drawing/2014/main" id="{2FFB741E-A6CE-4ECC-A2B7-AA2491190E18}"/>
+                </a:ext>
+              </a:extLst>
+            </p:cNvPr>
+            <p:cNvSpPr/>
+            <p:nvPr/>
+          </p:nvSpPr>
+          <p:spPr>
+            <a:xfrm>
+              <a:off x="1481667" y="4706939"/>
+              <a:ext cx="1363134" cy="347134"/>
+            </a:xfrm>
+            <a:prstGeom prst="roundRect">
+              <a:avLst/>
+            </a:prstGeom>
+            <a:noFill/>
+            <a:ln w="28575">
+              <a:solidFill>
+                <a:schemeClr val="tx1"/>
+              </a:solidFill>
+            </a:ln>
+          </p:spPr>
+          <p:style>
+            <a:lnRef idx="2">
+              <a:schemeClr val="accent1">
+                <a:shade val="50000"/>
+              </a:schemeClr>
+            </a:lnRef>
+            <a:fillRef idx="1">
+              <a:schemeClr val="accent1"/>
+            </a:fillRef>
+            <a:effectRef idx="0">
+              <a:schemeClr val="accent1"/>
+            </a:effectRef>
+            <a:fontRef idx="minor">
+              <a:schemeClr val="lt1"/>
+            </a:fontRef>
+          </p:style>
+          <p:txBody>
+            <a:bodyPr rtlCol="0" anchor="ctr"/>
+            <a:lstStyle/>
+            <a:p>
+              <a:pPr algn="ctr"/>
+              <a:r>
+                <a:rPr lang="pt-BR" sz="1200" dirty="0">
+                  <a:solidFill>
+                    <a:schemeClr val="tx1"/>
+                  </a:solidFill>
+                  <a:latin typeface="Times New Roman" panose="02020603050405020304" pitchFamily="18" charset="0"/>
+                  <a:cs typeface="Times New Roman" panose="02020603050405020304" pitchFamily="18" charset="0"/>
+                </a:rPr>
+                <a:t>teste@gmail.com</a:t>
+              </a:r>
+            </a:p>
+          </p:txBody>
+        </p:sp>
+        <p:sp>
+          <p:nvSpPr>
+            <p:cNvPr id="9" name="CaixaDeTexto 8">
+              <a:extLst>
+                <a:ext uri="{FF2B5EF4-FFF2-40B4-BE49-F238E27FC236}">
+                  <a16:creationId xmlns:a16="http://schemas.microsoft.com/office/drawing/2014/main" id="{0CFDB697-5A36-4BA7-94D7-2071693F7DF1}"/>
+                </a:ext>
+              </a:extLst>
+            </p:cNvPr>
+            <p:cNvSpPr txBox="1"/>
+            <p:nvPr/>
+          </p:nvSpPr>
+          <p:spPr>
+            <a:xfrm>
+              <a:off x="1481667" y="4270218"/>
+              <a:ext cx="800219" cy="369332"/>
+            </a:xfrm>
+            <a:prstGeom prst="rect">
+              <a:avLst/>
+            </a:prstGeom>
+            <a:noFill/>
+          </p:spPr>
+          <p:txBody>
+            <a:bodyPr wrap="none" rtlCol="0">
+              <a:spAutoFit/>
+            </a:bodyPr>
+            <a:lstStyle/>
+            <a:p>
+              <a:r>
+                <a:rPr lang="pt-BR" dirty="0">
+                  <a:latin typeface="Times New Roman" panose="02020603050405020304" pitchFamily="18" charset="0"/>
+                  <a:cs typeface="Times New Roman" panose="02020603050405020304" pitchFamily="18" charset="0"/>
+                </a:rPr>
+                <a:t>Login:</a:t>
+              </a:r>
+            </a:p>
+          </p:txBody>
+        </p:sp>
+        <p:sp>
+          <p:nvSpPr>
+            <p:cNvPr id="10" name="Retângulo: Cantos Arredondados 9">
+              <a:extLst>
+                <a:ext uri="{FF2B5EF4-FFF2-40B4-BE49-F238E27FC236}">
+                  <a16:creationId xmlns:a16="http://schemas.microsoft.com/office/drawing/2014/main" id="{899A42BE-68F9-4EC0-A0EC-9B1E9EED7F13}"/>
+                </a:ext>
+              </a:extLst>
+            </p:cNvPr>
+            <p:cNvSpPr/>
+            <p:nvPr/>
+          </p:nvSpPr>
+          <p:spPr>
+            <a:xfrm>
+              <a:off x="1481667" y="5558182"/>
+              <a:ext cx="1363134" cy="347134"/>
+            </a:xfrm>
+            <a:prstGeom prst="roundRect">
+              <a:avLst/>
+            </a:prstGeom>
+            <a:noFill/>
+            <a:ln w="28575">
+              <a:solidFill>
+                <a:schemeClr val="tx1"/>
+              </a:solidFill>
+            </a:ln>
+          </p:spPr>
+          <p:style>
+            <a:lnRef idx="2">
+              <a:schemeClr val="accent1">
+                <a:shade val="50000"/>
+              </a:schemeClr>
+            </a:lnRef>
+            <a:fillRef idx="1">
+              <a:schemeClr val="accent1"/>
+            </a:fillRef>
+            <a:effectRef idx="0">
+              <a:schemeClr val="accent1"/>
+            </a:effectRef>
+            <a:fontRef idx="minor">
+              <a:schemeClr val="lt1"/>
+            </a:fontRef>
+          </p:style>
+          <p:txBody>
+            <a:bodyPr rot="0" spcFirstLastPara="0" vertOverflow="overflow" horzOverflow="overflow" vert="horz" wrap="square" lIns="91440" tIns="45720" rIns="91440" bIns="45720" numCol="1" spcCol="0" rtlCol="0" fromWordArt="0" anchor="ctr" anchorCtr="0" forceAA="0" compatLnSpc="1">
+              <a:prstTxWarp prst="textNoShape">
+                <a:avLst/>
+              </a:prstTxWarp>
+              <a:noAutofit/>
+            </a:bodyPr>
+            <a:lstStyle/>
+            <a:p>
+              <a:pPr algn="ctr"/>
+              <a:r>
+                <a:rPr lang="pt-BR" sz="1200" dirty="0">
+                  <a:solidFill>
+                    <a:schemeClr val="tx1"/>
+                  </a:solidFill>
+                  <a:latin typeface="Times New Roman" panose="02020603050405020304" pitchFamily="18" charset="0"/>
+                  <a:cs typeface="Times New Roman" panose="02020603050405020304" pitchFamily="18" charset="0"/>
+                </a:rPr>
+                <a:t>1234</a:t>
+              </a:r>
+            </a:p>
+          </p:txBody>
+        </p:sp>
+        <p:sp>
+          <p:nvSpPr>
+            <p:cNvPr id="11" name="CaixaDeTexto 10">
+              <a:extLst>
+                <a:ext uri="{FF2B5EF4-FFF2-40B4-BE49-F238E27FC236}">
+                  <a16:creationId xmlns:a16="http://schemas.microsoft.com/office/drawing/2014/main" id="{EAFF109E-894F-4A20-9345-3F08FA4596F1}"/>
+                </a:ext>
+              </a:extLst>
+            </p:cNvPr>
+            <p:cNvSpPr txBox="1"/>
+            <p:nvPr/>
+          </p:nvSpPr>
+          <p:spPr>
+            <a:xfrm>
+              <a:off x="1481667" y="5121462"/>
+              <a:ext cx="813043" cy="369332"/>
+            </a:xfrm>
+            <a:prstGeom prst="rect">
+              <a:avLst/>
+            </a:prstGeom>
+            <a:noFill/>
+          </p:spPr>
+          <p:txBody>
+            <a:bodyPr wrap="none" rtlCol="0">
+              <a:spAutoFit/>
+            </a:bodyPr>
+            <a:lstStyle/>
+            <a:p>
+              <a:r>
+                <a:rPr lang="pt-BR" dirty="0">
+                  <a:latin typeface="Times New Roman" panose="02020603050405020304" pitchFamily="18" charset="0"/>
+                  <a:cs typeface="Times New Roman" panose="02020603050405020304" pitchFamily="18" charset="0"/>
+                </a:rPr>
+                <a:t>Senha:</a:t>
+              </a:r>
+            </a:p>
+          </p:txBody>
+        </p:sp>
+      </p:grpSp>
+      <p:cxnSp>
+        <p:nvCxnSpPr>
+          <p:cNvPr id="12" name="Conector de Seta Reta 11">
+            <a:extLst>
+              <a:ext uri="{FF2B5EF4-FFF2-40B4-BE49-F238E27FC236}">
+                <a16:creationId xmlns:a16="http://schemas.microsoft.com/office/drawing/2014/main" id="{BD843AD6-B2AD-4803-9EEC-579B0E7E5160}"/>
+              </a:ext>
+            </a:extLst>
+          </p:cNvPr>
+          <p:cNvCxnSpPr>
+            <a:cxnSpLocks/>
+          </p:cNvCxnSpPr>
+          <p:nvPr/>
+        </p:nvCxnSpPr>
+        <p:spPr>
+          <a:xfrm>
+            <a:off x="4094392" y="3506525"/>
+            <a:ext cx="2201333" cy="0"/>
+          </a:xfrm>
+          <a:prstGeom prst="straightConnector1">
+            <a:avLst/>
+          </a:prstGeom>
+          <a:ln w="38100">
+            <a:solidFill>
+              <a:schemeClr val="tx1">
+                <a:lumMod val="95000"/>
+                <a:lumOff val="5000"/>
+              </a:schemeClr>
+            </a:solidFill>
+            <a:tailEnd type="triangle"/>
+          </a:ln>
+        </p:spPr>
+        <p:style>
+          <a:lnRef idx="1">
+            <a:schemeClr val="accent1"/>
+          </a:lnRef>
+          <a:fillRef idx="0">
+            <a:schemeClr val="accent1"/>
+          </a:fillRef>
+          <a:effectRef idx="0">
+            <a:schemeClr val="accent1"/>
+          </a:effectRef>
+          <a:fontRef idx="minor">
+            <a:schemeClr val="tx1"/>
+          </a:fontRef>
+        </p:style>
+      </p:cxnSp>
+      <p:cxnSp>
+        <p:nvCxnSpPr>
+          <p:cNvPr id="13" name="Conector de Seta Reta 12">
+            <a:extLst>
+              <a:ext uri="{FF2B5EF4-FFF2-40B4-BE49-F238E27FC236}">
+                <a16:creationId xmlns:a16="http://schemas.microsoft.com/office/drawing/2014/main" id="{8E830042-DD0B-4F4E-BD3F-E72EA08DD9E8}"/>
+              </a:ext>
+            </a:extLst>
+          </p:cNvPr>
+          <p:cNvCxnSpPr>
+            <a:cxnSpLocks/>
+          </p:cNvCxnSpPr>
+          <p:nvPr/>
+        </p:nvCxnSpPr>
+        <p:spPr>
+          <a:xfrm flipH="1">
+            <a:off x="4060526" y="3976940"/>
+            <a:ext cx="2167466" cy="29026"/>
+          </a:xfrm>
+          <a:prstGeom prst="straightConnector1">
+            <a:avLst/>
+          </a:prstGeom>
+          <a:ln w="38100">
+            <a:solidFill>
+              <a:schemeClr val="tx1">
+                <a:lumMod val="95000"/>
+                <a:lumOff val="5000"/>
+              </a:schemeClr>
+            </a:solidFill>
+            <a:tailEnd type="triangle"/>
+          </a:ln>
+        </p:spPr>
+        <p:style>
+          <a:lnRef idx="1">
+            <a:schemeClr val="accent1"/>
+          </a:lnRef>
+          <a:fillRef idx="0">
+            <a:schemeClr val="accent1"/>
+          </a:fillRef>
+          <a:effectRef idx="0">
+            <a:schemeClr val="accent1"/>
+          </a:effectRef>
+          <a:fontRef idx="minor">
+            <a:schemeClr val="tx1"/>
+          </a:fontRef>
+        </p:style>
+      </p:cxnSp>
+      <p:sp>
+        <p:nvSpPr>
+          <p:cNvPr id="15" name="CaixaDeTexto 14">
+            <a:extLst>
+              <a:ext uri="{FF2B5EF4-FFF2-40B4-BE49-F238E27FC236}">
+                <a16:creationId xmlns:a16="http://schemas.microsoft.com/office/drawing/2014/main" id="{16F73D86-E9C1-41F8-BF9D-CD84C5F5009F}"/>
+              </a:ext>
+            </a:extLst>
+          </p:cNvPr>
+          <p:cNvSpPr txBox="1"/>
+          <p:nvPr/>
+        </p:nvSpPr>
+        <p:spPr>
+          <a:xfrm>
+            <a:off x="4116978" y="2905780"/>
+            <a:ext cx="2254948" cy="523220"/>
+          </a:xfrm>
+          <a:prstGeom prst="rect">
+            <a:avLst/>
+          </a:prstGeom>
+          <a:noFill/>
+        </p:spPr>
+        <p:txBody>
+          <a:bodyPr wrap="square" rtlCol="0">
+            <a:spAutoFit/>
+          </a:bodyPr>
+          <a:lstStyle/>
+          <a:p>
+            <a:pPr algn="just"/>
+            <a:r>
+              <a:rPr lang="pt-BR" sz="1400" dirty="0">
+                <a:latin typeface="Times New Roman" panose="02020603050405020304" pitchFamily="18" charset="0"/>
+                <a:cs typeface="Times New Roman" panose="02020603050405020304" pitchFamily="18" charset="0"/>
+              </a:rPr>
+              <a:t>“login” : “teste@gmail.com”</a:t>
+            </a:r>
+          </a:p>
+          <a:p>
+            <a:pPr algn="just"/>
+            <a:r>
+              <a:rPr lang="pt-BR" sz="1400" dirty="0">
+                <a:latin typeface="Times New Roman" panose="02020603050405020304" pitchFamily="18" charset="0"/>
+                <a:cs typeface="Times New Roman" panose="02020603050405020304" pitchFamily="18" charset="0"/>
+              </a:rPr>
+              <a:t>“senha” : “1234”</a:t>
+            </a:r>
+          </a:p>
+        </p:txBody>
+      </p:sp>
+      <p:grpSp>
+        <p:nvGrpSpPr>
+          <p:cNvPr id="30" name="Agrupar 29">
+            <a:extLst>
+              <a:ext uri="{FF2B5EF4-FFF2-40B4-BE49-F238E27FC236}">
+                <a16:creationId xmlns:a16="http://schemas.microsoft.com/office/drawing/2014/main" id="{79D8A56A-E5AC-4365-BFFE-36854E223F53}"/>
+              </a:ext>
+            </a:extLst>
+          </p:cNvPr>
+          <p:cNvGrpSpPr/>
+          <p:nvPr/>
+        </p:nvGrpSpPr>
+        <p:grpSpPr>
+          <a:xfrm>
+            <a:off x="4619248" y="1727183"/>
+            <a:ext cx="1250407" cy="1101072"/>
+            <a:chOff x="4797855" y="2040611"/>
+            <a:chExt cx="1250407" cy="1101072"/>
+          </a:xfrm>
+        </p:grpSpPr>
+        <p:sp>
+          <p:nvSpPr>
+            <p:cNvPr id="16" name="Elipse 15">
+              <a:extLst>
+                <a:ext uri="{FF2B5EF4-FFF2-40B4-BE49-F238E27FC236}">
+                  <a16:creationId xmlns:a16="http://schemas.microsoft.com/office/drawing/2014/main" id="{F51922C7-E34C-43C3-84B5-D5F8228256E2}"/>
+                </a:ext>
+              </a:extLst>
+            </p:cNvPr>
+            <p:cNvSpPr/>
+            <p:nvPr/>
+          </p:nvSpPr>
+          <p:spPr>
+            <a:xfrm>
+              <a:off x="5063059" y="2040611"/>
+              <a:ext cx="720000" cy="720000"/>
+            </a:xfrm>
+            <a:prstGeom prst="ellipse">
+              <a:avLst/>
+            </a:prstGeom>
+            <a:solidFill>
+              <a:srgbClr val="043073"/>
+            </a:solidFill>
+            <a:ln>
+              <a:solidFill>
+                <a:srgbClr val="043073"/>
+              </a:solidFill>
+            </a:ln>
+          </p:spPr>
+          <p:style>
+            <a:lnRef idx="2">
+              <a:schemeClr val="accent1">
+                <a:shade val="50000"/>
+              </a:schemeClr>
+            </a:lnRef>
+            <a:fillRef idx="1">
+              <a:schemeClr val="accent1"/>
+            </a:fillRef>
+            <a:effectRef idx="0">
+              <a:schemeClr val="accent1"/>
+            </a:effectRef>
+            <a:fontRef idx="minor">
+              <a:schemeClr val="lt1"/>
+            </a:fontRef>
+          </p:style>
+          <p:txBody>
+            <a:bodyPr rtlCol="0" anchor="ctr"/>
+            <a:lstStyle/>
+            <a:p>
+              <a:pPr algn="ctr"/>
+              <a:r>
+                <a:rPr lang="pt-BR" dirty="0">
+                  <a:latin typeface="Times New Roman" panose="02020603050405020304" pitchFamily="18" charset="0"/>
+                  <a:cs typeface="Times New Roman" panose="02020603050405020304" pitchFamily="18" charset="0"/>
+                </a:rPr>
+                <a:t>1</a:t>
+              </a:r>
+            </a:p>
+          </p:txBody>
+        </p:sp>
+        <p:sp>
+          <p:nvSpPr>
+            <p:cNvPr id="17" name="CaixaDeTexto 16">
+              <a:extLst>
+                <a:ext uri="{FF2B5EF4-FFF2-40B4-BE49-F238E27FC236}">
+                  <a16:creationId xmlns:a16="http://schemas.microsoft.com/office/drawing/2014/main" id="{248804F4-780B-4EEC-B5C9-ED0B8992DAF8}"/>
+                </a:ext>
+              </a:extLst>
+            </p:cNvPr>
+            <p:cNvSpPr txBox="1"/>
+            <p:nvPr/>
+          </p:nvSpPr>
+          <p:spPr>
+            <a:xfrm>
+              <a:off x="4797855" y="2833906"/>
+              <a:ext cx="1250407" cy="307777"/>
+            </a:xfrm>
+            <a:prstGeom prst="rect">
+              <a:avLst/>
+            </a:prstGeom>
+            <a:noFill/>
+          </p:spPr>
+          <p:txBody>
+            <a:bodyPr wrap="none" rtlCol="0">
+              <a:spAutoFit/>
+            </a:bodyPr>
+            <a:lstStyle/>
+            <a:p>
+              <a:r>
+                <a:rPr lang="pt-BR" sz="1400" dirty="0">
+                  <a:latin typeface="Times New Roman" panose="02020603050405020304" pitchFamily="18" charset="0"/>
+                  <a:cs typeface="Times New Roman" panose="02020603050405020304" pitchFamily="18" charset="0"/>
+                </a:rPr>
+                <a:t>HTTP </a:t>
+              </a:r>
+              <a:r>
+                <a:rPr lang="pt-BR" sz="1400" dirty="0" err="1">
+                  <a:latin typeface="Times New Roman" panose="02020603050405020304" pitchFamily="18" charset="0"/>
+                  <a:cs typeface="Times New Roman" panose="02020603050405020304" pitchFamily="18" charset="0"/>
+                </a:rPr>
+                <a:t>Request</a:t>
+              </a:r>
+              <a:endParaRPr lang="pt-BR" sz="1400" dirty="0">
+                <a:latin typeface="Times New Roman" panose="02020603050405020304" pitchFamily="18" charset="0"/>
+                <a:cs typeface="Times New Roman" panose="02020603050405020304" pitchFamily="18" charset="0"/>
+              </a:endParaRPr>
+            </a:p>
+          </p:txBody>
+        </p:sp>
+      </p:grpSp>
+      <p:grpSp>
+        <p:nvGrpSpPr>
+          <p:cNvPr id="18" name="Agrupar 17">
+            <a:extLst>
+              <a:ext uri="{FF2B5EF4-FFF2-40B4-BE49-F238E27FC236}">
+                <a16:creationId xmlns:a16="http://schemas.microsoft.com/office/drawing/2014/main" id="{3B9D514F-AB55-4678-81BC-89B5FCF2F6D5}"/>
+              </a:ext>
+            </a:extLst>
+          </p:cNvPr>
+          <p:cNvGrpSpPr/>
+          <p:nvPr/>
+        </p:nvGrpSpPr>
+        <p:grpSpPr>
+          <a:xfrm>
+            <a:off x="8205546" y="1727183"/>
+            <a:ext cx="1000338" cy="1101072"/>
+            <a:chOff x="9722212" y="1685036"/>
+            <a:chExt cx="1000338" cy="1101072"/>
+          </a:xfrm>
+        </p:grpSpPr>
+        <p:sp>
+          <p:nvSpPr>
+            <p:cNvPr id="19" name="Elipse 18">
+              <a:extLst>
+                <a:ext uri="{FF2B5EF4-FFF2-40B4-BE49-F238E27FC236}">
+                  <a16:creationId xmlns:a16="http://schemas.microsoft.com/office/drawing/2014/main" id="{D54441C3-C7E3-468C-ADB5-ADE26AE782FF}"/>
+                </a:ext>
+              </a:extLst>
+            </p:cNvPr>
+            <p:cNvSpPr/>
+            <p:nvPr/>
+          </p:nvSpPr>
+          <p:spPr>
+            <a:xfrm>
+              <a:off x="9862381" y="1685036"/>
+              <a:ext cx="720000" cy="720000"/>
+            </a:xfrm>
+            <a:prstGeom prst="ellipse">
+              <a:avLst/>
+            </a:prstGeom>
+            <a:solidFill>
+              <a:srgbClr val="043073"/>
+            </a:solidFill>
+            <a:ln>
+              <a:solidFill>
+                <a:srgbClr val="043073"/>
+              </a:solidFill>
+            </a:ln>
+          </p:spPr>
+          <p:style>
+            <a:lnRef idx="2">
+              <a:schemeClr val="accent1">
+                <a:shade val="50000"/>
+              </a:schemeClr>
+            </a:lnRef>
+            <a:fillRef idx="1">
+              <a:schemeClr val="accent1"/>
+            </a:fillRef>
+            <a:effectRef idx="0">
+              <a:schemeClr val="accent1"/>
+            </a:effectRef>
+            <a:fontRef idx="minor">
+              <a:schemeClr val="lt1"/>
+            </a:fontRef>
+          </p:style>
+          <p:txBody>
+            <a:bodyPr rtlCol="0" anchor="ctr"/>
+            <a:lstStyle/>
+            <a:p>
+              <a:pPr algn="ctr"/>
+              <a:r>
+                <a:rPr lang="pt-BR" dirty="0">
+                  <a:latin typeface="Times New Roman" panose="02020603050405020304" pitchFamily="18" charset="0"/>
+                  <a:cs typeface="Times New Roman" panose="02020603050405020304" pitchFamily="18" charset="0"/>
+                </a:rPr>
+                <a:t>2</a:t>
+              </a:r>
+            </a:p>
+          </p:txBody>
+        </p:sp>
+        <p:sp>
+          <p:nvSpPr>
+            <p:cNvPr id="20" name="CaixaDeTexto 19">
+              <a:extLst>
+                <a:ext uri="{FF2B5EF4-FFF2-40B4-BE49-F238E27FC236}">
+                  <a16:creationId xmlns:a16="http://schemas.microsoft.com/office/drawing/2014/main" id="{B58A097B-8127-4664-A1A7-1C3AD0446D2D}"/>
+                </a:ext>
+              </a:extLst>
+            </p:cNvPr>
+            <p:cNvSpPr txBox="1"/>
+            <p:nvPr/>
+          </p:nvSpPr>
+          <p:spPr>
+            <a:xfrm>
+              <a:off x="9722212" y="2478331"/>
+              <a:ext cx="1000338" cy="307777"/>
+            </a:xfrm>
+            <a:prstGeom prst="rect">
+              <a:avLst/>
+            </a:prstGeom>
+            <a:noFill/>
+          </p:spPr>
+          <p:txBody>
+            <a:bodyPr wrap="none" rtlCol="0">
+              <a:spAutoFit/>
+            </a:bodyPr>
+            <a:lstStyle/>
+            <a:p>
+              <a:r>
+                <a:rPr lang="pt-BR" sz="1400" dirty="0">
+                  <a:latin typeface="Times New Roman" panose="02020603050405020304" pitchFamily="18" charset="0"/>
+                  <a:cs typeface="Times New Roman" panose="02020603050405020304" pitchFamily="18" charset="0"/>
+                </a:rPr>
+                <a:t>SQL </a:t>
+              </a:r>
+              <a:r>
+                <a:rPr lang="pt-BR" sz="1400" dirty="0" err="1">
+                  <a:latin typeface="Times New Roman" panose="02020603050405020304" pitchFamily="18" charset="0"/>
+                  <a:cs typeface="Times New Roman" panose="02020603050405020304" pitchFamily="18" charset="0"/>
+                </a:rPr>
+                <a:t>Select</a:t>
+              </a:r>
+              <a:endParaRPr lang="pt-BR" sz="1400" dirty="0">
+                <a:latin typeface="Times New Roman" panose="02020603050405020304" pitchFamily="18" charset="0"/>
+                <a:cs typeface="Times New Roman" panose="02020603050405020304" pitchFamily="18" charset="0"/>
+              </a:endParaRPr>
+            </a:p>
+          </p:txBody>
+        </p:sp>
+      </p:grpSp>
+      <p:pic>
+        <p:nvPicPr>
+          <p:cNvPr id="34" name="Gráfico 33" descr="Banco de dados">
+            <a:extLst>
+              <a:ext uri="{FF2B5EF4-FFF2-40B4-BE49-F238E27FC236}">
+                <a16:creationId xmlns:a16="http://schemas.microsoft.com/office/drawing/2014/main" id="{CB4AA1FB-CFA3-43A1-A49B-B7E7A9C5708F}"/>
+              </a:ext>
+            </a:extLst>
+          </p:cNvPr>
+          <p:cNvPicPr>
+            <a:picLocks noChangeAspect="1"/>
+          </p:cNvPicPr>
+          <p:nvPr/>
+        </p:nvPicPr>
+        <p:blipFill>
+          <a:blip r:embed="rId6">
+            <a:extLst>
+              <a:ext uri="{28A0092B-C50C-407E-A947-70E740481C1C}">
+                <a14:useLocalDpi xmlns:a14="http://schemas.microsoft.com/office/drawing/2010/main" val="0"/>
+              </a:ext>
+              <a:ext uri="{96DAC541-7B7A-43D3-8B79-37D633B846F1}">
+                <asvg:svgBlip xmlns:asvg="http://schemas.microsoft.com/office/drawing/2016/SVG/main" r:embed="rId7"/>
+              </a:ext>
+            </a:extLst>
+          </a:blip>
+          <a:stretch>
+            <a:fillRect/>
+          </a:stretch>
+        </p:blipFill>
+        <p:spPr>
+          <a:xfrm>
+            <a:off x="9648525" y="2842743"/>
+            <a:ext cx="1793413" cy="1793413"/>
+          </a:xfrm>
+          <a:prstGeom prst="rect">
+            <a:avLst/>
+          </a:prstGeom>
+        </p:spPr>
+      </p:pic>
+      <p:cxnSp>
+        <p:nvCxnSpPr>
+          <p:cNvPr id="35" name="Conector de Seta Reta 34">
+            <a:extLst>
+              <a:ext uri="{FF2B5EF4-FFF2-40B4-BE49-F238E27FC236}">
+                <a16:creationId xmlns:a16="http://schemas.microsoft.com/office/drawing/2014/main" id="{935CBB51-E06F-4509-9AEC-1E0F6846E073}"/>
+              </a:ext>
+            </a:extLst>
+          </p:cNvPr>
+          <p:cNvCxnSpPr>
+            <a:cxnSpLocks/>
+          </p:cNvCxnSpPr>
+          <p:nvPr/>
+        </p:nvCxnSpPr>
+        <p:spPr>
+          <a:xfrm flipV="1">
+            <a:off x="7762906" y="3506525"/>
+            <a:ext cx="1885619" cy="9129"/>
+          </a:xfrm>
+          <a:prstGeom prst="straightConnector1">
+            <a:avLst/>
+          </a:prstGeom>
+          <a:ln w="38100">
+            <a:solidFill>
+              <a:schemeClr val="tx1">
+                <a:lumMod val="95000"/>
+                <a:lumOff val="5000"/>
+              </a:schemeClr>
+            </a:solidFill>
+            <a:tailEnd type="triangle"/>
+          </a:ln>
+        </p:spPr>
+        <p:style>
+          <a:lnRef idx="1">
+            <a:schemeClr val="accent1"/>
+          </a:lnRef>
+          <a:fillRef idx="0">
+            <a:schemeClr val="accent1"/>
+          </a:fillRef>
+          <a:effectRef idx="0">
+            <a:schemeClr val="accent1"/>
+          </a:effectRef>
+          <a:fontRef idx="minor">
+            <a:schemeClr val="tx1"/>
+          </a:fontRef>
+        </p:style>
+      </p:cxnSp>
+      <p:grpSp>
+        <p:nvGrpSpPr>
+          <p:cNvPr id="39" name="Agrupar 38">
+            <a:extLst>
+              <a:ext uri="{FF2B5EF4-FFF2-40B4-BE49-F238E27FC236}">
+                <a16:creationId xmlns:a16="http://schemas.microsoft.com/office/drawing/2014/main" id="{A339DA06-E376-4DB9-A686-DEFB35709935}"/>
+              </a:ext>
+            </a:extLst>
+          </p:cNvPr>
+          <p:cNvGrpSpPr/>
+          <p:nvPr/>
+        </p:nvGrpSpPr>
+        <p:grpSpPr>
+          <a:xfrm>
+            <a:off x="6494816" y="4721325"/>
+            <a:ext cx="1125821" cy="1316515"/>
+            <a:chOff x="9697448" y="1817445"/>
+            <a:chExt cx="1125821" cy="1316515"/>
+          </a:xfrm>
+        </p:grpSpPr>
+        <p:sp>
+          <p:nvSpPr>
+            <p:cNvPr id="40" name="Elipse 39">
+              <a:extLst>
+                <a:ext uri="{FF2B5EF4-FFF2-40B4-BE49-F238E27FC236}">
+                  <a16:creationId xmlns:a16="http://schemas.microsoft.com/office/drawing/2014/main" id="{D3100A8D-BB60-4FD5-880C-47A24C5C11ED}"/>
+                </a:ext>
+              </a:extLst>
+            </p:cNvPr>
+            <p:cNvSpPr/>
+            <p:nvPr/>
+          </p:nvSpPr>
+          <p:spPr>
+            <a:xfrm>
+              <a:off x="9900358" y="1817445"/>
+              <a:ext cx="720000" cy="720000"/>
+            </a:xfrm>
+            <a:prstGeom prst="ellipse">
+              <a:avLst/>
+            </a:prstGeom>
+            <a:solidFill>
+              <a:srgbClr val="043073"/>
+            </a:solidFill>
+            <a:ln>
+              <a:solidFill>
+                <a:srgbClr val="043073"/>
+              </a:solidFill>
+            </a:ln>
+          </p:spPr>
+          <p:style>
+            <a:lnRef idx="2">
+              <a:schemeClr val="accent1">
+                <a:shade val="50000"/>
+              </a:schemeClr>
+            </a:lnRef>
+            <a:fillRef idx="1">
+              <a:schemeClr val="accent1"/>
+            </a:fillRef>
+            <a:effectRef idx="0">
+              <a:schemeClr val="accent1"/>
+            </a:effectRef>
+            <a:fontRef idx="minor">
+              <a:schemeClr val="lt1"/>
+            </a:fontRef>
+          </p:style>
+          <p:txBody>
+            <a:bodyPr rtlCol="0" anchor="ctr"/>
+            <a:lstStyle/>
+            <a:p>
+              <a:pPr algn="ctr"/>
+              <a:r>
+                <a:rPr lang="pt-BR" dirty="0">
+                  <a:latin typeface="Times New Roman" panose="02020603050405020304" pitchFamily="18" charset="0"/>
+                  <a:cs typeface="Times New Roman" panose="02020603050405020304" pitchFamily="18" charset="0"/>
+                </a:rPr>
+                <a:t>3</a:t>
+              </a:r>
+            </a:p>
+          </p:txBody>
+        </p:sp>
+        <p:sp>
+          <p:nvSpPr>
+            <p:cNvPr id="41" name="CaixaDeTexto 40">
+              <a:extLst>
+                <a:ext uri="{FF2B5EF4-FFF2-40B4-BE49-F238E27FC236}">
+                  <a16:creationId xmlns:a16="http://schemas.microsoft.com/office/drawing/2014/main" id="{9B1083FB-94AF-4A2A-84A7-9F284E0293EF}"/>
+                </a:ext>
+              </a:extLst>
+            </p:cNvPr>
+            <p:cNvSpPr txBox="1"/>
+            <p:nvPr/>
+          </p:nvSpPr>
+          <p:spPr>
+            <a:xfrm>
+              <a:off x="9697448" y="2610740"/>
+              <a:ext cx="1125821" cy="523220"/>
+            </a:xfrm>
+            <a:prstGeom prst="rect">
+              <a:avLst/>
+            </a:prstGeom>
+            <a:noFill/>
+          </p:spPr>
+          <p:txBody>
+            <a:bodyPr wrap="none" rtlCol="0">
+              <a:spAutoFit/>
+            </a:bodyPr>
+            <a:lstStyle/>
+            <a:p>
+              <a:pPr algn="ctr"/>
+              <a:r>
+                <a:rPr lang="pt-BR" sz="1400" dirty="0">
+                  <a:latin typeface="Times New Roman" panose="02020603050405020304" pitchFamily="18" charset="0"/>
+                  <a:cs typeface="Times New Roman" panose="02020603050405020304" pitchFamily="18" charset="0"/>
+                </a:rPr>
+                <a:t>Gerar Token </a:t>
+              </a:r>
+            </a:p>
+            <a:p>
+              <a:pPr algn="ctr"/>
+              <a:r>
+                <a:rPr lang="pt-BR" sz="1400" dirty="0">
+                  <a:latin typeface="Times New Roman" panose="02020603050405020304" pitchFamily="18" charset="0"/>
+                  <a:cs typeface="Times New Roman" panose="02020603050405020304" pitchFamily="18" charset="0"/>
+                </a:rPr>
+                <a:t>JWT</a:t>
+              </a:r>
+            </a:p>
+          </p:txBody>
+        </p:sp>
+      </p:grpSp>
+      <p:grpSp>
+        <p:nvGrpSpPr>
+          <p:cNvPr id="42" name="Agrupar 41">
+            <a:extLst>
+              <a:ext uri="{FF2B5EF4-FFF2-40B4-BE49-F238E27FC236}">
+                <a16:creationId xmlns:a16="http://schemas.microsoft.com/office/drawing/2014/main" id="{BCA9EFD4-9DFE-4FA0-BBFB-E49B65CB8DED}"/>
+              </a:ext>
+            </a:extLst>
+          </p:cNvPr>
+          <p:cNvGrpSpPr/>
+          <p:nvPr/>
+        </p:nvGrpSpPr>
+        <p:grpSpPr>
+          <a:xfrm>
+            <a:off x="3231998" y="4721325"/>
+            <a:ext cx="1385507" cy="1316515"/>
+            <a:chOff x="9536581" y="1817445"/>
+            <a:chExt cx="1385507" cy="1316515"/>
+          </a:xfrm>
+        </p:grpSpPr>
+        <p:sp>
+          <p:nvSpPr>
+            <p:cNvPr id="43" name="Elipse 42">
+              <a:extLst>
+                <a:ext uri="{FF2B5EF4-FFF2-40B4-BE49-F238E27FC236}">
+                  <a16:creationId xmlns:a16="http://schemas.microsoft.com/office/drawing/2014/main" id="{E1C5F67D-2A44-4E6E-97E6-32F6BA8A5F2D}"/>
+                </a:ext>
+              </a:extLst>
+            </p:cNvPr>
+            <p:cNvSpPr/>
+            <p:nvPr/>
+          </p:nvSpPr>
+          <p:spPr>
+            <a:xfrm>
+              <a:off x="9869334" y="1817445"/>
+              <a:ext cx="720000" cy="720000"/>
+            </a:xfrm>
+            <a:prstGeom prst="ellipse">
+              <a:avLst/>
+            </a:prstGeom>
+            <a:solidFill>
+              <a:srgbClr val="043073"/>
+            </a:solidFill>
+            <a:ln>
+              <a:solidFill>
+                <a:srgbClr val="043073"/>
+              </a:solidFill>
+            </a:ln>
+          </p:spPr>
+          <p:style>
+            <a:lnRef idx="2">
+              <a:schemeClr val="accent1">
+                <a:shade val="50000"/>
+              </a:schemeClr>
+            </a:lnRef>
+            <a:fillRef idx="1">
+              <a:schemeClr val="accent1"/>
+            </a:fillRef>
+            <a:effectRef idx="0">
+              <a:schemeClr val="accent1"/>
+            </a:effectRef>
+            <a:fontRef idx="minor">
+              <a:schemeClr val="lt1"/>
+            </a:fontRef>
+          </p:style>
+          <p:txBody>
+            <a:bodyPr rtlCol="0" anchor="ctr"/>
+            <a:lstStyle/>
+            <a:p>
+              <a:pPr algn="ctr"/>
+              <a:r>
+                <a:rPr lang="pt-BR" dirty="0">
+                  <a:latin typeface="Times New Roman" panose="02020603050405020304" pitchFamily="18" charset="0"/>
+                  <a:cs typeface="Times New Roman" panose="02020603050405020304" pitchFamily="18" charset="0"/>
+                </a:rPr>
+                <a:t>4</a:t>
+              </a:r>
+            </a:p>
+          </p:txBody>
+        </p:sp>
+        <p:sp>
+          <p:nvSpPr>
+            <p:cNvPr id="44" name="CaixaDeTexto 43">
+              <a:extLst>
+                <a:ext uri="{FF2B5EF4-FFF2-40B4-BE49-F238E27FC236}">
+                  <a16:creationId xmlns:a16="http://schemas.microsoft.com/office/drawing/2014/main" id="{877A3597-7FBD-40D9-BE90-979ED001732A}"/>
+                </a:ext>
+              </a:extLst>
+            </p:cNvPr>
+            <p:cNvSpPr txBox="1"/>
+            <p:nvPr/>
+          </p:nvSpPr>
+          <p:spPr>
+            <a:xfrm>
+              <a:off x="9536581" y="2610740"/>
+              <a:ext cx="1385507" cy="523220"/>
+            </a:xfrm>
+            <a:prstGeom prst="rect">
+              <a:avLst/>
+            </a:prstGeom>
+            <a:noFill/>
+          </p:spPr>
+          <p:txBody>
+            <a:bodyPr wrap="none" rtlCol="0">
+              <a:spAutoFit/>
+            </a:bodyPr>
+            <a:lstStyle/>
+            <a:p>
+              <a:pPr algn="ctr"/>
+              <a:r>
+                <a:rPr lang="pt-BR" sz="1400" dirty="0">
+                  <a:latin typeface="Times New Roman" panose="02020603050405020304" pitchFamily="18" charset="0"/>
+                  <a:cs typeface="Times New Roman" panose="02020603050405020304" pitchFamily="18" charset="0"/>
+                </a:rPr>
+                <a:t>Devolver Token </a:t>
+              </a:r>
+            </a:p>
+            <a:p>
+              <a:pPr algn="ctr"/>
+              <a:r>
+                <a:rPr lang="pt-BR" sz="1400" dirty="0">
+                  <a:latin typeface="Times New Roman" panose="02020603050405020304" pitchFamily="18" charset="0"/>
+                  <a:cs typeface="Times New Roman" panose="02020603050405020304" pitchFamily="18" charset="0"/>
+                </a:rPr>
+                <a:t>JWT</a:t>
+              </a:r>
+            </a:p>
+          </p:txBody>
+        </p:sp>
+      </p:grpSp>
+    </p:spTree>
+    <p:extLst>
+      <p:ext uri="{BB962C8B-B14F-4D97-AF65-F5344CB8AC3E}">
+        <p14:creationId xmlns:p14="http://schemas.microsoft.com/office/powerpoint/2010/main" val="3287424128"/>
+      </p:ext>
+    </p:extLst>
+  </p:cSld>
+  <p:clrMapOvr>
+    <a:masterClrMapping/>
+  </p:clrMapOvr>
+</p:sld>
+</file>
+
+<file path=ppt/slides/slide18.xml><?xml version="1.0" encoding="utf-8"?>
+<p:sld xmlns:a="http://schemas.openxmlformats.org/drawingml/2006/main" xmlns:r="http://schemas.openxmlformats.org/officeDocument/2006/relationships" xmlns:p="http://schemas.openxmlformats.org/presentationml/2006/main">
+  <p:cSld>
+    <p:spTree>
+      <p:nvGrpSpPr>
+        <p:cNvPr id="1" name=""/>
+        <p:cNvGrpSpPr/>
+        <p:nvPr/>
+      </p:nvGrpSpPr>
+      <p:grpSpPr>
+        <a:xfrm>
+          <a:off x="0" y="0"/>
+          <a:ext cx="0" cy="0"/>
+          <a:chOff x="0" y="0"/>
+          <a:chExt cx="0" cy="0"/>
+        </a:xfrm>
+      </p:grpSpPr>
+      <p:sp>
+        <p:nvSpPr>
           <p:cNvPr id="2" name="Título 1">
             <a:extLst>
               <a:ext uri="{FF2B5EF4-FFF2-40B4-BE49-F238E27FC236}">
-                <a16:creationId xmlns:a16="http://schemas.microsoft.com/office/drawing/2014/main" id="{40222ED1-4D9C-4C6F-A26D-52FA0E4306F5}"/>
+                <a16:creationId xmlns:a16="http://schemas.microsoft.com/office/drawing/2014/main" id="{28984EEA-607C-4DFE-9B48-E64B7C3F6445}"/>
               </a:ext>
             </a:extLst>
           </p:cNvPr>
@@ -5680,7 +6803,11 @@
           <a:bodyPr/>
           <a:lstStyle/>
           <a:p>
-            <a:endParaRPr lang="pt-BR"/>
+            <a:r>
+              <a:rPr lang="pt-BR" dirty="0" err="1"/>
+              <a:t>AuthenticationManager</a:t>
+            </a:r>
+            <a:endParaRPr lang="pt-BR" dirty="0"/>
           </a:p>
         </p:txBody>
       </p:sp>
@@ -5689,7 +6816,7 @@
           <p:cNvPr id="3" name="Espaço Reservado para Conteúdo 2">
             <a:extLst>
               <a:ext uri="{FF2B5EF4-FFF2-40B4-BE49-F238E27FC236}">
-                <a16:creationId xmlns:a16="http://schemas.microsoft.com/office/drawing/2014/main" id="{E8449CF5-6BFB-4FEE-A601-AAEAF1457C1E}"/>
+                <a16:creationId xmlns:a16="http://schemas.microsoft.com/office/drawing/2014/main" id="{189E31B5-084B-4720-8BB7-D050B69871EC}"/>
               </a:ext>
             </a:extLst>
           </p:cNvPr>
@@ -5705,14 +6832,131 @@
           <a:bodyPr/>
           <a:lstStyle/>
           <a:p>
-            <a:endParaRPr lang="pt-BR"/>
+            <a:r>
+              <a:rPr lang="pt-BR" dirty="0"/>
+              <a:t>O </a:t>
+            </a:r>
+            <a:r>
+              <a:rPr lang="pt-BR" dirty="0" err="1"/>
+              <a:t>AuthenticationManager</a:t>
+            </a:r>
+            <a:r>
+              <a:rPr lang="pt-BR" dirty="0"/>
+              <a:t> é responsável por coordenar a autenticação do usuário. Ele recebe as credenciais e encaminha a verificação para um provedor de autenticação. Quando chamamos </a:t>
+            </a:r>
+            <a:r>
+              <a:rPr lang="pt-BR" dirty="0" err="1"/>
+              <a:t>authenticate</a:t>
+            </a:r>
+            <a:r>
+              <a:rPr lang="pt-BR" dirty="0"/>
+              <a:t>(), neste fluxo com usuário e senha no banco:</a:t>
+            </a:r>
+          </a:p>
+          <a:p>
+            <a:pPr marL="800100" lvl="1" indent="-342900">
+              <a:buFont typeface="Arial" panose="020B0604020202020204" pitchFamily="34" charset="0"/>
+              <a:buChar char="•"/>
+            </a:pPr>
+            <a:r>
+              <a:rPr lang="pt-BR" dirty="0"/>
+              <a:t>O </a:t>
+            </a:r>
+            <a:r>
+              <a:rPr lang="pt-BR" dirty="0" err="1"/>
+              <a:t>AuthenticationManager</a:t>
+            </a:r>
+            <a:r>
+              <a:rPr lang="pt-BR" dirty="0"/>
+              <a:t> encaminha as credenciais ao </a:t>
+            </a:r>
+            <a:r>
+              <a:rPr lang="pt-BR" dirty="0" err="1"/>
+              <a:t>DaoAuthenticationProvider</a:t>
+            </a:r>
+            <a:r>
+              <a:rPr lang="pt-BR" dirty="0"/>
+              <a:t>.</a:t>
+            </a:r>
+          </a:p>
+          <a:p>
+            <a:pPr marL="800100" lvl="1" indent="-342900">
+              <a:buFont typeface="Arial" panose="020B0604020202020204" pitchFamily="34" charset="0"/>
+              <a:buChar char="•"/>
+            </a:pPr>
+            <a:r>
+              <a:rPr lang="pt-BR" dirty="0"/>
+              <a:t>O provedor utiliza o </a:t>
+            </a:r>
+            <a:r>
+              <a:rPr lang="pt-BR" dirty="0" err="1"/>
+              <a:t>UserDetailsService</a:t>
+            </a:r>
+            <a:r>
+              <a:rPr lang="pt-BR" dirty="0"/>
+              <a:t> para buscar o usuário pelo método </a:t>
+            </a:r>
+            <a:r>
+              <a:rPr lang="pt-BR" dirty="0" err="1"/>
+              <a:t>loadUserByUsername</a:t>
+            </a:r>
+            <a:r>
+              <a:rPr lang="pt-BR" dirty="0"/>
+              <a:t>().</a:t>
+            </a:r>
+          </a:p>
+          <a:p>
+            <a:pPr marL="800100" lvl="1" indent="-342900">
+              <a:buFont typeface="Arial" panose="020B0604020202020204" pitchFamily="34" charset="0"/>
+              <a:buChar char="•"/>
+            </a:pPr>
+            <a:r>
+              <a:rPr lang="pt-BR" dirty="0"/>
+              <a:t>Utiliza o </a:t>
+            </a:r>
+            <a:r>
+              <a:rPr lang="pt-BR" dirty="0" err="1"/>
+              <a:t>PasswordEncoder</a:t>
+            </a:r>
+            <a:r>
+              <a:rPr lang="pt-BR" dirty="0"/>
+              <a:t> para verificar a senha.</a:t>
+            </a:r>
+          </a:p>
+          <a:p>
+            <a:pPr marL="800100" lvl="1" indent="-342900">
+              <a:buFont typeface="Arial" panose="020B0604020202020204" pitchFamily="34" charset="0"/>
+              <a:buChar char="•"/>
+            </a:pPr>
+            <a:r>
+              <a:rPr lang="pt-BR" dirty="0"/>
+              <a:t>Se estiver tudo correto, retorna um objeto </a:t>
+            </a:r>
+            <a:r>
+              <a:rPr lang="pt-BR" dirty="0" err="1"/>
+              <a:t>Authentication</a:t>
+            </a:r>
+            <a:r>
+              <a:rPr lang="pt-BR" dirty="0"/>
+              <a:t> com o usuário autenticado e suas permissões.</a:t>
+            </a:r>
+          </a:p>
+          <a:p>
+            <a:pPr marL="800100" lvl="1" indent="-342900">
+              <a:buFont typeface="Arial" panose="020B0604020202020204" pitchFamily="34" charset="0"/>
+              <a:buChar char="•"/>
+            </a:pPr>
+            <a:r>
+              <a:rPr lang="pt-BR" dirty="0"/>
+              <a:t>Se houver uma falha, como senha incorreta, lança uma exceção de autenticação.</a:t>
+            </a:r>
           </a:p>
         </p:txBody>
       </p:sp>
     </p:spTree>
     <p:extLst>
       <p:ext uri="{BB962C8B-B14F-4D97-AF65-F5344CB8AC3E}">
-        <p14:creationId xmlns:p14="http://schemas.microsoft.com/office/powerpoint/2010/main" val="3287424128"/>
+        <p14:creationId xmlns:p14="http://schemas.microsoft.com/office/powerpoint/2010/main" val="3674778826"/>
       </p:ext>
     </p:extLst>
   </p:cSld>

--- a/engenharia-software/software-corporativo/boas-praticas/aula-06-spring-security/spring-security.pptx
+++ b/engenharia-software/software-corporativo/boas-praticas/aula-06-spring-security/spring-security.pptx
@@ -23,6 +23,11 @@
     <p:sldId id="310" r:id="rId17"/>
     <p:sldId id="311" r:id="rId18"/>
     <p:sldId id="312" r:id="rId19"/>
+    <p:sldId id="313" r:id="rId20"/>
+    <p:sldId id="315" r:id="rId21"/>
+    <p:sldId id="314" r:id="rId22"/>
+    <p:sldId id="316" r:id="rId23"/>
+    <p:sldId id="317" r:id="rId24"/>
   </p:sldIdLst>
   <p:sldSz cx="12192000" cy="6858000"/>
   <p:notesSz cx="6858000" cy="9144000"/>
@@ -144,6 +149,11 @@
             <p14:sldId id="310"/>
             <p14:sldId id="311"/>
             <p14:sldId id="312"/>
+            <p14:sldId id="313"/>
+            <p14:sldId id="315"/>
+            <p14:sldId id="314"/>
+            <p14:sldId id="316"/>
+            <p14:sldId id="317"/>
           </p14:sldIdLst>
         </p14:section>
       </p14:sectionLst>
@@ -735,7 +745,7 @@
           <a:p>
             <a:fld id="{CDD55C27-F8C6-4481-8569-CAC50CAE9F1F}" type="datetimeFigureOut">
               <a:rPr lang="pt-BR" smtClean="0"/>
-              <a:t>17/09/2026</a:t>
+              <a:t>18/09/2026</a:t>
             </a:fld>
             <a:endParaRPr lang="pt-BR"/>
           </a:p>
@@ -872,7 +882,7 @@
           <a:p>
             <a:fld id="{CDD55C27-F8C6-4481-8569-CAC50CAE9F1F}" type="datetimeFigureOut">
               <a:rPr lang="pt-BR" smtClean="0"/>
-              <a:t>17/09/2026</a:t>
+              <a:t>18/09/2026</a:t>
             </a:fld>
             <a:endParaRPr lang="pt-BR"/>
           </a:p>
@@ -1592,7 +1602,7 @@
           <a:p>
             <a:fld id="{CDD55C27-F8C6-4481-8569-CAC50CAE9F1F}" type="datetimeFigureOut">
               <a:rPr lang="pt-BR" smtClean="0"/>
-              <a:t>17/09/2026</a:t>
+              <a:t>18/09/2026</a:t>
             </a:fld>
             <a:endParaRPr lang="pt-BR"/>
           </a:p>
@@ -1772,7 +1782,7 @@
           <a:p>
             <a:fld id="{CDD55C27-F8C6-4481-8569-CAC50CAE9F1F}" type="datetimeFigureOut">
               <a:rPr lang="pt-BR" smtClean="0"/>
-              <a:t>17/09/2026</a:t>
+              <a:t>18/09/2026</a:t>
             </a:fld>
             <a:endParaRPr lang="pt-BR"/>
           </a:p>
@@ -1952,7 +1962,7 @@
           <a:p>
             <a:fld id="{CDD55C27-F8C6-4481-8569-CAC50CAE9F1F}" type="datetimeFigureOut">
               <a:rPr lang="pt-BR" smtClean="0"/>
-              <a:t>17/09/2026</a:t>
+              <a:t>18/09/2026</a:t>
             </a:fld>
             <a:endParaRPr lang="pt-BR"/>
           </a:p>
@@ -2163,7 +2173,7 @@
           <a:p>
             <a:fld id="{CDD55C27-F8C6-4481-8569-CAC50CAE9F1F}" type="datetimeFigureOut">
               <a:rPr lang="pt-BR" smtClean="0"/>
-              <a:t>17/09/2026</a:t>
+              <a:t>18/09/2026</a:t>
             </a:fld>
             <a:endParaRPr lang="pt-BR"/>
           </a:p>
@@ -2618,7 +2628,7 @@
           <a:p>
             <a:fld id="{CDD55C27-F8C6-4481-8569-CAC50CAE9F1F}" type="datetimeFigureOut">
               <a:rPr lang="pt-BR" smtClean="0"/>
-              <a:t>17/09/2026</a:t>
+              <a:t>18/09/2026</a:t>
             </a:fld>
             <a:endParaRPr lang="pt-BR"/>
           </a:p>
@@ -6872,7 +6882,7 @@
             </a:r>
             <a:r>
               <a:rPr lang="pt-BR" dirty="0" err="1"/>
-              <a:t>DaoAuthenticationProvider</a:t>
+              <a:t>UsernamePasswordAuthenticationToken</a:t>
             </a:r>
             <a:r>
               <a:rPr lang="pt-BR" dirty="0"/>
@@ -6957,6 +6967,661 @@
     <p:extLst>
       <p:ext uri="{BB962C8B-B14F-4D97-AF65-F5344CB8AC3E}">
         <p14:creationId xmlns:p14="http://schemas.microsoft.com/office/powerpoint/2010/main" val="3674778826"/>
+      </p:ext>
+    </p:extLst>
+  </p:cSld>
+  <p:clrMapOvr>
+    <a:masterClrMapping/>
+  </p:clrMapOvr>
+</p:sld>
+</file>
+
+<file path=ppt/slides/slide19.xml><?xml version="1.0" encoding="utf-8"?>
+<p:sld xmlns:a="http://schemas.openxmlformats.org/drawingml/2006/main" xmlns:r="http://schemas.openxmlformats.org/officeDocument/2006/relationships" xmlns:p="http://schemas.openxmlformats.org/presentationml/2006/main">
+  <p:cSld>
+    <p:spTree>
+      <p:nvGrpSpPr>
+        <p:cNvPr id="1" name=""/>
+        <p:cNvGrpSpPr/>
+        <p:nvPr/>
+      </p:nvGrpSpPr>
+      <p:grpSpPr>
+        <a:xfrm>
+          <a:off x="0" y="0"/>
+          <a:ext cx="0" cy="0"/>
+          <a:chOff x="0" y="0"/>
+          <a:chExt cx="0" cy="0"/>
+        </a:xfrm>
+      </p:grpSpPr>
+      <p:sp>
+        <p:nvSpPr>
+          <p:cNvPr id="11" name="Shape 20">
+            <a:extLst>
+              <a:ext uri="{FF2B5EF4-FFF2-40B4-BE49-F238E27FC236}">
+                <a16:creationId xmlns:a16="http://schemas.microsoft.com/office/drawing/2014/main" id="{F2C759C7-698E-46CE-B2DA-66822D200ABA}"/>
+              </a:ext>
+            </a:extLst>
+          </p:cNvPr>
+          <p:cNvSpPr/>
+          <p:nvPr/>
+        </p:nvSpPr>
+        <p:spPr>
+          <a:xfrm>
+            <a:off x="1439333" y="4882237"/>
+            <a:ext cx="9725373" cy="1619984"/>
+          </a:xfrm>
+          <a:prstGeom prst="roundRect">
+            <a:avLst>
+              <a:gd name="adj" fmla="val 8081"/>
+            </a:avLst>
+          </a:prstGeom>
+          <a:solidFill>
+            <a:srgbClr val="191A1C"/>
+          </a:solidFill>
+          <a:ln/>
+        </p:spPr>
+        <p:txBody>
+          <a:bodyPr/>
+          <a:lstStyle/>
+          <a:p>
+            <a:endParaRPr lang="pt-BR"/>
+          </a:p>
+        </p:txBody>
+      </p:sp>
+      <p:sp>
+        <p:nvSpPr>
+          <p:cNvPr id="2" name="Título 1">
+            <a:extLst>
+              <a:ext uri="{FF2B5EF4-FFF2-40B4-BE49-F238E27FC236}">
+                <a16:creationId xmlns:a16="http://schemas.microsoft.com/office/drawing/2014/main" id="{97DD5622-BE74-4ADB-8BEE-68D9BBB9CE51}"/>
+              </a:ext>
+            </a:extLst>
+          </p:cNvPr>
+          <p:cNvSpPr>
+            <a:spLocks noGrp="1"/>
+          </p:cNvSpPr>
+          <p:nvPr>
+            <p:ph type="title"/>
+          </p:nvPr>
+        </p:nvSpPr>
+        <p:spPr/>
+        <p:txBody>
+          <a:bodyPr/>
+          <a:lstStyle/>
+          <a:p>
+            <a:r>
+              <a:rPr lang="pt-BR" dirty="0"/>
+              <a:t>Disponibilizando o </a:t>
+            </a:r>
+            <a:r>
+              <a:rPr lang="pt-BR" dirty="0" err="1"/>
+              <a:t>AuthenticationManager</a:t>
+            </a:r>
+            <a:endParaRPr lang="pt-BR" dirty="0"/>
+          </a:p>
+        </p:txBody>
+      </p:sp>
+      <p:sp>
+        <p:nvSpPr>
+          <p:cNvPr id="3" name="Espaço Reservado para Conteúdo 2">
+            <a:extLst>
+              <a:ext uri="{FF2B5EF4-FFF2-40B4-BE49-F238E27FC236}">
+                <a16:creationId xmlns:a16="http://schemas.microsoft.com/office/drawing/2014/main" id="{9D42453D-E52A-4252-B33C-2DB628AC3A19}"/>
+              </a:ext>
+            </a:extLst>
+          </p:cNvPr>
+          <p:cNvSpPr>
+            <a:spLocks noGrp="1"/>
+          </p:cNvSpPr>
+          <p:nvPr>
+            <p:ph idx="1"/>
+          </p:nvPr>
+        </p:nvSpPr>
+        <p:spPr>
+          <a:xfrm>
+            <a:off x="1912612" y="4977870"/>
+            <a:ext cx="8778815" cy="1428718"/>
+          </a:xfrm>
+        </p:spPr>
+        <p:txBody>
+          <a:bodyPr/>
+          <a:lstStyle/>
+          <a:p>
+            <a:pPr lvl="0" algn="l" eaLnBrk="0" fontAlgn="base" hangingPunct="0">
+              <a:spcBef>
+                <a:spcPct val="0"/>
+              </a:spcBef>
+              <a:spcAft>
+                <a:spcPct val="0"/>
+              </a:spcAft>
+            </a:pPr>
+            <a:r>
+              <a:rPr lang="pt-BR" altLang="pt-BR" sz="1400" dirty="0">
+                <a:solidFill>
+                  <a:srgbClr val="B3AE60"/>
+                </a:solidFill>
+                <a:latin typeface="JetBrains Mono"/>
+              </a:rPr>
+              <a:t>@</a:t>
+            </a:r>
+            <a:r>
+              <a:rPr lang="pt-BR" altLang="pt-BR" sz="1400" dirty="0" err="1">
+                <a:solidFill>
+                  <a:srgbClr val="B3AE60"/>
+                </a:solidFill>
+                <a:latin typeface="JetBrains Mono"/>
+              </a:rPr>
+              <a:t>Bean</a:t>
+            </a:r>
+            <a:br>
+              <a:rPr lang="pt-BR" altLang="pt-BR" sz="1400" dirty="0">
+                <a:solidFill>
+                  <a:srgbClr val="B3AE60"/>
+                </a:solidFill>
+                <a:latin typeface="JetBrains Mono"/>
+              </a:rPr>
+            </a:br>
+            <a:r>
+              <a:rPr lang="pt-BR" altLang="pt-BR" sz="1400" dirty="0" err="1">
+                <a:solidFill>
+                  <a:srgbClr val="CF8E6D"/>
+                </a:solidFill>
+                <a:latin typeface="JetBrains Mono"/>
+              </a:rPr>
+              <a:t>public</a:t>
+            </a:r>
+            <a:r>
+              <a:rPr lang="pt-BR" altLang="pt-BR" sz="1400" dirty="0">
+                <a:solidFill>
+                  <a:srgbClr val="CF8E6D"/>
+                </a:solidFill>
+                <a:latin typeface="JetBrains Mono"/>
+              </a:rPr>
+              <a:t> </a:t>
+            </a:r>
+            <a:r>
+              <a:rPr lang="pt-BR" altLang="pt-BR" sz="1400" dirty="0" err="1">
+                <a:solidFill>
+                  <a:srgbClr val="BCBEC4"/>
+                </a:solidFill>
+                <a:latin typeface="JetBrains Mono"/>
+              </a:rPr>
+              <a:t>AuthenticationManager</a:t>
+            </a:r>
+            <a:r>
+              <a:rPr lang="pt-BR" altLang="pt-BR" sz="1400" dirty="0">
+                <a:solidFill>
+                  <a:srgbClr val="BCBEC4"/>
+                </a:solidFill>
+                <a:latin typeface="JetBrains Mono"/>
+              </a:rPr>
+              <a:t> </a:t>
+            </a:r>
+            <a:r>
+              <a:rPr lang="pt-BR" altLang="pt-BR" sz="1400" dirty="0" err="1">
+                <a:solidFill>
+                  <a:srgbClr val="56A8F5"/>
+                </a:solidFill>
+                <a:latin typeface="JetBrains Mono"/>
+              </a:rPr>
+              <a:t>authenticationManager</a:t>
+            </a:r>
+            <a:r>
+              <a:rPr lang="pt-BR" altLang="pt-BR" sz="1400" dirty="0">
+                <a:solidFill>
+                  <a:srgbClr val="BCBEC4"/>
+                </a:solidFill>
+                <a:latin typeface="JetBrains Mono"/>
+              </a:rPr>
+              <a:t>(</a:t>
+            </a:r>
+            <a:r>
+              <a:rPr lang="pt-BR" altLang="pt-BR" sz="1400" dirty="0" err="1">
+                <a:solidFill>
+                  <a:srgbClr val="BCBEC4"/>
+                </a:solidFill>
+                <a:latin typeface="JetBrains Mono"/>
+              </a:rPr>
+              <a:t>AuthenticationConfiguration</a:t>
+            </a:r>
+            <a:r>
+              <a:rPr lang="pt-BR" altLang="pt-BR" sz="1400" dirty="0">
+                <a:solidFill>
+                  <a:srgbClr val="BCBEC4"/>
+                </a:solidFill>
+                <a:latin typeface="JetBrains Mono"/>
+              </a:rPr>
+              <a:t> </a:t>
+            </a:r>
+            <a:r>
+              <a:rPr lang="pt-BR" altLang="pt-BR" sz="1400" dirty="0" err="1">
+                <a:solidFill>
+                  <a:srgbClr val="BCBEC4"/>
+                </a:solidFill>
+                <a:latin typeface="JetBrains Mono"/>
+              </a:rPr>
+              <a:t>configuration</a:t>
+            </a:r>
+            <a:r>
+              <a:rPr lang="pt-BR" altLang="pt-BR" sz="1400" dirty="0">
+                <a:solidFill>
+                  <a:srgbClr val="BCBEC4"/>
+                </a:solidFill>
+                <a:latin typeface="JetBrains Mono"/>
+              </a:rPr>
+              <a:t>) </a:t>
+            </a:r>
+            <a:r>
+              <a:rPr lang="pt-BR" altLang="pt-BR" sz="1400" dirty="0" err="1">
+                <a:solidFill>
+                  <a:srgbClr val="CF8E6D"/>
+                </a:solidFill>
+                <a:latin typeface="JetBrains Mono"/>
+              </a:rPr>
+              <a:t>throws</a:t>
+            </a:r>
+            <a:r>
+              <a:rPr lang="pt-BR" altLang="pt-BR" sz="1400" dirty="0">
+                <a:solidFill>
+                  <a:srgbClr val="CF8E6D"/>
+                </a:solidFill>
+                <a:latin typeface="JetBrains Mono"/>
+              </a:rPr>
+              <a:t> </a:t>
+            </a:r>
+            <a:r>
+              <a:rPr lang="pt-BR" altLang="pt-BR" sz="1400" dirty="0" err="1">
+                <a:solidFill>
+                  <a:srgbClr val="BCBEC4"/>
+                </a:solidFill>
+                <a:latin typeface="JetBrains Mono"/>
+              </a:rPr>
+              <a:t>Exception</a:t>
+            </a:r>
+            <a:r>
+              <a:rPr lang="pt-BR" altLang="pt-BR" sz="1400" dirty="0">
+                <a:solidFill>
+                  <a:srgbClr val="BCBEC4"/>
+                </a:solidFill>
+                <a:latin typeface="JetBrains Mono"/>
+              </a:rPr>
+              <a:t>{</a:t>
+            </a:r>
+            <a:br>
+              <a:rPr lang="pt-BR" altLang="pt-BR" sz="1400" dirty="0">
+                <a:solidFill>
+                  <a:srgbClr val="BCBEC4"/>
+                </a:solidFill>
+                <a:latin typeface="JetBrains Mono"/>
+              </a:rPr>
+            </a:br>
+            <a:r>
+              <a:rPr lang="pt-BR" altLang="pt-BR" sz="1400" dirty="0">
+                <a:solidFill>
+                  <a:srgbClr val="BCBEC4"/>
+                </a:solidFill>
+                <a:latin typeface="JetBrains Mono"/>
+              </a:rPr>
+              <a:t>    </a:t>
+            </a:r>
+            <a:r>
+              <a:rPr lang="pt-BR" altLang="pt-BR" sz="1400" dirty="0" err="1">
+                <a:solidFill>
+                  <a:srgbClr val="CF8E6D"/>
+                </a:solidFill>
+                <a:latin typeface="JetBrains Mono"/>
+              </a:rPr>
+              <a:t>return</a:t>
+            </a:r>
+            <a:r>
+              <a:rPr lang="pt-BR" altLang="pt-BR" sz="1400" dirty="0">
+                <a:solidFill>
+                  <a:srgbClr val="CF8E6D"/>
+                </a:solidFill>
+                <a:latin typeface="JetBrains Mono"/>
+              </a:rPr>
+              <a:t> </a:t>
+            </a:r>
+            <a:r>
+              <a:rPr lang="pt-BR" altLang="pt-BR" sz="1400" dirty="0" err="1">
+                <a:solidFill>
+                  <a:srgbClr val="BCBEC4"/>
+                </a:solidFill>
+                <a:latin typeface="JetBrains Mono"/>
+              </a:rPr>
+              <a:t>configuration.getAuthenticationManager</a:t>
+            </a:r>
+            <a:r>
+              <a:rPr lang="pt-BR" altLang="pt-BR" sz="1400" dirty="0">
+                <a:solidFill>
+                  <a:srgbClr val="BCBEC4"/>
+                </a:solidFill>
+                <a:latin typeface="JetBrains Mono"/>
+              </a:rPr>
+              <a:t>();</a:t>
+            </a:r>
+            <a:br>
+              <a:rPr lang="pt-BR" altLang="pt-BR" sz="1400" dirty="0">
+                <a:solidFill>
+                  <a:srgbClr val="BCBEC4"/>
+                </a:solidFill>
+                <a:latin typeface="JetBrains Mono"/>
+              </a:rPr>
+            </a:br>
+            <a:r>
+              <a:rPr lang="pt-BR" altLang="pt-BR" sz="1400" dirty="0">
+                <a:solidFill>
+                  <a:srgbClr val="BCBEC4"/>
+                </a:solidFill>
+                <a:latin typeface="JetBrains Mono"/>
+              </a:rPr>
+              <a:t>}</a:t>
+            </a:r>
+            <a:endParaRPr lang="pt-BR" altLang="pt-BR" sz="3200" dirty="0">
+              <a:latin typeface="Arial" panose="020B0604020202020204" pitchFamily="34" charset="0"/>
+            </a:endParaRPr>
+          </a:p>
+        </p:txBody>
+      </p:sp>
+      <p:sp>
+        <p:nvSpPr>
+          <p:cNvPr id="12" name="Espaço Reservado para Conteúdo 2">
+            <a:extLst>
+              <a:ext uri="{FF2B5EF4-FFF2-40B4-BE49-F238E27FC236}">
+                <a16:creationId xmlns:a16="http://schemas.microsoft.com/office/drawing/2014/main" id="{3986AC96-0FAF-403F-8DD1-10B69C22EFB1}"/>
+              </a:ext>
+            </a:extLst>
+          </p:cNvPr>
+          <p:cNvSpPr txBox="1">
+            <a:spLocks/>
+          </p:cNvSpPr>
+          <p:nvPr/>
+        </p:nvSpPr>
+        <p:spPr>
+          <a:xfrm>
+            <a:off x="592347" y="1844675"/>
+            <a:ext cx="11007306" cy="2710207"/>
+          </a:xfrm>
+          <a:prstGeom prst="rect">
+            <a:avLst/>
+          </a:prstGeom>
+        </p:spPr>
+        <p:txBody>
+          <a:bodyPr/>
+          <a:lstStyle>
+            <a:lvl1pPr marL="0" indent="0" algn="just" defTabSz="914400" rtl="0" eaLnBrk="1" latinLnBrk="0" hangingPunct="1">
+              <a:lnSpc>
+                <a:spcPct val="150000"/>
+              </a:lnSpc>
+              <a:spcBef>
+                <a:spcPts val="0"/>
+              </a:spcBef>
+              <a:buFont typeface="Arial" panose="020B0604020202020204" pitchFamily="34" charset="0"/>
+              <a:buNone/>
+              <a:defRPr sz="2000" kern="1200">
+                <a:solidFill>
+                  <a:schemeClr val="tx1"/>
+                </a:solidFill>
+                <a:latin typeface="Times New Roman" panose="02020603050405020304" pitchFamily="18" charset="0"/>
+                <a:ea typeface="+mn-ea"/>
+                <a:cs typeface="Times New Roman" panose="02020603050405020304" pitchFamily="18" charset="0"/>
+              </a:defRPr>
+            </a:lvl1pPr>
+            <a:lvl2pPr marL="457200" indent="0" algn="just" defTabSz="914400" rtl="0" eaLnBrk="1" latinLnBrk="0" hangingPunct="1">
+              <a:lnSpc>
+                <a:spcPct val="150000"/>
+              </a:lnSpc>
+              <a:spcBef>
+                <a:spcPts val="0"/>
+              </a:spcBef>
+              <a:buFont typeface="Arial" panose="020B0604020202020204" pitchFamily="34" charset="0"/>
+              <a:buNone/>
+              <a:defRPr sz="1600" kern="1200">
+                <a:solidFill>
+                  <a:schemeClr val="tx1"/>
+                </a:solidFill>
+                <a:latin typeface="Times New Roman" panose="02020603050405020304" pitchFamily="18" charset="0"/>
+                <a:ea typeface="+mn-ea"/>
+                <a:cs typeface="Times New Roman" panose="02020603050405020304" pitchFamily="18" charset="0"/>
+              </a:defRPr>
+            </a:lvl2pPr>
+            <a:lvl3pPr marL="914400" indent="0" algn="just" defTabSz="914400" rtl="0" eaLnBrk="1" latinLnBrk="0" hangingPunct="1">
+              <a:lnSpc>
+                <a:spcPct val="150000"/>
+              </a:lnSpc>
+              <a:spcBef>
+                <a:spcPts val="0"/>
+              </a:spcBef>
+              <a:buFont typeface="Arial" panose="020B0604020202020204" pitchFamily="34" charset="0"/>
+              <a:buNone/>
+              <a:defRPr sz="1400" kern="1200">
+                <a:solidFill>
+                  <a:schemeClr val="tx1"/>
+                </a:solidFill>
+                <a:latin typeface="Times New Roman" panose="02020603050405020304" pitchFamily="18" charset="0"/>
+                <a:ea typeface="+mn-ea"/>
+                <a:cs typeface="Times New Roman" panose="02020603050405020304" pitchFamily="18" charset="0"/>
+              </a:defRPr>
+            </a:lvl3pPr>
+            <a:lvl4pPr marL="1371600" indent="0" algn="just" defTabSz="914400" rtl="0" eaLnBrk="1" latinLnBrk="0" hangingPunct="1">
+              <a:lnSpc>
+                <a:spcPct val="150000"/>
+              </a:lnSpc>
+              <a:spcBef>
+                <a:spcPts val="0"/>
+              </a:spcBef>
+              <a:buFont typeface="Arial" panose="020B0604020202020204" pitchFamily="34" charset="0"/>
+              <a:buNone/>
+              <a:defRPr sz="1200" kern="1200">
+                <a:solidFill>
+                  <a:schemeClr val="tx1"/>
+                </a:solidFill>
+                <a:latin typeface="Times New Roman" panose="02020603050405020304" pitchFamily="18" charset="0"/>
+                <a:ea typeface="+mn-ea"/>
+                <a:cs typeface="Times New Roman" panose="02020603050405020304" pitchFamily="18" charset="0"/>
+              </a:defRPr>
+            </a:lvl4pPr>
+            <a:lvl5pPr marL="1828800" indent="0" algn="just" defTabSz="914400" rtl="0" eaLnBrk="1" latinLnBrk="0" hangingPunct="1">
+              <a:lnSpc>
+                <a:spcPct val="150000"/>
+              </a:lnSpc>
+              <a:spcBef>
+                <a:spcPts val="0"/>
+              </a:spcBef>
+              <a:buFont typeface="Arial" panose="020B0604020202020204" pitchFamily="34" charset="0"/>
+              <a:buNone/>
+              <a:defRPr sz="1000" kern="1200">
+                <a:solidFill>
+                  <a:schemeClr val="tx1"/>
+                </a:solidFill>
+                <a:latin typeface="Times New Roman" panose="02020603050405020304" pitchFamily="18" charset="0"/>
+                <a:ea typeface="+mn-ea"/>
+                <a:cs typeface="Times New Roman" panose="02020603050405020304" pitchFamily="18" charset="0"/>
+              </a:defRPr>
+            </a:lvl5pPr>
+            <a:lvl6pPr marL="2514600" indent="-228600" algn="l" defTabSz="914400" rtl="0" eaLnBrk="1" latinLnBrk="0" hangingPunct="1">
+              <a:lnSpc>
+                <a:spcPct val="90000"/>
+              </a:lnSpc>
+              <a:spcBef>
+                <a:spcPts val="500"/>
+              </a:spcBef>
+              <a:buFont typeface="Arial" panose="020B0604020202020204" pitchFamily="34" charset="0"/>
+              <a:buChar char="•"/>
+              <a:defRPr sz="1800" kern="1200">
+                <a:solidFill>
+                  <a:schemeClr val="tx1"/>
+                </a:solidFill>
+                <a:latin typeface="+mn-lt"/>
+                <a:ea typeface="+mn-ea"/>
+                <a:cs typeface="+mn-cs"/>
+              </a:defRPr>
+            </a:lvl6pPr>
+            <a:lvl7pPr marL="2971800" indent="-228600" algn="l" defTabSz="914400" rtl="0" eaLnBrk="1" latinLnBrk="0" hangingPunct="1">
+              <a:lnSpc>
+                <a:spcPct val="90000"/>
+              </a:lnSpc>
+              <a:spcBef>
+                <a:spcPts val="500"/>
+              </a:spcBef>
+              <a:buFont typeface="Arial" panose="020B0604020202020204" pitchFamily="34" charset="0"/>
+              <a:buChar char="•"/>
+              <a:defRPr sz="1800" kern="1200">
+                <a:solidFill>
+                  <a:schemeClr val="tx1"/>
+                </a:solidFill>
+                <a:latin typeface="+mn-lt"/>
+                <a:ea typeface="+mn-ea"/>
+                <a:cs typeface="+mn-cs"/>
+              </a:defRPr>
+            </a:lvl7pPr>
+            <a:lvl8pPr marL="3429000" indent="-228600" algn="l" defTabSz="914400" rtl="0" eaLnBrk="1" latinLnBrk="0" hangingPunct="1">
+              <a:lnSpc>
+                <a:spcPct val="90000"/>
+              </a:lnSpc>
+              <a:spcBef>
+                <a:spcPts val="500"/>
+              </a:spcBef>
+              <a:buFont typeface="Arial" panose="020B0604020202020204" pitchFamily="34" charset="0"/>
+              <a:buChar char="•"/>
+              <a:defRPr sz="1800" kern="1200">
+                <a:solidFill>
+                  <a:schemeClr val="tx1"/>
+                </a:solidFill>
+                <a:latin typeface="+mn-lt"/>
+                <a:ea typeface="+mn-ea"/>
+                <a:cs typeface="+mn-cs"/>
+              </a:defRPr>
+            </a:lvl8pPr>
+            <a:lvl9pPr marL="3886200" indent="-228600" algn="l" defTabSz="914400" rtl="0" eaLnBrk="1" latinLnBrk="0" hangingPunct="1">
+              <a:lnSpc>
+                <a:spcPct val="90000"/>
+              </a:lnSpc>
+              <a:spcBef>
+                <a:spcPts val="500"/>
+              </a:spcBef>
+              <a:buFont typeface="Arial" panose="020B0604020202020204" pitchFamily="34" charset="0"/>
+              <a:buChar char="•"/>
+              <a:defRPr sz="1800" kern="1200">
+                <a:solidFill>
+                  <a:schemeClr val="tx1"/>
+                </a:solidFill>
+                <a:latin typeface="+mn-lt"/>
+                <a:ea typeface="+mn-ea"/>
+                <a:cs typeface="+mn-cs"/>
+              </a:defRPr>
+            </a:lvl9pPr>
+          </a:lstStyle>
+          <a:p>
+            <a:r>
+              <a:rPr lang="pt-BR" sz="1600" dirty="0"/>
+              <a:t>Para utilizar o gerenciador de autenticação no </a:t>
+            </a:r>
+            <a:r>
+              <a:rPr lang="pt-BR" sz="1600" dirty="0" err="1"/>
+              <a:t>controller</a:t>
+            </a:r>
+            <a:r>
+              <a:rPr lang="pt-BR" sz="1600" dirty="0"/>
+              <a:t>, precisamos disponibilizá-lo como um objeto gerenciado pelo Spring.</a:t>
+            </a:r>
+          </a:p>
+          <a:p>
+            <a:endParaRPr lang="pt-BR" sz="1600" dirty="0"/>
+          </a:p>
+          <a:p>
+            <a:r>
+              <a:rPr lang="pt-BR" sz="1600" dirty="0"/>
+              <a:t>O método utiliza a </a:t>
+            </a:r>
+            <a:r>
+              <a:rPr lang="pt-BR" sz="1600" dirty="0" err="1"/>
+              <a:t>AuthenticationConfiguration</a:t>
+            </a:r>
+            <a:r>
+              <a:rPr lang="pt-BR" sz="1600" dirty="0"/>
+              <a:t> para obter o </a:t>
+            </a:r>
+            <a:r>
+              <a:rPr lang="pt-BR" sz="1600" dirty="0" err="1"/>
+              <a:t>AuthenticationManager</a:t>
+            </a:r>
+            <a:r>
+              <a:rPr lang="pt-BR" sz="1600" dirty="0"/>
+              <a:t> configurado. A anotação @</a:t>
+            </a:r>
+            <a:r>
+              <a:rPr lang="pt-BR" sz="1600" dirty="0" err="1"/>
+              <a:t>Bean</a:t>
+            </a:r>
+            <a:r>
+              <a:rPr lang="pt-BR" sz="1600" dirty="0"/>
+              <a:t> registra esse objeto, permitindo sua injeção no </a:t>
+            </a:r>
+            <a:r>
+              <a:rPr lang="pt-BR" sz="1600" dirty="0" err="1"/>
+              <a:t>controller</a:t>
+            </a:r>
+            <a:r>
+              <a:rPr lang="pt-BR" sz="1600" dirty="0"/>
+              <a:t> com @</a:t>
+            </a:r>
+            <a:r>
+              <a:rPr lang="pt-BR" sz="1600" dirty="0" err="1"/>
+              <a:t>Autowired</a:t>
+            </a:r>
+            <a:r>
+              <a:rPr lang="pt-BR" sz="1600" dirty="0"/>
+              <a:t>.</a:t>
+            </a:r>
+          </a:p>
+          <a:p>
+            <a:endParaRPr lang="pt-BR" sz="1600" dirty="0"/>
+          </a:p>
+          <a:p>
+            <a:r>
+              <a:rPr lang="pt-BR" sz="1600" dirty="0"/>
+              <a:t>Quando o </a:t>
+            </a:r>
+            <a:r>
+              <a:rPr lang="pt-BR" sz="1600" dirty="0" err="1"/>
+              <a:t>controller</a:t>
+            </a:r>
+            <a:r>
+              <a:rPr lang="pt-BR" sz="1600" dirty="0"/>
+              <a:t> chama </a:t>
+            </a:r>
+            <a:r>
+              <a:rPr lang="pt-BR" sz="1600" dirty="0" err="1"/>
+              <a:t>authenticate</a:t>
+            </a:r>
+            <a:r>
+              <a:rPr lang="pt-BR" sz="1600" dirty="0"/>
+              <a:t>(), o gerenciador coordena a verificação das credenciais, utilizando um provedor que busca o usuário pelo </a:t>
+            </a:r>
+            <a:r>
+              <a:rPr lang="pt-BR" sz="1600" dirty="0" err="1"/>
+              <a:t>UserDetailsService</a:t>
+            </a:r>
+            <a:r>
+              <a:rPr lang="pt-BR" sz="1600" dirty="0"/>
+              <a:t> e verifica a senha com o </a:t>
+            </a:r>
+            <a:r>
+              <a:rPr lang="pt-BR" sz="1600" dirty="0" err="1"/>
+              <a:t>PasswordEncoder</a:t>
+            </a:r>
+            <a:r>
+              <a:rPr lang="pt-BR" sz="1600" dirty="0"/>
+              <a:t>.</a:t>
+            </a:r>
+          </a:p>
+        </p:txBody>
+      </p:sp>
+    </p:spTree>
+    <p:extLst>
+      <p:ext uri="{BB962C8B-B14F-4D97-AF65-F5344CB8AC3E}">
+        <p14:creationId xmlns:p14="http://schemas.microsoft.com/office/powerpoint/2010/main" val="1123812539"/>
       </p:ext>
     </p:extLst>
   </p:cSld>
@@ -7145,6 +7810,1444 @@
     <p:extLst>
       <p:ext uri="{BB962C8B-B14F-4D97-AF65-F5344CB8AC3E}">
         <p14:creationId xmlns:p14="http://schemas.microsoft.com/office/powerpoint/2010/main" val="3891646628"/>
+      </p:ext>
+    </p:extLst>
+  </p:cSld>
+  <p:clrMapOvr>
+    <a:masterClrMapping/>
+  </p:clrMapOvr>
+</p:sld>
+</file>
+
+<file path=ppt/slides/slide20.xml><?xml version="1.0" encoding="utf-8"?>
+<p:sld xmlns:a="http://schemas.openxmlformats.org/drawingml/2006/main" xmlns:r="http://schemas.openxmlformats.org/officeDocument/2006/relationships" xmlns:p="http://schemas.openxmlformats.org/presentationml/2006/main">
+  <p:cSld>
+    <p:spTree>
+      <p:nvGrpSpPr>
+        <p:cNvPr id="1" name=""/>
+        <p:cNvGrpSpPr/>
+        <p:nvPr/>
+      </p:nvGrpSpPr>
+      <p:grpSpPr>
+        <a:xfrm>
+          <a:off x="0" y="0"/>
+          <a:ext cx="0" cy="0"/>
+          <a:chOff x="0" y="0"/>
+          <a:chExt cx="0" cy="0"/>
+        </a:xfrm>
+      </p:grpSpPr>
+      <p:sp>
+        <p:nvSpPr>
+          <p:cNvPr id="2" name="Título 1">
+            <a:extLst>
+              <a:ext uri="{FF2B5EF4-FFF2-40B4-BE49-F238E27FC236}">
+                <a16:creationId xmlns:a16="http://schemas.microsoft.com/office/drawing/2014/main" id="{464F6B69-950F-4EFB-807F-493207E21699}"/>
+              </a:ext>
+            </a:extLst>
+          </p:cNvPr>
+          <p:cNvSpPr>
+            <a:spLocks noGrp="1"/>
+          </p:cNvSpPr>
+          <p:nvPr>
+            <p:ph type="title"/>
+          </p:nvPr>
+        </p:nvSpPr>
+        <p:spPr/>
+        <p:txBody>
+          <a:bodyPr/>
+          <a:lstStyle/>
+          <a:p>
+            <a:r>
+              <a:rPr lang="pt-BR" dirty="0"/>
+              <a:t>Preparando as credenciais para autenticação</a:t>
+            </a:r>
+          </a:p>
+        </p:txBody>
+      </p:sp>
+      <p:sp>
+        <p:nvSpPr>
+          <p:cNvPr id="3" name="Espaço Reservado para Conteúdo 2">
+            <a:extLst>
+              <a:ext uri="{FF2B5EF4-FFF2-40B4-BE49-F238E27FC236}">
+                <a16:creationId xmlns:a16="http://schemas.microsoft.com/office/drawing/2014/main" id="{1D8C228A-4E8E-47FC-9701-5998D4D1ABB7}"/>
+              </a:ext>
+            </a:extLst>
+          </p:cNvPr>
+          <p:cNvSpPr>
+            <a:spLocks noGrp="1"/>
+          </p:cNvSpPr>
+          <p:nvPr>
+            <p:ph idx="1"/>
+          </p:nvPr>
+        </p:nvSpPr>
+        <p:spPr>
+          <a:xfrm>
+            <a:off x="592347" y="1844675"/>
+            <a:ext cx="11007306" cy="1084792"/>
+          </a:xfrm>
+        </p:spPr>
+        <p:txBody>
+          <a:bodyPr/>
+          <a:lstStyle/>
+          <a:p>
+            <a:r>
+              <a:rPr lang="pt-BR" dirty="0"/>
+              <a:t>A classe </a:t>
+            </a:r>
+            <a:r>
+              <a:rPr lang="pt-BR" dirty="0" err="1"/>
+              <a:t>UsernamePasswordAuthenticationToken</a:t>
+            </a:r>
+            <a:r>
+              <a:rPr lang="pt-BR" dirty="0"/>
+              <a:t> reúne o login e a senha recebidos em um único objeto, no formato esperado pelo Spring Security.</a:t>
+            </a:r>
+          </a:p>
+        </p:txBody>
+      </p:sp>
+      <p:grpSp>
+        <p:nvGrpSpPr>
+          <p:cNvPr id="8" name="Agrupar 7">
+            <a:extLst>
+              <a:ext uri="{FF2B5EF4-FFF2-40B4-BE49-F238E27FC236}">
+                <a16:creationId xmlns:a16="http://schemas.microsoft.com/office/drawing/2014/main" id="{CD95E6F4-DB36-406A-BDBA-3FBC8AD2A2B8}"/>
+              </a:ext>
+            </a:extLst>
+          </p:cNvPr>
+          <p:cNvGrpSpPr/>
+          <p:nvPr/>
+        </p:nvGrpSpPr>
+        <p:grpSpPr>
+          <a:xfrm>
+            <a:off x="1233314" y="3278879"/>
+            <a:ext cx="9725373" cy="1619984"/>
+            <a:chOff x="1481666" y="2723237"/>
+            <a:chExt cx="9725373" cy="1619984"/>
+          </a:xfrm>
+        </p:grpSpPr>
+        <p:sp>
+          <p:nvSpPr>
+            <p:cNvPr id="7" name="Shape 20">
+              <a:extLst>
+                <a:ext uri="{FF2B5EF4-FFF2-40B4-BE49-F238E27FC236}">
+                  <a16:creationId xmlns:a16="http://schemas.microsoft.com/office/drawing/2014/main" id="{891D1A5E-D865-4DA0-94FE-8B5E13A6CC24}"/>
+                </a:ext>
+              </a:extLst>
+            </p:cNvPr>
+            <p:cNvSpPr/>
+            <p:nvPr/>
+          </p:nvSpPr>
+          <p:spPr>
+            <a:xfrm>
+              <a:off x="1481666" y="2723237"/>
+              <a:ext cx="9725373" cy="1619984"/>
+            </a:xfrm>
+            <a:prstGeom prst="roundRect">
+              <a:avLst>
+                <a:gd name="adj" fmla="val 8081"/>
+              </a:avLst>
+            </a:prstGeom>
+            <a:solidFill>
+              <a:srgbClr val="191A1C"/>
+            </a:solidFill>
+            <a:ln/>
+          </p:spPr>
+          <p:txBody>
+            <a:bodyPr/>
+            <a:lstStyle/>
+            <a:p>
+              <a:endParaRPr lang="pt-BR"/>
+            </a:p>
+          </p:txBody>
+        </p:sp>
+        <p:sp>
+          <p:nvSpPr>
+            <p:cNvPr id="6" name="Retângulo 5">
+              <a:extLst>
+                <a:ext uri="{FF2B5EF4-FFF2-40B4-BE49-F238E27FC236}">
+                  <a16:creationId xmlns:a16="http://schemas.microsoft.com/office/drawing/2014/main" id="{568B12C5-4DD0-45C4-9254-E51A2BD03E4A}"/>
+                </a:ext>
+              </a:extLst>
+            </p:cNvPr>
+            <p:cNvSpPr/>
+            <p:nvPr/>
+          </p:nvSpPr>
+          <p:spPr>
+            <a:xfrm>
+              <a:off x="1962852" y="2933065"/>
+              <a:ext cx="8763000" cy="1200329"/>
+            </a:xfrm>
+            <a:prstGeom prst="rect">
+              <a:avLst/>
+            </a:prstGeom>
+          </p:spPr>
+          <p:txBody>
+            <a:bodyPr wrap="square">
+              <a:spAutoFit/>
+            </a:bodyPr>
+            <a:lstStyle/>
+            <a:p>
+              <a:pPr lvl="0" eaLnBrk="0" fontAlgn="base" hangingPunct="0">
+                <a:spcBef>
+                  <a:spcPct val="0"/>
+                </a:spcBef>
+                <a:spcAft>
+                  <a:spcPct val="0"/>
+                </a:spcAft>
+              </a:pPr>
+              <a:r>
+                <a:rPr lang="pt-BR" altLang="pt-BR" dirty="0">
+                  <a:solidFill>
+                    <a:srgbClr val="CF8E6D"/>
+                  </a:solidFill>
+                  <a:latin typeface="JetBrains Mono"/>
+                </a:rPr>
+                <a:t>var </a:t>
+              </a:r>
+              <a:r>
+                <a:rPr lang="pt-BR" altLang="pt-BR" dirty="0" err="1">
+                  <a:solidFill>
+                    <a:srgbClr val="BCBEC4"/>
+                  </a:solidFill>
+                  <a:latin typeface="JetBrains Mono"/>
+                </a:rPr>
+                <a:t>token</a:t>
+              </a:r>
+              <a:r>
+                <a:rPr lang="pt-BR" altLang="pt-BR" dirty="0">
+                  <a:solidFill>
+                    <a:srgbClr val="BCBEC4"/>
+                  </a:solidFill>
+                  <a:latin typeface="JetBrains Mono"/>
+                </a:rPr>
+                <a:t> = </a:t>
+              </a:r>
+              <a:r>
+                <a:rPr lang="pt-BR" altLang="pt-BR" dirty="0">
+                  <a:solidFill>
+                    <a:srgbClr val="CF8E6D"/>
+                  </a:solidFill>
+                  <a:latin typeface="JetBrains Mono"/>
+                </a:rPr>
+                <a:t>new </a:t>
+              </a:r>
+              <a:r>
+                <a:rPr lang="pt-BR" altLang="pt-BR" dirty="0" err="1">
+                  <a:solidFill>
+                    <a:srgbClr val="BCBEC4"/>
+                  </a:solidFill>
+                  <a:latin typeface="JetBrains Mono"/>
+                </a:rPr>
+                <a:t>UsernamePasswordAuthenticationToken</a:t>
+              </a:r>
+              <a:r>
+                <a:rPr lang="pt-BR" altLang="pt-BR" dirty="0">
+                  <a:solidFill>
+                    <a:srgbClr val="BCBEC4"/>
+                  </a:solidFill>
+                  <a:latin typeface="JetBrains Mono"/>
+                </a:rPr>
+                <a:t>(</a:t>
+              </a:r>
+            </a:p>
+            <a:p>
+              <a:pPr lvl="0" eaLnBrk="0" fontAlgn="base" hangingPunct="0">
+                <a:spcBef>
+                  <a:spcPct val="0"/>
+                </a:spcBef>
+                <a:spcAft>
+                  <a:spcPct val="0"/>
+                </a:spcAft>
+              </a:pPr>
+              <a:r>
+                <a:rPr lang="pt-BR" altLang="pt-BR" dirty="0">
+                  <a:solidFill>
+                    <a:srgbClr val="BCBEC4"/>
+                  </a:solidFill>
+                  <a:latin typeface="JetBrains Mono"/>
+                </a:rPr>
+                <a:t>	</a:t>
+              </a:r>
+              <a:r>
+                <a:rPr lang="pt-BR" altLang="pt-BR" dirty="0" err="1">
+                  <a:solidFill>
+                    <a:srgbClr val="BCBEC4"/>
+                  </a:solidFill>
+                  <a:latin typeface="JetBrains Mono"/>
+                </a:rPr>
+                <a:t>dadosAutenticacao.login</a:t>
+              </a:r>
+              <a:r>
+                <a:rPr lang="pt-BR" altLang="pt-BR" dirty="0">
+                  <a:solidFill>
+                    <a:srgbClr val="BCBEC4"/>
+                  </a:solidFill>
+                  <a:latin typeface="JetBrains Mono"/>
+                </a:rPr>
+                <a:t>(), </a:t>
+              </a:r>
+            </a:p>
+            <a:p>
+              <a:pPr lvl="0" eaLnBrk="0" fontAlgn="base" hangingPunct="0">
+                <a:spcBef>
+                  <a:spcPct val="0"/>
+                </a:spcBef>
+                <a:spcAft>
+                  <a:spcPct val="0"/>
+                </a:spcAft>
+              </a:pPr>
+              <a:r>
+                <a:rPr lang="pt-BR" altLang="pt-BR" dirty="0">
+                  <a:solidFill>
+                    <a:srgbClr val="BCBEC4"/>
+                  </a:solidFill>
+                  <a:latin typeface="JetBrains Mono"/>
+                </a:rPr>
+                <a:t>	</a:t>
+              </a:r>
+              <a:r>
+                <a:rPr lang="pt-BR" altLang="pt-BR" dirty="0" err="1">
+                  <a:solidFill>
+                    <a:srgbClr val="BCBEC4"/>
+                  </a:solidFill>
+                  <a:latin typeface="JetBrains Mono"/>
+                </a:rPr>
+                <a:t>dadosAutenticacao.senha</a:t>
+              </a:r>
+              <a:r>
+                <a:rPr lang="pt-BR" altLang="pt-BR" dirty="0">
+                  <a:solidFill>
+                    <a:srgbClr val="BCBEC4"/>
+                  </a:solidFill>
+                  <a:latin typeface="JetBrains Mono"/>
+                </a:rPr>
+                <a:t>()</a:t>
+              </a:r>
+            </a:p>
+            <a:p>
+              <a:pPr lvl="0" eaLnBrk="0" fontAlgn="base" hangingPunct="0">
+                <a:spcBef>
+                  <a:spcPct val="0"/>
+                </a:spcBef>
+                <a:spcAft>
+                  <a:spcPct val="0"/>
+                </a:spcAft>
+              </a:pPr>
+              <a:r>
+                <a:rPr lang="pt-BR" altLang="pt-BR" dirty="0">
+                  <a:solidFill>
+                    <a:srgbClr val="BCBEC4"/>
+                  </a:solidFill>
+                  <a:latin typeface="JetBrains Mono"/>
+                </a:rPr>
+                <a:t>);</a:t>
+              </a:r>
+              <a:endParaRPr lang="pt-BR" altLang="pt-BR" sz="4000" dirty="0">
+                <a:latin typeface="Arial" panose="020B0604020202020204" pitchFamily="34" charset="0"/>
+              </a:endParaRPr>
+            </a:p>
+          </p:txBody>
+        </p:sp>
+      </p:grpSp>
+      <p:sp>
+        <p:nvSpPr>
+          <p:cNvPr id="10" name="Espaço Reservado para Conteúdo 2">
+            <a:extLst>
+              <a:ext uri="{FF2B5EF4-FFF2-40B4-BE49-F238E27FC236}">
+                <a16:creationId xmlns:a16="http://schemas.microsoft.com/office/drawing/2014/main" id="{1A9B01F9-69FB-40CD-8FF0-B617A9F49DE8}"/>
+              </a:ext>
+            </a:extLst>
+          </p:cNvPr>
+          <p:cNvSpPr txBox="1">
+            <a:spLocks/>
+          </p:cNvSpPr>
+          <p:nvPr/>
+        </p:nvSpPr>
+        <p:spPr>
+          <a:xfrm>
+            <a:off x="592347" y="5248275"/>
+            <a:ext cx="11007306" cy="1084792"/>
+          </a:xfrm>
+          <a:prstGeom prst="rect">
+            <a:avLst/>
+          </a:prstGeom>
+        </p:spPr>
+        <p:txBody>
+          <a:bodyPr/>
+          <a:lstStyle>
+            <a:lvl1pPr marL="0" indent="0" algn="just" defTabSz="914400" rtl="0" eaLnBrk="1" latinLnBrk="0" hangingPunct="1">
+              <a:lnSpc>
+                <a:spcPct val="150000"/>
+              </a:lnSpc>
+              <a:spcBef>
+                <a:spcPts val="0"/>
+              </a:spcBef>
+              <a:buFont typeface="Arial" panose="020B0604020202020204" pitchFamily="34" charset="0"/>
+              <a:buNone/>
+              <a:defRPr sz="2000" kern="1200">
+                <a:solidFill>
+                  <a:schemeClr val="tx1"/>
+                </a:solidFill>
+                <a:latin typeface="Times New Roman" panose="02020603050405020304" pitchFamily="18" charset="0"/>
+                <a:ea typeface="+mn-ea"/>
+                <a:cs typeface="Times New Roman" panose="02020603050405020304" pitchFamily="18" charset="0"/>
+              </a:defRPr>
+            </a:lvl1pPr>
+            <a:lvl2pPr marL="457200" indent="0" algn="just" defTabSz="914400" rtl="0" eaLnBrk="1" latinLnBrk="0" hangingPunct="1">
+              <a:lnSpc>
+                <a:spcPct val="150000"/>
+              </a:lnSpc>
+              <a:spcBef>
+                <a:spcPts val="0"/>
+              </a:spcBef>
+              <a:buFont typeface="Arial" panose="020B0604020202020204" pitchFamily="34" charset="0"/>
+              <a:buNone/>
+              <a:defRPr sz="1600" kern="1200">
+                <a:solidFill>
+                  <a:schemeClr val="tx1"/>
+                </a:solidFill>
+                <a:latin typeface="Times New Roman" panose="02020603050405020304" pitchFamily="18" charset="0"/>
+                <a:ea typeface="+mn-ea"/>
+                <a:cs typeface="Times New Roman" panose="02020603050405020304" pitchFamily="18" charset="0"/>
+              </a:defRPr>
+            </a:lvl2pPr>
+            <a:lvl3pPr marL="914400" indent="0" algn="just" defTabSz="914400" rtl="0" eaLnBrk="1" latinLnBrk="0" hangingPunct="1">
+              <a:lnSpc>
+                <a:spcPct val="150000"/>
+              </a:lnSpc>
+              <a:spcBef>
+                <a:spcPts val="0"/>
+              </a:spcBef>
+              <a:buFont typeface="Arial" panose="020B0604020202020204" pitchFamily="34" charset="0"/>
+              <a:buNone/>
+              <a:defRPr sz="1400" kern="1200">
+                <a:solidFill>
+                  <a:schemeClr val="tx1"/>
+                </a:solidFill>
+                <a:latin typeface="Times New Roman" panose="02020603050405020304" pitchFamily="18" charset="0"/>
+                <a:ea typeface="+mn-ea"/>
+                <a:cs typeface="Times New Roman" panose="02020603050405020304" pitchFamily="18" charset="0"/>
+              </a:defRPr>
+            </a:lvl3pPr>
+            <a:lvl4pPr marL="1371600" indent="0" algn="just" defTabSz="914400" rtl="0" eaLnBrk="1" latinLnBrk="0" hangingPunct="1">
+              <a:lnSpc>
+                <a:spcPct val="150000"/>
+              </a:lnSpc>
+              <a:spcBef>
+                <a:spcPts val="0"/>
+              </a:spcBef>
+              <a:buFont typeface="Arial" panose="020B0604020202020204" pitchFamily="34" charset="0"/>
+              <a:buNone/>
+              <a:defRPr sz="1200" kern="1200">
+                <a:solidFill>
+                  <a:schemeClr val="tx1"/>
+                </a:solidFill>
+                <a:latin typeface="Times New Roman" panose="02020603050405020304" pitchFamily="18" charset="0"/>
+                <a:ea typeface="+mn-ea"/>
+                <a:cs typeface="Times New Roman" panose="02020603050405020304" pitchFamily="18" charset="0"/>
+              </a:defRPr>
+            </a:lvl4pPr>
+            <a:lvl5pPr marL="1828800" indent="0" algn="just" defTabSz="914400" rtl="0" eaLnBrk="1" latinLnBrk="0" hangingPunct="1">
+              <a:lnSpc>
+                <a:spcPct val="150000"/>
+              </a:lnSpc>
+              <a:spcBef>
+                <a:spcPts val="0"/>
+              </a:spcBef>
+              <a:buFont typeface="Arial" panose="020B0604020202020204" pitchFamily="34" charset="0"/>
+              <a:buNone/>
+              <a:defRPr sz="1000" kern="1200">
+                <a:solidFill>
+                  <a:schemeClr val="tx1"/>
+                </a:solidFill>
+                <a:latin typeface="Times New Roman" panose="02020603050405020304" pitchFamily="18" charset="0"/>
+                <a:ea typeface="+mn-ea"/>
+                <a:cs typeface="Times New Roman" panose="02020603050405020304" pitchFamily="18" charset="0"/>
+              </a:defRPr>
+            </a:lvl5pPr>
+            <a:lvl6pPr marL="2514600" indent="-228600" algn="l" defTabSz="914400" rtl="0" eaLnBrk="1" latinLnBrk="0" hangingPunct="1">
+              <a:lnSpc>
+                <a:spcPct val="90000"/>
+              </a:lnSpc>
+              <a:spcBef>
+                <a:spcPts val="500"/>
+              </a:spcBef>
+              <a:buFont typeface="Arial" panose="020B0604020202020204" pitchFamily="34" charset="0"/>
+              <a:buChar char="•"/>
+              <a:defRPr sz="1800" kern="1200">
+                <a:solidFill>
+                  <a:schemeClr val="tx1"/>
+                </a:solidFill>
+                <a:latin typeface="+mn-lt"/>
+                <a:ea typeface="+mn-ea"/>
+                <a:cs typeface="+mn-cs"/>
+              </a:defRPr>
+            </a:lvl6pPr>
+            <a:lvl7pPr marL="2971800" indent="-228600" algn="l" defTabSz="914400" rtl="0" eaLnBrk="1" latinLnBrk="0" hangingPunct="1">
+              <a:lnSpc>
+                <a:spcPct val="90000"/>
+              </a:lnSpc>
+              <a:spcBef>
+                <a:spcPts val="500"/>
+              </a:spcBef>
+              <a:buFont typeface="Arial" panose="020B0604020202020204" pitchFamily="34" charset="0"/>
+              <a:buChar char="•"/>
+              <a:defRPr sz="1800" kern="1200">
+                <a:solidFill>
+                  <a:schemeClr val="tx1"/>
+                </a:solidFill>
+                <a:latin typeface="+mn-lt"/>
+                <a:ea typeface="+mn-ea"/>
+                <a:cs typeface="+mn-cs"/>
+              </a:defRPr>
+            </a:lvl7pPr>
+            <a:lvl8pPr marL="3429000" indent="-228600" algn="l" defTabSz="914400" rtl="0" eaLnBrk="1" latinLnBrk="0" hangingPunct="1">
+              <a:lnSpc>
+                <a:spcPct val="90000"/>
+              </a:lnSpc>
+              <a:spcBef>
+                <a:spcPts val="500"/>
+              </a:spcBef>
+              <a:buFont typeface="Arial" panose="020B0604020202020204" pitchFamily="34" charset="0"/>
+              <a:buChar char="•"/>
+              <a:defRPr sz="1800" kern="1200">
+                <a:solidFill>
+                  <a:schemeClr val="tx1"/>
+                </a:solidFill>
+                <a:latin typeface="+mn-lt"/>
+                <a:ea typeface="+mn-ea"/>
+                <a:cs typeface="+mn-cs"/>
+              </a:defRPr>
+            </a:lvl8pPr>
+            <a:lvl9pPr marL="3886200" indent="-228600" algn="l" defTabSz="914400" rtl="0" eaLnBrk="1" latinLnBrk="0" hangingPunct="1">
+              <a:lnSpc>
+                <a:spcPct val="90000"/>
+              </a:lnSpc>
+              <a:spcBef>
+                <a:spcPts val="500"/>
+              </a:spcBef>
+              <a:buFont typeface="Arial" panose="020B0604020202020204" pitchFamily="34" charset="0"/>
+              <a:buChar char="•"/>
+              <a:defRPr sz="1800" kern="1200">
+                <a:solidFill>
+                  <a:schemeClr val="tx1"/>
+                </a:solidFill>
+                <a:latin typeface="+mn-lt"/>
+                <a:ea typeface="+mn-ea"/>
+                <a:cs typeface="+mn-cs"/>
+              </a:defRPr>
+            </a:lvl9pPr>
+          </a:lstStyle>
+          <a:p>
+            <a:r>
+              <a:rPr lang="pt-BR" dirty="0"/>
+              <a:t>Esse objeto será enviado ao método </a:t>
+            </a:r>
+            <a:r>
+              <a:rPr lang="pt-BR" dirty="0" err="1"/>
+              <a:t>authenticate</a:t>
+            </a:r>
+            <a:r>
+              <a:rPr lang="pt-BR" dirty="0"/>
+              <a:t>(), que solicitará a verificação das credenciais.</a:t>
+            </a:r>
+          </a:p>
+          <a:p>
+            <a:r>
+              <a:rPr lang="pt-BR" dirty="0"/>
+              <a:t>Esse “</a:t>
+            </a:r>
+            <a:r>
+              <a:rPr lang="pt-BR" dirty="0" err="1"/>
+              <a:t>token</a:t>
+            </a:r>
+            <a:r>
+              <a:rPr lang="pt-BR" dirty="0"/>
+              <a:t>” não é um JWT e sua criação não significa que o usuário já foi autenticado.</a:t>
+            </a:r>
+          </a:p>
+        </p:txBody>
+      </p:sp>
+    </p:spTree>
+    <p:extLst>
+      <p:ext uri="{BB962C8B-B14F-4D97-AF65-F5344CB8AC3E}">
+        <p14:creationId xmlns:p14="http://schemas.microsoft.com/office/powerpoint/2010/main" val="1657425321"/>
+      </p:ext>
+    </p:extLst>
+  </p:cSld>
+  <p:clrMapOvr>
+    <a:masterClrMapping/>
+  </p:clrMapOvr>
+</p:sld>
+</file>
+
+<file path=ppt/slides/slide21.xml><?xml version="1.0" encoding="utf-8"?>
+<p:sld xmlns:a="http://schemas.openxmlformats.org/drawingml/2006/main" xmlns:r="http://schemas.openxmlformats.org/officeDocument/2006/relationships" xmlns:p="http://schemas.openxmlformats.org/presentationml/2006/main">
+  <p:cSld>
+    <p:spTree>
+      <p:nvGrpSpPr>
+        <p:cNvPr id="1" name=""/>
+        <p:cNvGrpSpPr/>
+        <p:nvPr/>
+      </p:nvGrpSpPr>
+      <p:grpSpPr>
+        <a:xfrm>
+          <a:off x="0" y="0"/>
+          <a:ext cx="0" cy="0"/>
+          <a:chOff x="0" y="0"/>
+          <a:chExt cx="0" cy="0"/>
+        </a:xfrm>
+      </p:grpSpPr>
+      <p:sp>
+        <p:nvSpPr>
+          <p:cNvPr id="2" name="Título 1">
+            <a:extLst>
+              <a:ext uri="{FF2B5EF4-FFF2-40B4-BE49-F238E27FC236}">
+                <a16:creationId xmlns:a16="http://schemas.microsoft.com/office/drawing/2014/main" id="{E991C5C3-8BB1-47DB-957B-7A551D8FB577}"/>
+              </a:ext>
+            </a:extLst>
+          </p:cNvPr>
+          <p:cNvSpPr>
+            <a:spLocks noGrp="1"/>
+          </p:cNvSpPr>
+          <p:nvPr>
+            <p:ph type="title"/>
+          </p:nvPr>
+        </p:nvSpPr>
+        <p:spPr/>
+        <p:txBody>
+          <a:bodyPr/>
+          <a:lstStyle/>
+          <a:p>
+            <a:r>
+              <a:rPr lang="pt-BR" dirty="0"/>
+              <a:t>Verificando as credenciais do usuário</a:t>
+            </a:r>
+          </a:p>
+        </p:txBody>
+      </p:sp>
+      <p:sp>
+        <p:nvSpPr>
+          <p:cNvPr id="3" name="Espaço Reservado para Conteúdo 2">
+            <a:extLst>
+              <a:ext uri="{FF2B5EF4-FFF2-40B4-BE49-F238E27FC236}">
+                <a16:creationId xmlns:a16="http://schemas.microsoft.com/office/drawing/2014/main" id="{A7EEFF07-581F-4727-8B2A-78EFEE614686}"/>
+              </a:ext>
+            </a:extLst>
+          </p:cNvPr>
+          <p:cNvSpPr>
+            <a:spLocks noGrp="1"/>
+          </p:cNvSpPr>
+          <p:nvPr>
+            <p:ph idx="1"/>
+          </p:nvPr>
+        </p:nvSpPr>
+        <p:spPr>
+          <a:xfrm>
+            <a:off x="592347" y="1844675"/>
+            <a:ext cx="11007306" cy="983192"/>
+          </a:xfrm>
+        </p:spPr>
+        <p:txBody>
+          <a:bodyPr/>
+          <a:lstStyle/>
+          <a:p>
+            <a:r>
+              <a:rPr lang="pt-BR" dirty="0"/>
+              <a:t>O método </a:t>
+            </a:r>
+            <a:r>
+              <a:rPr lang="pt-BR" dirty="0" err="1"/>
+              <a:t>manager.authenticate</a:t>
+            </a:r>
+            <a:r>
+              <a:rPr lang="pt-BR" dirty="0"/>
+              <a:t>(</a:t>
+            </a:r>
+            <a:r>
+              <a:rPr lang="pt-BR" dirty="0" err="1"/>
+              <a:t>token</a:t>
+            </a:r>
+            <a:r>
+              <a:rPr lang="pt-BR" dirty="0"/>
+              <a:t>) solicita ao Spring Security a autenticação usando o login e a senha armazenados no objeto </a:t>
+            </a:r>
+            <a:r>
+              <a:rPr lang="pt-BR" dirty="0" err="1"/>
+              <a:t>token</a:t>
+            </a:r>
+            <a:r>
+              <a:rPr lang="pt-BR" dirty="0"/>
+              <a:t>.</a:t>
+            </a:r>
+          </a:p>
+        </p:txBody>
+      </p:sp>
+      <p:grpSp>
+        <p:nvGrpSpPr>
+          <p:cNvPr id="8" name="Agrupar 7">
+            <a:extLst>
+              <a:ext uri="{FF2B5EF4-FFF2-40B4-BE49-F238E27FC236}">
+                <a16:creationId xmlns:a16="http://schemas.microsoft.com/office/drawing/2014/main" id="{280DCB76-8526-472F-888B-7C314139960C}"/>
+              </a:ext>
+            </a:extLst>
+          </p:cNvPr>
+          <p:cNvGrpSpPr/>
+          <p:nvPr/>
+        </p:nvGrpSpPr>
+        <p:grpSpPr>
+          <a:xfrm>
+            <a:off x="770148" y="3081439"/>
+            <a:ext cx="6731000" cy="948695"/>
+            <a:chOff x="1645179" y="2895600"/>
+            <a:chExt cx="6731000" cy="948695"/>
+          </a:xfrm>
+        </p:grpSpPr>
+        <p:sp>
+          <p:nvSpPr>
+            <p:cNvPr id="7" name="Shape 20">
+              <a:extLst>
+                <a:ext uri="{FF2B5EF4-FFF2-40B4-BE49-F238E27FC236}">
+                  <a16:creationId xmlns:a16="http://schemas.microsoft.com/office/drawing/2014/main" id="{4B434716-53A7-40B9-84A2-032DA9D034DA}"/>
+                </a:ext>
+              </a:extLst>
+            </p:cNvPr>
+            <p:cNvSpPr/>
+            <p:nvPr/>
+          </p:nvSpPr>
+          <p:spPr>
+            <a:xfrm>
+              <a:off x="1645179" y="2895600"/>
+              <a:ext cx="6731000" cy="948695"/>
+            </a:xfrm>
+            <a:prstGeom prst="roundRect">
+              <a:avLst>
+                <a:gd name="adj" fmla="val 8081"/>
+              </a:avLst>
+            </a:prstGeom>
+            <a:solidFill>
+              <a:srgbClr val="191A1C"/>
+            </a:solidFill>
+            <a:ln/>
+          </p:spPr>
+          <p:txBody>
+            <a:bodyPr/>
+            <a:lstStyle/>
+            <a:p>
+              <a:endParaRPr lang="pt-BR"/>
+            </a:p>
+          </p:txBody>
+        </p:sp>
+        <p:sp>
+          <p:nvSpPr>
+            <p:cNvPr id="6" name="Retângulo 5">
+              <a:extLst>
+                <a:ext uri="{FF2B5EF4-FFF2-40B4-BE49-F238E27FC236}">
+                  <a16:creationId xmlns:a16="http://schemas.microsoft.com/office/drawing/2014/main" id="{6329B629-6D1F-460A-801A-D6CF6250F193}"/>
+                </a:ext>
+              </a:extLst>
+            </p:cNvPr>
+            <p:cNvSpPr/>
+            <p:nvPr/>
+          </p:nvSpPr>
+          <p:spPr>
+            <a:xfrm>
+              <a:off x="1802017" y="3185281"/>
+              <a:ext cx="4836580" cy="369332"/>
+            </a:xfrm>
+            <a:prstGeom prst="rect">
+              <a:avLst/>
+            </a:prstGeom>
+          </p:spPr>
+          <p:txBody>
+            <a:bodyPr wrap="none">
+              <a:spAutoFit/>
+            </a:bodyPr>
+            <a:lstStyle/>
+            <a:p>
+              <a:pPr lvl="0" eaLnBrk="0" fontAlgn="base" hangingPunct="0">
+                <a:spcBef>
+                  <a:spcPct val="0"/>
+                </a:spcBef>
+                <a:spcAft>
+                  <a:spcPct val="0"/>
+                </a:spcAft>
+              </a:pPr>
+              <a:r>
+                <a:rPr lang="pt-BR" altLang="pt-BR" dirty="0">
+                  <a:solidFill>
+                    <a:srgbClr val="CF8E6D"/>
+                  </a:solidFill>
+                  <a:latin typeface="JetBrains Mono"/>
+                </a:rPr>
+                <a:t>var </a:t>
+              </a:r>
+              <a:r>
+                <a:rPr lang="pt-BR" altLang="pt-BR" dirty="0" err="1">
+                  <a:solidFill>
+                    <a:srgbClr val="BCBEC4"/>
+                  </a:solidFill>
+                  <a:latin typeface="JetBrains Mono"/>
+                </a:rPr>
+                <a:t>authenticaon</a:t>
+              </a:r>
+              <a:r>
+                <a:rPr lang="pt-BR" altLang="pt-BR" dirty="0">
+                  <a:solidFill>
+                    <a:srgbClr val="BCBEC4"/>
+                  </a:solidFill>
+                  <a:latin typeface="JetBrains Mono"/>
+                </a:rPr>
+                <a:t> = </a:t>
+              </a:r>
+              <a:r>
+                <a:rPr lang="pt-BR" altLang="pt-BR" dirty="0" err="1">
+                  <a:solidFill>
+                    <a:srgbClr val="C77DBB"/>
+                  </a:solidFill>
+                  <a:latin typeface="JetBrains Mono"/>
+                </a:rPr>
+                <a:t>manager</a:t>
+              </a:r>
+              <a:r>
+                <a:rPr lang="pt-BR" altLang="pt-BR" dirty="0" err="1">
+                  <a:solidFill>
+                    <a:srgbClr val="BCBEC4"/>
+                  </a:solidFill>
+                  <a:latin typeface="JetBrains Mono"/>
+                </a:rPr>
+                <a:t>.authenticate</a:t>
+              </a:r>
+              <a:r>
+                <a:rPr lang="pt-BR" altLang="pt-BR" dirty="0">
+                  <a:solidFill>
+                    <a:srgbClr val="BCBEC4"/>
+                  </a:solidFill>
+                  <a:latin typeface="JetBrains Mono"/>
+                </a:rPr>
+                <a:t>(</a:t>
+              </a:r>
+              <a:r>
+                <a:rPr lang="pt-BR" altLang="pt-BR" dirty="0" err="1">
+                  <a:solidFill>
+                    <a:srgbClr val="BCBEC4"/>
+                  </a:solidFill>
+                  <a:latin typeface="JetBrains Mono"/>
+                </a:rPr>
+                <a:t>token</a:t>
+              </a:r>
+              <a:r>
+                <a:rPr lang="pt-BR" altLang="pt-BR" dirty="0">
+                  <a:solidFill>
+                    <a:srgbClr val="BCBEC4"/>
+                  </a:solidFill>
+                  <a:latin typeface="JetBrains Mono"/>
+                </a:rPr>
+                <a:t>);</a:t>
+              </a:r>
+              <a:endParaRPr lang="pt-BR" altLang="pt-BR" sz="4000" dirty="0">
+                <a:latin typeface="Arial" panose="020B0604020202020204" pitchFamily="34" charset="0"/>
+              </a:endParaRPr>
+            </a:p>
+          </p:txBody>
+        </p:sp>
+      </p:grpSp>
+      <p:sp>
+        <p:nvSpPr>
+          <p:cNvPr id="9" name="Espaço Reservado para Conteúdo 2">
+            <a:extLst>
+              <a:ext uri="{FF2B5EF4-FFF2-40B4-BE49-F238E27FC236}">
+                <a16:creationId xmlns:a16="http://schemas.microsoft.com/office/drawing/2014/main" id="{254C3FAF-18B5-40DE-9139-E5414056F6C4}"/>
+              </a:ext>
+            </a:extLst>
+          </p:cNvPr>
+          <p:cNvSpPr txBox="1">
+            <a:spLocks/>
+          </p:cNvSpPr>
+          <p:nvPr/>
+        </p:nvSpPr>
+        <p:spPr>
+          <a:xfrm>
+            <a:off x="592347" y="4319815"/>
+            <a:ext cx="11007306" cy="2097918"/>
+          </a:xfrm>
+          <a:prstGeom prst="rect">
+            <a:avLst/>
+          </a:prstGeom>
+        </p:spPr>
+        <p:txBody>
+          <a:bodyPr/>
+          <a:lstStyle>
+            <a:lvl1pPr marL="0" indent="0" algn="just" defTabSz="914400" rtl="0" eaLnBrk="1" latinLnBrk="0" hangingPunct="1">
+              <a:lnSpc>
+                <a:spcPct val="150000"/>
+              </a:lnSpc>
+              <a:spcBef>
+                <a:spcPts val="0"/>
+              </a:spcBef>
+              <a:buFont typeface="Arial" panose="020B0604020202020204" pitchFamily="34" charset="0"/>
+              <a:buNone/>
+              <a:defRPr sz="2000" kern="1200">
+                <a:solidFill>
+                  <a:schemeClr val="tx1"/>
+                </a:solidFill>
+                <a:latin typeface="Times New Roman" panose="02020603050405020304" pitchFamily="18" charset="0"/>
+                <a:ea typeface="+mn-ea"/>
+                <a:cs typeface="Times New Roman" panose="02020603050405020304" pitchFamily="18" charset="0"/>
+              </a:defRPr>
+            </a:lvl1pPr>
+            <a:lvl2pPr marL="457200" indent="0" algn="just" defTabSz="914400" rtl="0" eaLnBrk="1" latinLnBrk="0" hangingPunct="1">
+              <a:lnSpc>
+                <a:spcPct val="150000"/>
+              </a:lnSpc>
+              <a:spcBef>
+                <a:spcPts val="0"/>
+              </a:spcBef>
+              <a:buFont typeface="Arial" panose="020B0604020202020204" pitchFamily="34" charset="0"/>
+              <a:buNone/>
+              <a:defRPr sz="1600" kern="1200">
+                <a:solidFill>
+                  <a:schemeClr val="tx1"/>
+                </a:solidFill>
+                <a:latin typeface="Times New Roman" panose="02020603050405020304" pitchFamily="18" charset="0"/>
+                <a:ea typeface="+mn-ea"/>
+                <a:cs typeface="Times New Roman" panose="02020603050405020304" pitchFamily="18" charset="0"/>
+              </a:defRPr>
+            </a:lvl2pPr>
+            <a:lvl3pPr marL="914400" indent="0" algn="just" defTabSz="914400" rtl="0" eaLnBrk="1" latinLnBrk="0" hangingPunct="1">
+              <a:lnSpc>
+                <a:spcPct val="150000"/>
+              </a:lnSpc>
+              <a:spcBef>
+                <a:spcPts val="0"/>
+              </a:spcBef>
+              <a:buFont typeface="Arial" panose="020B0604020202020204" pitchFamily="34" charset="0"/>
+              <a:buNone/>
+              <a:defRPr sz="1400" kern="1200">
+                <a:solidFill>
+                  <a:schemeClr val="tx1"/>
+                </a:solidFill>
+                <a:latin typeface="Times New Roman" panose="02020603050405020304" pitchFamily="18" charset="0"/>
+                <a:ea typeface="+mn-ea"/>
+                <a:cs typeface="Times New Roman" panose="02020603050405020304" pitchFamily="18" charset="0"/>
+              </a:defRPr>
+            </a:lvl3pPr>
+            <a:lvl4pPr marL="1371600" indent="0" algn="just" defTabSz="914400" rtl="0" eaLnBrk="1" latinLnBrk="0" hangingPunct="1">
+              <a:lnSpc>
+                <a:spcPct val="150000"/>
+              </a:lnSpc>
+              <a:spcBef>
+                <a:spcPts val="0"/>
+              </a:spcBef>
+              <a:buFont typeface="Arial" panose="020B0604020202020204" pitchFamily="34" charset="0"/>
+              <a:buNone/>
+              <a:defRPr sz="1200" kern="1200">
+                <a:solidFill>
+                  <a:schemeClr val="tx1"/>
+                </a:solidFill>
+                <a:latin typeface="Times New Roman" panose="02020603050405020304" pitchFamily="18" charset="0"/>
+                <a:ea typeface="+mn-ea"/>
+                <a:cs typeface="Times New Roman" panose="02020603050405020304" pitchFamily="18" charset="0"/>
+              </a:defRPr>
+            </a:lvl4pPr>
+            <a:lvl5pPr marL="1828800" indent="0" algn="just" defTabSz="914400" rtl="0" eaLnBrk="1" latinLnBrk="0" hangingPunct="1">
+              <a:lnSpc>
+                <a:spcPct val="150000"/>
+              </a:lnSpc>
+              <a:spcBef>
+                <a:spcPts val="0"/>
+              </a:spcBef>
+              <a:buFont typeface="Arial" panose="020B0604020202020204" pitchFamily="34" charset="0"/>
+              <a:buNone/>
+              <a:defRPr sz="1000" kern="1200">
+                <a:solidFill>
+                  <a:schemeClr val="tx1"/>
+                </a:solidFill>
+                <a:latin typeface="Times New Roman" panose="02020603050405020304" pitchFamily="18" charset="0"/>
+                <a:ea typeface="+mn-ea"/>
+                <a:cs typeface="Times New Roman" panose="02020603050405020304" pitchFamily="18" charset="0"/>
+              </a:defRPr>
+            </a:lvl5pPr>
+            <a:lvl6pPr marL="2514600" indent="-228600" algn="l" defTabSz="914400" rtl="0" eaLnBrk="1" latinLnBrk="0" hangingPunct="1">
+              <a:lnSpc>
+                <a:spcPct val="90000"/>
+              </a:lnSpc>
+              <a:spcBef>
+                <a:spcPts val="500"/>
+              </a:spcBef>
+              <a:buFont typeface="Arial" panose="020B0604020202020204" pitchFamily="34" charset="0"/>
+              <a:buChar char="•"/>
+              <a:defRPr sz="1800" kern="1200">
+                <a:solidFill>
+                  <a:schemeClr val="tx1"/>
+                </a:solidFill>
+                <a:latin typeface="+mn-lt"/>
+                <a:ea typeface="+mn-ea"/>
+                <a:cs typeface="+mn-cs"/>
+              </a:defRPr>
+            </a:lvl6pPr>
+            <a:lvl7pPr marL="2971800" indent="-228600" algn="l" defTabSz="914400" rtl="0" eaLnBrk="1" latinLnBrk="0" hangingPunct="1">
+              <a:lnSpc>
+                <a:spcPct val="90000"/>
+              </a:lnSpc>
+              <a:spcBef>
+                <a:spcPts val="500"/>
+              </a:spcBef>
+              <a:buFont typeface="Arial" panose="020B0604020202020204" pitchFamily="34" charset="0"/>
+              <a:buChar char="•"/>
+              <a:defRPr sz="1800" kern="1200">
+                <a:solidFill>
+                  <a:schemeClr val="tx1"/>
+                </a:solidFill>
+                <a:latin typeface="+mn-lt"/>
+                <a:ea typeface="+mn-ea"/>
+                <a:cs typeface="+mn-cs"/>
+              </a:defRPr>
+            </a:lvl7pPr>
+            <a:lvl8pPr marL="3429000" indent="-228600" algn="l" defTabSz="914400" rtl="0" eaLnBrk="1" latinLnBrk="0" hangingPunct="1">
+              <a:lnSpc>
+                <a:spcPct val="90000"/>
+              </a:lnSpc>
+              <a:spcBef>
+                <a:spcPts val="500"/>
+              </a:spcBef>
+              <a:buFont typeface="Arial" panose="020B0604020202020204" pitchFamily="34" charset="0"/>
+              <a:buChar char="•"/>
+              <a:defRPr sz="1800" kern="1200">
+                <a:solidFill>
+                  <a:schemeClr val="tx1"/>
+                </a:solidFill>
+                <a:latin typeface="+mn-lt"/>
+                <a:ea typeface="+mn-ea"/>
+                <a:cs typeface="+mn-cs"/>
+              </a:defRPr>
+            </a:lvl8pPr>
+            <a:lvl9pPr marL="3886200" indent="-228600" algn="l" defTabSz="914400" rtl="0" eaLnBrk="1" latinLnBrk="0" hangingPunct="1">
+              <a:lnSpc>
+                <a:spcPct val="90000"/>
+              </a:lnSpc>
+              <a:spcBef>
+                <a:spcPts val="500"/>
+              </a:spcBef>
+              <a:buFont typeface="Arial" panose="020B0604020202020204" pitchFamily="34" charset="0"/>
+              <a:buChar char="•"/>
+              <a:defRPr sz="1800" kern="1200">
+                <a:solidFill>
+                  <a:schemeClr val="tx1"/>
+                </a:solidFill>
+                <a:latin typeface="+mn-lt"/>
+                <a:ea typeface="+mn-ea"/>
+                <a:cs typeface="+mn-cs"/>
+              </a:defRPr>
+            </a:lvl9pPr>
+          </a:lstStyle>
+          <a:p>
+            <a:r>
+              <a:rPr lang="pt-BR" sz="1800" b="1" dirty="0"/>
+              <a:t>manager</a:t>
+            </a:r>
+            <a:r>
+              <a:rPr lang="pt-BR" sz="1800" dirty="0"/>
+              <a:t> – Gerenciador que coordena a autenticação.</a:t>
+            </a:r>
+          </a:p>
+          <a:p>
+            <a:r>
+              <a:rPr lang="pt-BR" sz="1800" b="1" dirty="0" err="1"/>
+              <a:t>authenticate</a:t>
+            </a:r>
+            <a:r>
+              <a:rPr lang="pt-BR" sz="1800" b="1" dirty="0"/>
+              <a:t>(</a:t>
+            </a:r>
+            <a:r>
+              <a:rPr lang="pt-BR" sz="1800" b="1" dirty="0" err="1"/>
+              <a:t>token</a:t>
+            </a:r>
+            <a:r>
+              <a:rPr lang="pt-BR" sz="1800" b="1" dirty="0"/>
+              <a:t>) </a:t>
+            </a:r>
+            <a:r>
+              <a:rPr lang="pt-BR" sz="1800" dirty="0"/>
+              <a:t>– Encaminha as credenciais para verificação. Nesse fluxo, o provedor busca o usuário pelo </a:t>
+            </a:r>
+            <a:r>
+              <a:rPr lang="pt-BR" sz="1800" dirty="0" err="1"/>
+              <a:t>UserDetailsService</a:t>
+            </a:r>
+            <a:r>
+              <a:rPr lang="pt-BR" sz="1800" dirty="0"/>
+              <a:t> e verifica a senha com o </a:t>
+            </a:r>
+            <a:r>
+              <a:rPr lang="pt-BR" sz="1800" dirty="0" err="1"/>
+              <a:t>PasswordEncoder</a:t>
+            </a:r>
+            <a:r>
+              <a:rPr lang="pt-BR" sz="1800" dirty="0"/>
+              <a:t>.</a:t>
+            </a:r>
+          </a:p>
+          <a:p>
+            <a:r>
+              <a:rPr lang="pt-BR" sz="1800" b="1" dirty="0" err="1"/>
+              <a:t>autenticacao</a:t>
+            </a:r>
+            <a:r>
+              <a:rPr lang="pt-BR" sz="1800" dirty="0"/>
+              <a:t> – Armazena o resultado bem-sucedido, contendo o usuário autenticado e suas permissões.</a:t>
+            </a:r>
+          </a:p>
+        </p:txBody>
+      </p:sp>
+    </p:spTree>
+    <p:extLst>
+      <p:ext uri="{BB962C8B-B14F-4D97-AF65-F5344CB8AC3E}">
+        <p14:creationId xmlns:p14="http://schemas.microsoft.com/office/powerpoint/2010/main" val="219114231"/>
+      </p:ext>
+    </p:extLst>
+  </p:cSld>
+  <p:clrMapOvr>
+    <a:masterClrMapping/>
+  </p:clrMapOvr>
+</p:sld>
+</file>
+
+<file path=ppt/slides/slide22.xml><?xml version="1.0" encoding="utf-8"?>
+<p:sld xmlns:a="http://schemas.openxmlformats.org/drawingml/2006/main" xmlns:r="http://schemas.openxmlformats.org/officeDocument/2006/relationships" xmlns:p="http://schemas.openxmlformats.org/presentationml/2006/main">
+  <p:cSld>
+    <p:spTree>
+      <p:nvGrpSpPr>
+        <p:cNvPr id="1" name=""/>
+        <p:cNvGrpSpPr/>
+        <p:nvPr/>
+      </p:nvGrpSpPr>
+      <p:grpSpPr>
+        <a:xfrm>
+          <a:off x="0" y="0"/>
+          <a:ext cx="0" cy="0"/>
+          <a:chOff x="0" y="0"/>
+          <a:chExt cx="0" cy="0"/>
+        </a:xfrm>
+      </p:grpSpPr>
+      <p:sp>
+        <p:nvSpPr>
+          <p:cNvPr id="2" name="Título 1">
+            <a:extLst>
+              <a:ext uri="{FF2B5EF4-FFF2-40B4-BE49-F238E27FC236}">
+                <a16:creationId xmlns:a16="http://schemas.microsoft.com/office/drawing/2014/main" id="{C7F57CAC-C74C-4B18-B9C6-E445CABB9E85}"/>
+              </a:ext>
+            </a:extLst>
+          </p:cNvPr>
+          <p:cNvSpPr>
+            <a:spLocks noGrp="1"/>
+          </p:cNvSpPr>
+          <p:nvPr>
+            <p:ph type="title"/>
+          </p:nvPr>
+        </p:nvSpPr>
+        <p:spPr/>
+        <p:txBody>
+          <a:bodyPr/>
+          <a:lstStyle/>
+          <a:p>
+            <a:r>
+              <a:rPr lang="pt-BR" b="1" dirty="0"/>
+              <a:t>Proteção de senhas no banco de dados</a:t>
+            </a:r>
+            <a:br>
+              <a:rPr lang="pt-BR" dirty="0"/>
+            </a:br>
+            <a:endParaRPr lang="pt-BR" dirty="0"/>
+          </a:p>
+        </p:txBody>
+      </p:sp>
+      <p:sp>
+        <p:nvSpPr>
+          <p:cNvPr id="3" name="Espaço Reservado para Conteúdo 2">
+            <a:extLst>
+              <a:ext uri="{FF2B5EF4-FFF2-40B4-BE49-F238E27FC236}">
+                <a16:creationId xmlns:a16="http://schemas.microsoft.com/office/drawing/2014/main" id="{1AA1A7B6-1C53-442D-AC35-8D229BEC1B56}"/>
+              </a:ext>
+            </a:extLst>
+          </p:cNvPr>
+          <p:cNvSpPr>
+            <a:spLocks noGrp="1"/>
+          </p:cNvSpPr>
+          <p:nvPr>
+            <p:ph idx="1"/>
+          </p:nvPr>
+        </p:nvSpPr>
+        <p:spPr>
+          <a:xfrm>
+            <a:off x="592347" y="1844675"/>
+            <a:ext cx="11007306" cy="2972858"/>
+          </a:xfrm>
+        </p:spPr>
+        <p:txBody>
+          <a:bodyPr/>
+          <a:lstStyle/>
+          <a:p>
+            <a:r>
+              <a:rPr lang="pt-BR" dirty="0"/>
+              <a:t>As senhas não devem ser salvas diretamente no banco de dados, pois um vazamento poderia expor as credenciais dos usuários.</a:t>
+            </a:r>
+          </a:p>
+          <a:p>
+            <a:endParaRPr lang="pt-BR" dirty="0"/>
+          </a:p>
+          <a:p>
+            <a:r>
+              <a:rPr lang="pt-BR" dirty="0"/>
+              <a:t>O </a:t>
+            </a:r>
+            <a:r>
+              <a:rPr lang="pt-BR" b="1" dirty="0" err="1"/>
+              <a:t>BCrypt</a:t>
+            </a:r>
+            <a:r>
+              <a:rPr lang="pt-BR" dirty="0"/>
+              <a:t> protege as senhas transformando-as em um </a:t>
+            </a:r>
+            <a:r>
+              <a:rPr lang="pt-BR" b="1" dirty="0" err="1"/>
+              <a:t>hash</a:t>
+            </a:r>
+            <a:r>
+              <a:rPr lang="pt-BR" dirty="0"/>
+              <a:t>, um valor que não pode ser </a:t>
+            </a:r>
+            <a:r>
+              <a:rPr lang="pt-BR" dirty="0" err="1"/>
+              <a:t>descriptografado</a:t>
+            </a:r>
+            <a:r>
+              <a:rPr lang="pt-BR" dirty="0"/>
+              <a:t> para recuperar a senha original. Durante o login, o sistema verifica se a senha informada corresponde ao </a:t>
+            </a:r>
+            <a:r>
+              <a:rPr lang="pt-BR" dirty="0" err="1"/>
+              <a:t>hash</a:t>
+            </a:r>
+            <a:r>
+              <a:rPr lang="pt-BR" dirty="0"/>
+              <a:t> armazenado. Isso dificulta a descoberta das senhas caso o banco seja comprometido.</a:t>
+            </a:r>
+          </a:p>
+          <a:p>
+            <a:endParaRPr lang="pt-BR" dirty="0"/>
+          </a:p>
+        </p:txBody>
+      </p:sp>
+      <p:sp>
+        <p:nvSpPr>
+          <p:cNvPr id="4" name="CaixaDeTexto 3">
+            <a:extLst>
+              <a:ext uri="{FF2B5EF4-FFF2-40B4-BE49-F238E27FC236}">
+                <a16:creationId xmlns:a16="http://schemas.microsoft.com/office/drawing/2014/main" id="{EAFD7291-C12A-4F9E-A248-690DD3D26625}"/>
+              </a:ext>
+            </a:extLst>
+          </p:cNvPr>
+          <p:cNvSpPr txBox="1"/>
+          <p:nvPr/>
+        </p:nvSpPr>
+        <p:spPr>
+          <a:xfrm>
+            <a:off x="2428484" y="5627003"/>
+            <a:ext cx="732482" cy="400110"/>
+          </a:xfrm>
+          <a:prstGeom prst="rect">
+            <a:avLst/>
+          </a:prstGeom>
+          <a:noFill/>
+        </p:spPr>
+        <p:txBody>
+          <a:bodyPr wrap="square" rtlCol="0">
+            <a:spAutoFit/>
+          </a:bodyPr>
+          <a:lstStyle/>
+          <a:p>
+            <a:r>
+              <a:rPr lang="pt-BR" sz="2000" dirty="0">
+                <a:latin typeface="Times New Roman" panose="02020603050405020304" pitchFamily="18" charset="0"/>
+                <a:cs typeface="Times New Roman" panose="02020603050405020304" pitchFamily="18" charset="0"/>
+              </a:rPr>
+              <a:t>1234</a:t>
+            </a:r>
+          </a:p>
+        </p:txBody>
+      </p:sp>
+      <p:sp>
+        <p:nvSpPr>
+          <p:cNvPr id="5" name="CaixaDeTexto 4">
+            <a:extLst>
+              <a:ext uri="{FF2B5EF4-FFF2-40B4-BE49-F238E27FC236}">
+                <a16:creationId xmlns:a16="http://schemas.microsoft.com/office/drawing/2014/main" id="{2A3AFE4B-BB90-423C-B07E-6B6591CDF1A3}"/>
+              </a:ext>
+            </a:extLst>
+          </p:cNvPr>
+          <p:cNvSpPr txBox="1"/>
+          <p:nvPr/>
+        </p:nvSpPr>
+        <p:spPr>
+          <a:xfrm>
+            <a:off x="5589450" y="5319227"/>
+            <a:ext cx="4174066" cy="1015663"/>
+          </a:xfrm>
+          <a:prstGeom prst="rect">
+            <a:avLst/>
+          </a:prstGeom>
+          <a:noFill/>
+        </p:spPr>
+        <p:txBody>
+          <a:bodyPr wrap="square" rtlCol="0">
+            <a:spAutoFit/>
+          </a:bodyPr>
+          <a:lstStyle/>
+          <a:p>
+            <a:r>
+              <a:rPr lang="pt-BR" sz="2000" dirty="0">
+                <a:latin typeface="Times New Roman" panose="02020603050405020304" pitchFamily="18" charset="0"/>
+                <a:cs typeface="Times New Roman" panose="02020603050405020304" pitchFamily="18" charset="0"/>
+              </a:rPr>
+              <a:t>$2a$12$L77O4AU7B8ZFN8bFfvE7BeAXsV5FeLcmLwwagCAVXlouHehOWcz8C</a:t>
+            </a:r>
+          </a:p>
+        </p:txBody>
+      </p:sp>
+      <p:cxnSp>
+        <p:nvCxnSpPr>
+          <p:cNvPr id="7" name="Conector de Seta Reta 6">
+            <a:extLst>
+              <a:ext uri="{FF2B5EF4-FFF2-40B4-BE49-F238E27FC236}">
+                <a16:creationId xmlns:a16="http://schemas.microsoft.com/office/drawing/2014/main" id="{49FD1AF7-0BAC-4B44-9B3F-91FC8B4614E3}"/>
+              </a:ext>
+            </a:extLst>
+          </p:cNvPr>
+          <p:cNvCxnSpPr>
+            <a:stCxn id="4" idx="3"/>
+            <a:endCxn id="5" idx="1"/>
+          </p:cNvCxnSpPr>
+          <p:nvPr/>
+        </p:nvCxnSpPr>
+        <p:spPr>
+          <a:xfrm>
+            <a:off x="3160966" y="5827058"/>
+            <a:ext cx="2428484" cy="1"/>
+          </a:xfrm>
+          <a:prstGeom prst="straightConnector1">
+            <a:avLst/>
+          </a:prstGeom>
+          <a:ln w="38100">
+            <a:solidFill>
+              <a:schemeClr val="tx1">
+                <a:lumMod val="95000"/>
+                <a:lumOff val="5000"/>
+              </a:schemeClr>
+            </a:solidFill>
+            <a:tailEnd type="triangle"/>
+          </a:ln>
+        </p:spPr>
+        <p:style>
+          <a:lnRef idx="1">
+            <a:schemeClr val="accent1"/>
+          </a:lnRef>
+          <a:fillRef idx="0">
+            <a:schemeClr val="accent1"/>
+          </a:fillRef>
+          <a:effectRef idx="0">
+            <a:schemeClr val="accent1"/>
+          </a:effectRef>
+          <a:fontRef idx="minor">
+            <a:schemeClr val="tx1"/>
+          </a:fontRef>
+        </p:style>
+      </p:cxnSp>
+    </p:spTree>
+    <p:extLst>
+      <p:ext uri="{BB962C8B-B14F-4D97-AF65-F5344CB8AC3E}">
+        <p14:creationId xmlns:p14="http://schemas.microsoft.com/office/powerpoint/2010/main" val="3517709060"/>
+      </p:ext>
+    </p:extLst>
+  </p:cSld>
+  <p:clrMapOvr>
+    <a:masterClrMapping/>
+  </p:clrMapOvr>
+</p:sld>
+</file>
+
+<file path=ppt/slides/slide23.xml><?xml version="1.0" encoding="utf-8"?>
+<p:sld xmlns:a="http://schemas.openxmlformats.org/drawingml/2006/main" xmlns:r="http://schemas.openxmlformats.org/officeDocument/2006/relationships" xmlns:p="http://schemas.openxmlformats.org/presentationml/2006/main">
+  <p:cSld>
+    <p:spTree>
+      <p:nvGrpSpPr>
+        <p:cNvPr id="1" name=""/>
+        <p:cNvGrpSpPr/>
+        <p:nvPr/>
+      </p:nvGrpSpPr>
+      <p:grpSpPr>
+        <a:xfrm>
+          <a:off x="0" y="0"/>
+          <a:ext cx="0" cy="0"/>
+          <a:chOff x="0" y="0"/>
+          <a:chExt cx="0" cy="0"/>
+        </a:xfrm>
+      </p:grpSpPr>
+      <p:sp>
+        <p:nvSpPr>
+          <p:cNvPr id="2" name="Título 1">
+            <a:extLst>
+              <a:ext uri="{FF2B5EF4-FFF2-40B4-BE49-F238E27FC236}">
+                <a16:creationId xmlns:a16="http://schemas.microsoft.com/office/drawing/2014/main" id="{BF31DE31-3EAD-4099-9AC1-F9D21875599C}"/>
+              </a:ext>
+            </a:extLst>
+          </p:cNvPr>
+          <p:cNvSpPr>
+            <a:spLocks noGrp="1"/>
+          </p:cNvSpPr>
+          <p:nvPr>
+            <p:ph type="title"/>
+          </p:nvPr>
+        </p:nvSpPr>
+        <p:spPr/>
+        <p:txBody>
+          <a:bodyPr/>
+          <a:lstStyle/>
+          <a:p>
+            <a:endParaRPr lang="pt-BR"/>
+          </a:p>
+        </p:txBody>
+      </p:sp>
+      <p:sp>
+        <p:nvSpPr>
+          <p:cNvPr id="3" name="Espaço Reservado para Conteúdo 2">
+            <a:extLst>
+              <a:ext uri="{FF2B5EF4-FFF2-40B4-BE49-F238E27FC236}">
+                <a16:creationId xmlns:a16="http://schemas.microsoft.com/office/drawing/2014/main" id="{723F4606-EDC8-41B3-B9CF-F573A920BB26}"/>
+              </a:ext>
+            </a:extLst>
+          </p:cNvPr>
+          <p:cNvSpPr>
+            <a:spLocks noGrp="1"/>
+          </p:cNvSpPr>
+          <p:nvPr>
+            <p:ph idx="1"/>
+          </p:nvPr>
+        </p:nvSpPr>
+        <p:spPr/>
+        <p:txBody>
+          <a:bodyPr/>
+          <a:lstStyle/>
+          <a:p>
+            <a:endParaRPr lang="pt-BR"/>
+          </a:p>
+        </p:txBody>
+      </p:sp>
+    </p:spTree>
+    <p:extLst>
+      <p:ext uri="{BB962C8B-B14F-4D97-AF65-F5344CB8AC3E}">
+        <p14:creationId xmlns:p14="http://schemas.microsoft.com/office/powerpoint/2010/main" val="2526843331"/>
       </p:ext>
     </p:extLst>
   </p:cSld>

--- a/engenharia-software/software-corporativo/boas-praticas/aula-06-spring-security/spring-security.pptx
+++ b/engenharia-software/software-corporativo/boas-praticas/aula-06-spring-security/spring-security.pptx
@@ -28,6 +28,8 @@
     <p:sldId id="314" r:id="rId22"/>
     <p:sldId id="316" r:id="rId23"/>
     <p:sldId id="317" r:id="rId24"/>
+    <p:sldId id="318" r:id="rId25"/>
+    <p:sldId id="319" r:id="rId26"/>
   </p:sldIdLst>
   <p:sldSz cx="12192000" cy="6858000"/>
   <p:notesSz cx="6858000" cy="9144000"/>
@@ -154,6 +156,8 @@
             <p14:sldId id="314"/>
             <p14:sldId id="316"/>
             <p14:sldId id="317"/>
+            <p14:sldId id="318"/>
+            <p14:sldId id="319"/>
           </p14:sldIdLst>
         </p14:section>
       </p14:sectionLst>
@@ -745,7 +749,7 @@
           <a:p>
             <a:fld id="{CDD55C27-F8C6-4481-8569-CAC50CAE9F1F}" type="datetimeFigureOut">
               <a:rPr lang="pt-BR" smtClean="0"/>
-              <a:t>18/09/2026</a:t>
+              <a:t>21/09/2026</a:t>
             </a:fld>
             <a:endParaRPr lang="pt-BR"/>
           </a:p>
@@ -882,7 +886,7 @@
           <a:p>
             <a:fld id="{CDD55C27-F8C6-4481-8569-CAC50CAE9F1F}" type="datetimeFigureOut">
               <a:rPr lang="pt-BR" smtClean="0"/>
-              <a:t>18/09/2026</a:t>
+              <a:t>21/09/2026</a:t>
             </a:fld>
             <a:endParaRPr lang="pt-BR"/>
           </a:p>
@@ -1602,7 +1606,7 @@
           <a:p>
             <a:fld id="{CDD55C27-F8C6-4481-8569-CAC50CAE9F1F}" type="datetimeFigureOut">
               <a:rPr lang="pt-BR" smtClean="0"/>
-              <a:t>18/09/2026</a:t>
+              <a:t>21/09/2026</a:t>
             </a:fld>
             <a:endParaRPr lang="pt-BR"/>
           </a:p>
@@ -1782,7 +1786,7 @@
           <a:p>
             <a:fld id="{CDD55C27-F8C6-4481-8569-CAC50CAE9F1F}" type="datetimeFigureOut">
               <a:rPr lang="pt-BR" smtClean="0"/>
-              <a:t>18/09/2026</a:t>
+              <a:t>21/09/2026</a:t>
             </a:fld>
             <a:endParaRPr lang="pt-BR"/>
           </a:p>
@@ -1962,7 +1966,7 @@
           <a:p>
             <a:fld id="{CDD55C27-F8C6-4481-8569-CAC50CAE9F1F}" type="datetimeFigureOut">
               <a:rPr lang="pt-BR" smtClean="0"/>
-              <a:t>18/09/2026</a:t>
+              <a:t>21/09/2026</a:t>
             </a:fld>
             <a:endParaRPr lang="pt-BR"/>
           </a:p>
@@ -2173,7 +2177,7 @@
           <a:p>
             <a:fld id="{CDD55C27-F8C6-4481-8569-CAC50CAE9F1F}" type="datetimeFigureOut">
               <a:rPr lang="pt-BR" smtClean="0"/>
-              <a:t>18/09/2026</a:t>
+              <a:t>21/09/2026</a:t>
             </a:fld>
             <a:endParaRPr lang="pt-BR"/>
           </a:p>
@@ -2628,7 +2632,7 @@
           <a:p>
             <a:fld id="{CDD55C27-F8C6-4481-8569-CAC50CAE9F1F}" type="datetimeFigureOut">
               <a:rPr lang="pt-BR" smtClean="0"/>
-              <a:t>18/09/2026</a:t>
+              <a:t>21/09/2026</a:t>
             </a:fld>
             <a:endParaRPr lang="pt-BR"/>
           </a:p>
@@ -4085,10 +4089,10 @@
       </p:sp>
       <p:pic>
         <p:nvPicPr>
-          <p:cNvPr id="5" name="Imagem 4">
-            <a:extLst>
-              <a:ext uri="{FF2B5EF4-FFF2-40B4-BE49-F238E27FC236}">
-                <a16:creationId xmlns:a16="http://schemas.microsoft.com/office/drawing/2014/main" id="{8D5D52A4-E898-46AB-96A9-73A47EACF6DA}"/>
+          <p:cNvPr id="6" name="Imagem 5" descr="Uma imagem contendo Linha do tempo&#10;&#10;O conteúdo gerado por IA pode estar incorreto.">
+            <a:extLst>
+              <a:ext uri="{FF2B5EF4-FFF2-40B4-BE49-F238E27FC236}">
+                <a16:creationId xmlns:a16="http://schemas.microsoft.com/office/drawing/2014/main" id="{CA8853E2-0941-ADF9-0D91-195F99EDA9CD}"/>
               </a:ext>
             </a:extLst>
           </p:cNvPr>
@@ -4111,8 +4115,8 @@
         </p:blipFill>
         <p:spPr>
           <a:xfrm>
-            <a:off x="3219450" y="2902295"/>
-            <a:ext cx="5753100" cy="3835400"/>
+            <a:off x="1752599" y="2983384"/>
+            <a:ext cx="8686801" cy="3618755"/>
           </a:xfrm>
           <a:prstGeom prst="rect">
             <a:avLst/>
@@ -8534,7 +8538,7 @@
             <a:bodyPr/>
             <a:lstStyle/>
             <a:p>
-              <a:endParaRPr lang="pt-BR"/>
+              <a:endParaRPr lang="pt-BR" dirty="0"/>
             </a:p>
           </p:txBody>
         </p:sp>
@@ -8953,7 +8957,7 @@
           <a:lstStyle/>
           <a:p>
             <a:r>
-              <a:rPr lang="pt-BR" b="1" dirty="0"/>
+              <a:rPr lang="pt-BR" dirty="0"/>
               <a:t>Proteção de senhas no banco de dados</a:t>
             </a:r>
             <a:br>
@@ -9215,7 +9219,14 @@
           <a:bodyPr/>
           <a:lstStyle/>
           <a:p>
-            <a:endParaRPr lang="pt-BR"/>
+            <a:r>
+              <a:rPr lang="pt-BR" dirty="0"/>
+              <a:t>Proteção de senhas no banco de dados</a:t>
+            </a:r>
+            <a:br>
+              <a:rPr lang="pt-BR" dirty="0"/>
+            </a:br>
+            <a:endParaRPr lang="pt-BR" dirty="0"/>
           </a:p>
         </p:txBody>
       </p:sp>
@@ -9225,6 +9236,395 @@
             <a:extLst>
               <a:ext uri="{FF2B5EF4-FFF2-40B4-BE49-F238E27FC236}">
                 <a16:creationId xmlns:a16="http://schemas.microsoft.com/office/drawing/2014/main" id="{723F4606-EDC8-41B3-B9CF-F573A920BB26}"/>
+              </a:ext>
+            </a:extLst>
+          </p:cNvPr>
+          <p:cNvSpPr>
+            <a:spLocks noGrp="1"/>
+          </p:cNvSpPr>
+          <p:nvPr>
+            <p:ph idx="1"/>
+          </p:nvPr>
+        </p:nvSpPr>
+        <p:spPr>
+          <a:xfrm>
+            <a:off x="592347" y="1844675"/>
+            <a:ext cx="11007306" cy="2602700"/>
+          </a:xfrm>
+        </p:spPr>
+        <p:txBody>
+          <a:bodyPr/>
+          <a:lstStyle/>
+          <a:p>
+            <a:r>
+              <a:rPr lang="pt-BR" sz="1600" dirty="0"/>
+              <a:t>O </a:t>
+            </a:r>
+            <a:r>
+              <a:rPr lang="pt-BR" sz="1600" dirty="0" err="1"/>
+              <a:t>PasswordEncoder</a:t>
+            </a:r>
+            <a:r>
+              <a:rPr lang="pt-BR" sz="1600" dirty="0"/>
+              <a:t> permite gerar </a:t>
+            </a:r>
+            <a:r>
+              <a:rPr lang="pt-BR" sz="1600" dirty="0" err="1"/>
+              <a:t>hashes</a:t>
+            </a:r>
+            <a:r>
+              <a:rPr lang="pt-BR" sz="1600" dirty="0"/>
+              <a:t> de senhas e verificar se a senha informada no login corresponde ao </a:t>
+            </a:r>
+            <a:r>
+              <a:rPr lang="pt-BR" sz="1600" dirty="0" err="1"/>
+              <a:t>hash</a:t>
+            </a:r>
+            <a:r>
+              <a:rPr lang="pt-BR" sz="1600" dirty="0"/>
+              <a:t> salvo no banco.</a:t>
+            </a:r>
+          </a:p>
+          <a:p>
+            <a:endParaRPr lang="pt-BR" sz="1600" dirty="0"/>
+          </a:p>
+          <a:p>
+            <a:r>
+              <a:rPr lang="pt-BR" sz="1600" dirty="0"/>
+              <a:t>Nesse código, o </a:t>
+            </a:r>
+            <a:r>
+              <a:rPr lang="pt-BR" sz="1600" dirty="0" err="1"/>
+              <a:t>BCryptPasswordEncoder</a:t>
+            </a:r>
+            <a:r>
+              <a:rPr lang="pt-BR" sz="1600" dirty="0"/>
+              <a:t> define o </a:t>
+            </a:r>
+            <a:r>
+              <a:rPr lang="pt-BR" sz="1600" dirty="0" err="1"/>
+              <a:t>BCrypt</a:t>
+            </a:r>
+            <a:r>
+              <a:rPr lang="pt-BR" sz="1600" dirty="0"/>
+              <a:t> como algoritmo utilizado. A anotação @Bean disponibiliza esse componente para o Spring, que o utiliza na verificação das senhas durante a autenticação.</a:t>
+            </a:r>
+          </a:p>
+          <a:p>
+            <a:endParaRPr lang="pt-BR" sz="1600" dirty="0"/>
+          </a:p>
+          <a:p>
+            <a:r>
+              <a:rPr lang="pt-BR" sz="1600" dirty="0"/>
+              <a:t>No cadastro, devemos chamar encode() para gerar o </a:t>
+            </a:r>
+            <a:r>
+              <a:rPr lang="pt-BR" sz="1600" dirty="0" err="1"/>
+              <a:t>hash</a:t>
+            </a:r>
+            <a:r>
+              <a:rPr lang="pt-BR" sz="1600" dirty="0"/>
+              <a:t> antes de salvar a senha no banco.</a:t>
+            </a:r>
+          </a:p>
+        </p:txBody>
+      </p:sp>
+      <p:grpSp>
+        <p:nvGrpSpPr>
+          <p:cNvPr id="10" name="Agrupar 9">
+            <a:extLst>
+              <a:ext uri="{FF2B5EF4-FFF2-40B4-BE49-F238E27FC236}">
+                <a16:creationId xmlns:a16="http://schemas.microsoft.com/office/drawing/2014/main" id="{686270E9-66F8-2BB0-BCEE-C8EFFF6795AB}"/>
+              </a:ext>
+            </a:extLst>
+          </p:cNvPr>
+          <p:cNvGrpSpPr/>
+          <p:nvPr/>
+        </p:nvGrpSpPr>
+        <p:grpSpPr>
+          <a:xfrm>
+            <a:off x="2730500" y="4726368"/>
+            <a:ext cx="6731000" cy="1758316"/>
+            <a:chOff x="1179222" y="3335052"/>
+            <a:chExt cx="6731000" cy="1758316"/>
+          </a:xfrm>
+        </p:grpSpPr>
+        <p:sp>
+          <p:nvSpPr>
+            <p:cNvPr id="9" name="Shape 20">
+              <a:extLst>
+                <a:ext uri="{FF2B5EF4-FFF2-40B4-BE49-F238E27FC236}">
+                  <a16:creationId xmlns:a16="http://schemas.microsoft.com/office/drawing/2014/main" id="{E3ED02D1-706A-2A92-20EF-608C79EF5DF4}"/>
+                </a:ext>
+              </a:extLst>
+            </p:cNvPr>
+            <p:cNvSpPr/>
+            <p:nvPr/>
+          </p:nvSpPr>
+          <p:spPr>
+            <a:xfrm>
+              <a:off x="1179222" y="3335052"/>
+              <a:ext cx="6731000" cy="1758316"/>
+            </a:xfrm>
+            <a:prstGeom prst="roundRect">
+              <a:avLst>
+                <a:gd name="adj" fmla="val 8081"/>
+              </a:avLst>
+            </a:prstGeom>
+            <a:solidFill>
+              <a:srgbClr val="191A1C"/>
+            </a:solidFill>
+            <a:ln/>
+          </p:spPr>
+          <p:txBody>
+            <a:bodyPr/>
+            <a:lstStyle/>
+            <a:p>
+              <a:endParaRPr lang="pt-BR" dirty="0"/>
+            </a:p>
+          </p:txBody>
+        </p:sp>
+        <p:sp>
+          <p:nvSpPr>
+            <p:cNvPr id="5" name="CaixaDeTexto 4">
+              <a:extLst>
+                <a:ext uri="{FF2B5EF4-FFF2-40B4-BE49-F238E27FC236}">
+                  <a16:creationId xmlns:a16="http://schemas.microsoft.com/office/drawing/2014/main" id="{28556148-F93A-4ECE-C8C1-43795656BFEE}"/>
+                </a:ext>
+              </a:extLst>
+            </p:cNvPr>
+            <p:cNvSpPr txBox="1"/>
+            <p:nvPr/>
+          </p:nvSpPr>
+          <p:spPr>
+            <a:xfrm>
+              <a:off x="1488701" y="3614046"/>
+              <a:ext cx="6112042" cy="1200329"/>
+            </a:xfrm>
+            <a:prstGeom prst="rect">
+              <a:avLst/>
+            </a:prstGeom>
+            <a:noFill/>
+          </p:spPr>
+          <p:txBody>
+            <a:bodyPr wrap="square">
+              <a:spAutoFit/>
+            </a:bodyPr>
+            <a:lstStyle/>
+            <a:p>
+              <a:pPr>
+                <a:buNone/>
+              </a:pPr>
+              <a:r>
+                <a:rPr lang="en-US" dirty="0">
+                  <a:solidFill>
+                    <a:srgbClr val="B3AE60"/>
+                  </a:solidFill>
+                  <a:effectLst/>
+                  <a:latin typeface="JetBrains Mono"/>
+                </a:rPr>
+                <a:t>@Bean</a:t>
+              </a:r>
+              <a:br>
+                <a:rPr lang="en-US" dirty="0">
+                  <a:solidFill>
+                    <a:srgbClr val="B3AE60"/>
+                  </a:solidFill>
+                  <a:effectLst/>
+                  <a:latin typeface="JetBrains Mono"/>
+                </a:rPr>
+              </a:br>
+              <a:r>
+                <a:rPr lang="en-US" dirty="0">
+                  <a:solidFill>
+                    <a:srgbClr val="CF8E6D"/>
+                  </a:solidFill>
+                  <a:effectLst/>
+                  <a:latin typeface="JetBrains Mono"/>
+                </a:rPr>
+                <a:t>public </a:t>
+              </a:r>
+              <a:r>
+                <a:rPr lang="en-US" dirty="0" err="1">
+                  <a:solidFill>
+                    <a:srgbClr val="BCBEC4"/>
+                  </a:solidFill>
+                  <a:effectLst/>
+                  <a:latin typeface="JetBrains Mono"/>
+                </a:rPr>
+                <a:t>PasswordEncoder</a:t>
+              </a:r>
+              <a:r>
+                <a:rPr lang="en-US" dirty="0">
+                  <a:solidFill>
+                    <a:srgbClr val="BCBEC4"/>
+                  </a:solidFill>
+                  <a:effectLst/>
+                  <a:latin typeface="JetBrains Mono"/>
+                </a:rPr>
+                <a:t> </a:t>
+              </a:r>
+              <a:r>
+                <a:rPr lang="en-US" dirty="0" err="1">
+                  <a:solidFill>
+                    <a:srgbClr val="56A8F5"/>
+                  </a:solidFill>
+                  <a:effectLst/>
+                  <a:latin typeface="JetBrains Mono"/>
+                </a:rPr>
+                <a:t>passwordEncoder</a:t>
+              </a:r>
+              <a:r>
+                <a:rPr lang="en-US" dirty="0">
+                  <a:solidFill>
+                    <a:srgbClr val="BCBEC4"/>
+                  </a:solidFill>
+                  <a:effectLst/>
+                  <a:latin typeface="JetBrains Mono"/>
+                </a:rPr>
+                <a:t>(){</a:t>
+              </a:r>
+              <a:br>
+                <a:rPr lang="en-US" dirty="0">
+                  <a:solidFill>
+                    <a:srgbClr val="BCBEC4"/>
+                  </a:solidFill>
+                  <a:effectLst/>
+                  <a:latin typeface="JetBrains Mono"/>
+                </a:rPr>
+              </a:br>
+              <a:r>
+                <a:rPr lang="en-US" dirty="0">
+                  <a:solidFill>
+                    <a:srgbClr val="BCBEC4"/>
+                  </a:solidFill>
+                  <a:effectLst/>
+                  <a:latin typeface="JetBrains Mono"/>
+                </a:rPr>
+                <a:t>    </a:t>
+              </a:r>
+              <a:r>
+                <a:rPr lang="en-US" dirty="0">
+                  <a:solidFill>
+                    <a:srgbClr val="CF8E6D"/>
+                  </a:solidFill>
+                  <a:effectLst/>
+                  <a:latin typeface="JetBrains Mono"/>
+                </a:rPr>
+                <a:t>return new </a:t>
+              </a:r>
+              <a:r>
+                <a:rPr lang="en-US" dirty="0" err="1">
+                  <a:solidFill>
+                    <a:srgbClr val="BCBEC4"/>
+                  </a:solidFill>
+                  <a:effectLst/>
+                  <a:latin typeface="JetBrains Mono"/>
+                </a:rPr>
+                <a:t>BCryptPasswordEncoder</a:t>
+              </a:r>
+              <a:r>
+                <a:rPr lang="en-US" dirty="0">
+                  <a:solidFill>
+                    <a:srgbClr val="BCBEC4"/>
+                  </a:solidFill>
+                  <a:effectLst/>
+                  <a:latin typeface="JetBrains Mono"/>
+                </a:rPr>
+                <a:t>();</a:t>
+              </a:r>
+              <a:br>
+                <a:rPr lang="en-US" dirty="0">
+                  <a:solidFill>
+                    <a:srgbClr val="BCBEC4"/>
+                  </a:solidFill>
+                  <a:effectLst/>
+                  <a:latin typeface="JetBrains Mono"/>
+                </a:rPr>
+              </a:br>
+              <a:r>
+                <a:rPr lang="en-US" dirty="0">
+                  <a:solidFill>
+                    <a:srgbClr val="BCBEC4"/>
+                  </a:solidFill>
+                  <a:effectLst/>
+                  <a:latin typeface="JetBrains Mono"/>
+                </a:rPr>
+                <a:t>}</a:t>
+              </a:r>
+            </a:p>
+          </p:txBody>
+        </p:sp>
+      </p:grpSp>
+    </p:spTree>
+    <p:extLst>
+      <p:ext uri="{BB962C8B-B14F-4D97-AF65-F5344CB8AC3E}">
+        <p14:creationId xmlns:p14="http://schemas.microsoft.com/office/powerpoint/2010/main" val="2526843331"/>
+      </p:ext>
+    </p:extLst>
+  </p:cSld>
+  <p:clrMapOvr>
+    <a:masterClrMapping/>
+  </p:clrMapOvr>
+</p:sld>
+</file>
+
+<file path=ppt/slides/slide24.xml><?xml version="1.0" encoding="utf-8"?>
+<p:sld xmlns:a="http://schemas.openxmlformats.org/drawingml/2006/main" xmlns:r="http://schemas.openxmlformats.org/officeDocument/2006/relationships" xmlns:p="http://schemas.openxmlformats.org/presentationml/2006/main">
+  <p:cSld>
+    <p:spTree>
+      <p:nvGrpSpPr>
+        <p:cNvPr id="1" name=""/>
+        <p:cNvGrpSpPr/>
+        <p:nvPr/>
+      </p:nvGrpSpPr>
+      <p:grpSpPr>
+        <a:xfrm>
+          <a:off x="0" y="0"/>
+          <a:ext cx="0" cy="0"/>
+          <a:chOff x="0" y="0"/>
+          <a:chExt cx="0" cy="0"/>
+        </a:xfrm>
+      </p:grpSpPr>
+      <p:sp>
+        <p:nvSpPr>
+          <p:cNvPr id="2" name="Título 1">
+            <a:extLst>
+              <a:ext uri="{FF2B5EF4-FFF2-40B4-BE49-F238E27FC236}">
+                <a16:creationId xmlns:a16="http://schemas.microsoft.com/office/drawing/2014/main" id="{0D93A550-D8C9-49AF-0A50-EA6F15F0B457}"/>
+              </a:ext>
+            </a:extLst>
+          </p:cNvPr>
+          <p:cNvSpPr>
+            <a:spLocks noGrp="1"/>
+          </p:cNvSpPr>
+          <p:nvPr>
+            <p:ph type="title"/>
+          </p:nvPr>
+        </p:nvSpPr>
+        <p:spPr/>
+        <p:txBody>
+          <a:bodyPr/>
+          <a:lstStyle/>
+          <a:p>
+            <a:r>
+              <a:rPr lang="pt-BR" dirty="0"/>
+              <a:t>Interface </a:t>
+            </a:r>
+            <a:r>
+              <a:rPr lang="pt-BR" dirty="0" err="1"/>
+              <a:t>UserDetails</a:t>
+            </a:r>
+            <a:endParaRPr lang="pt-BR" dirty="0"/>
+          </a:p>
+        </p:txBody>
+      </p:sp>
+      <p:sp>
+        <p:nvSpPr>
+          <p:cNvPr id="3" name="Espaço Reservado para Conteúdo 2">
+            <a:extLst>
+              <a:ext uri="{FF2B5EF4-FFF2-40B4-BE49-F238E27FC236}">
+                <a16:creationId xmlns:a16="http://schemas.microsoft.com/office/drawing/2014/main" id="{FC0DABB0-E3B5-3B13-A49A-F9DBFF16253E}"/>
               </a:ext>
             </a:extLst>
           </p:cNvPr>
@@ -9240,14 +9640,1200 @@
           <a:bodyPr/>
           <a:lstStyle/>
           <a:p>
-            <a:endParaRPr lang="pt-BR"/>
+            <a:r>
+              <a:rPr lang="pt-BR" sz="1800" dirty="0"/>
+              <a:t>A interface </a:t>
+            </a:r>
+            <a:r>
+              <a:rPr lang="pt-BR" sz="1800" b="1" dirty="0" err="1"/>
+              <a:t>UserDetails</a:t>
+            </a:r>
+            <a:r>
+              <a:rPr lang="pt-BR" sz="1800" dirty="0"/>
+              <a:t> define como o Spring Security acessa as informações necessárias para autenticar e autorizar um usuário.</a:t>
+            </a:r>
+          </a:p>
+          <a:p>
+            <a:r>
+              <a:rPr lang="pt-BR" sz="1800" dirty="0"/>
+              <a:t>Ao implementar essa interface, a classe </a:t>
+            </a:r>
+            <a:r>
+              <a:rPr lang="pt-BR" sz="1800" b="1" dirty="0"/>
+              <a:t>Usuario</a:t>
+            </a:r>
+            <a:r>
+              <a:rPr lang="pt-BR" sz="1800" dirty="0"/>
+              <a:t> fornece o login, o </a:t>
+            </a:r>
+            <a:r>
+              <a:rPr lang="pt-BR" sz="1800" dirty="0" err="1"/>
+              <a:t>hash</a:t>
+            </a:r>
+            <a:r>
+              <a:rPr lang="pt-BR" sz="1800" dirty="0"/>
+              <a:t> da senha e as permissões por meio destes métodos:</a:t>
+            </a:r>
+          </a:p>
+          <a:p>
+            <a:pPr marL="800100" lvl="1" indent="-342900">
+              <a:buFont typeface="Arial" panose="020B0604020202020204" pitchFamily="34" charset="0"/>
+              <a:buChar char="•"/>
+            </a:pPr>
+            <a:r>
+              <a:rPr lang="pt-BR" b="1" dirty="0" err="1"/>
+              <a:t>getUsername</a:t>
+            </a:r>
+            <a:r>
+              <a:rPr lang="pt-BR" b="1" dirty="0"/>
+              <a:t>()</a:t>
+            </a:r>
+            <a:r>
+              <a:rPr lang="pt-BR" dirty="0"/>
+              <a:t> – Retorna o atributo login, que representa a identificação do usuário na autenticação. </a:t>
+            </a:r>
+          </a:p>
+          <a:p>
+            <a:pPr marL="800100" lvl="1" indent="-342900">
+              <a:buFont typeface="Arial" panose="020B0604020202020204" pitchFamily="34" charset="0"/>
+              <a:buChar char="•"/>
+            </a:pPr>
+            <a:r>
+              <a:rPr lang="pt-BR" b="1" dirty="0" err="1"/>
+              <a:t>getPassword</a:t>
+            </a:r>
+            <a:r>
+              <a:rPr lang="pt-BR" b="1" dirty="0"/>
+              <a:t>()</a:t>
+            </a:r>
+            <a:r>
+              <a:rPr lang="pt-BR" dirty="0"/>
+              <a:t> – Retorna o atributo senha, que deve conter o </a:t>
+            </a:r>
+            <a:r>
+              <a:rPr lang="pt-BR" b="1" dirty="0" err="1"/>
+              <a:t>hash</a:t>
+            </a:r>
+            <a:r>
+              <a:rPr lang="pt-BR" b="1" dirty="0"/>
+              <a:t> </a:t>
+            </a:r>
+            <a:r>
+              <a:rPr lang="pt-BR" b="1" dirty="0" err="1"/>
+              <a:t>BCrypt</a:t>
+            </a:r>
+            <a:r>
+              <a:rPr lang="pt-BR" dirty="0"/>
+              <a:t> armazenado no banco. O Spring utiliza esse </a:t>
+            </a:r>
+            <a:r>
+              <a:rPr lang="pt-BR" dirty="0" err="1"/>
+              <a:t>hash</a:t>
+            </a:r>
+            <a:r>
+              <a:rPr lang="pt-BR" dirty="0"/>
+              <a:t> para verificar a senha informada no login. </a:t>
+            </a:r>
+          </a:p>
+          <a:p>
+            <a:pPr marL="800100" lvl="1" indent="-342900">
+              <a:buFont typeface="Arial" panose="020B0604020202020204" pitchFamily="34" charset="0"/>
+              <a:buChar char="•"/>
+            </a:pPr>
+            <a:r>
+              <a:rPr lang="pt-BR" b="1" dirty="0" err="1"/>
+              <a:t>getAuthorities</a:t>
+            </a:r>
+            <a:r>
+              <a:rPr lang="pt-BR" b="1" dirty="0"/>
+              <a:t>()</a:t>
+            </a:r>
+            <a:r>
+              <a:rPr lang="pt-BR" dirty="0"/>
+              <a:t> – Retorna as permissões ou os papéis do usuário, utilizados para controlar o acesso aos recursos da aplicação. Nesse código, todos os usuários recebem o papel </a:t>
+            </a:r>
+            <a:r>
+              <a:rPr lang="pt-BR" b="1" dirty="0"/>
+              <a:t>ROLE_USER</a:t>
+            </a:r>
+            <a:r>
+              <a:rPr lang="pt-BR" dirty="0"/>
+              <a:t>.</a:t>
+            </a:r>
+          </a:p>
+          <a:p>
+            <a:r>
+              <a:rPr lang="pt-BR" sz="1800" dirty="0"/>
+              <a:t>O </a:t>
+            </a:r>
+            <a:r>
+              <a:rPr lang="pt-BR" sz="1800" dirty="0" err="1"/>
+              <a:t>UserDetails</a:t>
+            </a:r>
+            <a:r>
+              <a:rPr lang="pt-BR" sz="1800" dirty="0"/>
+              <a:t> fornece as informações do usuário; ele não realiza a busca no banco nem verifica a senha por conta própria.</a:t>
+            </a:r>
           </a:p>
         </p:txBody>
       </p:sp>
     </p:spTree>
     <p:extLst>
       <p:ext uri="{BB962C8B-B14F-4D97-AF65-F5344CB8AC3E}">
-        <p14:creationId xmlns:p14="http://schemas.microsoft.com/office/powerpoint/2010/main" val="2526843331"/>
+        <p14:creationId xmlns:p14="http://schemas.microsoft.com/office/powerpoint/2010/main" val="4014524"/>
+      </p:ext>
+    </p:extLst>
+  </p:cSld>
+  <p:clrMapOvr>
+    <a:masterClrMapping/>
+  </p:clrMapOvr>
+</p:sld>
+</file>
+
+<file path=ppt/slides/slide25.xml><?xml version="1.0" encoding="utf-8"?>
+<p:sld xmlns:a="http://schemas.openxmlformats.org/drawingml/2006/main" xmlns:r="http://schemas.openxmlformats.org/officeDocument/2006/relationships" xmlns:p="http://schemas.openxmlformats.org/presentationml/2006/main">
+  <p:cSld>
+    <p:spTree>
+      <p:nvGrpSpPr>
+        <p:cNvPr id="1" name=""/>
+        <p:cNvGrpSpPr/>
+        <p:nvPr/>
+      </p:nvGrpSpPr>
+      <p:grpSpPr>
+        <a:xfrm>
+          <a:off x="0" y="0"/>
+          <a:ext cx="0" cy="0"/>
+          <a:chOff x="0" y="0"/>
+          <a:chExt cx="0" cy="0"/>
+        </a:xfrm>
+      </p:grpSpPr>
+      <p:sp>
+        <p:nvSpPr>
+          <p:cNvPr id="2" name="Título 1">
+            <a:extLst>
+              <a:ext uri="{FF2B5EF4-FFF2-40B4-BE49-F238E27FC236}">
+                <a16:creationId xmlns:a16="http://schemas.microsoft.com/office/drawing/2014/main" id="{D830ACE0-FE05-E5D2-5E7C-029A13E8A549}"/>
+              </a:ext>
+            </a:extLst>
+          </p:cNvPr>
+          <p:cNvSpPr>
+            <a:spLocks noGrp="1"/>
+          </p:cNvSpPr>
+          <p:nvPr>
+            <p:ph type="title"/>
+          </p:nvPr>
+        </p:nvSpPr>
+        <p:spPr/>
+        <p:txBody>
+          <a:bodyPr/>
+          <a:lstStyle/>
+          <a:p>
+            <a:r>
+              <a:rPr lang="pt-BR" dirty="0"/>
+              <a:t>Interface </a:t>
+            </a:r>
+            <a:r>
+              <a:rPr lang="pt-BR" dirty="0" err="1"/>
+              <a:t>UserDetails</a:t>
+            </a:r>
+            <a:endParaRPr lang="pt-BR" dirty="0"/>
+          </a:p>
+        </p:txBody>
+      </p:sp>
+      <p:pic>
+        <p:nvPicPr>
+          <p:cNvPr id="5" name="Espaço Reservado para Conteúdo 4" descr="Interface gráfica do usuário, Email&#10;&#10;O conteúdo gerado por IA pode estar incorreto.">
+            <a:extLst>
+              <a:ext uri="{FF2B5EF4-FFF2-40B4-BE49-F238E27FC236}">
+                <a16:creationId xmlns:a16="http://schemas.microsoft.com/office/drawing/2014/main" id="{B40A4CE2-61AD-A975-59E9-E6AEC87A511A}"/>
+              </a:ext>
+            </a:extLst>
+          </p:cNvPr>
+          <p:cNvPicPr>
+            <a:picLocks noGrp="1" noChangeAspect="1"/>
+          </p:cNvPicPr>
+          <p:nvPr>
+            <p:ph idx="1"/>
+          </p:nvPr>
+        </p:nvPicPr>
+        <p:blipFill>
+          <a:blip r:embed="rId2">
+            <a:extLst>
+              <a:ext uri="{28A0092B-C50C-407E-A947-70E740481C1C}">
+                <a14:useLocalDpi xmlns:a14="http://schemas.microsoft.com/office/drawing/2010/main" val="0"/>
+              </a:ext>
+            </a:extLst>
+          </a:blip>
+          <a:stretch>
+            <a:fillRect/>
+          </a:stretch>
+        </p:blipFill>
+        <p:spPr>
+          <a:xfrm>
+            <a:off x="434228" y="3885511"/>
+            <a:ext cx="5043925" cy="2787066"/>
+          </a:xfrm>
+        </p:spPr>
+      </p:pic>
+      <p:grpSp>
+        <p:nvGrpSpPr>
+          <p:cNvPr id="16" name="Agrupar 15">
+            <a:extLst>
+              <a:ext uri="{FF2B5EF4-FFF2-40B4-BE49-F238E27FC236}">
+                <a16:creationId xmlns:a16="http://schemas.microsoft.com/office/drawing/2014/main" id="{B9042AB0-D6C7-3E83-86CC-FE77CC7D6CCB}"/>
+              </a:ext>
+            </a:extLst>
+          </p:cNvPr>
+          <p:cNvGrpSpPr/>
+          <p:nvPr/>
+        </p:nvGrpSpPr>
+        <p:grpSpPr>
+          <a:xfrm>
+            <a:off x="5912381" y="1759504"/>
+            <a:ext cx="5845390" cy="4913073"/>
+            <a:chOff x="473554" y="1933074"/>
+            <a:chExt cx="5845390" cy="4518367"/>
+          </a:xfrm>
+        </p:grpSpPr>
+        <p:sp>
+          <p:nvSpPr>
+            <p:cNvPr id="11" name="Shape 20">
+              <a:extLst>
+                <a:ext uri="{FF2B5EF4-FFF2-40B4-BE49-F238E27FC236}">
+                  <a16:creationId xmlns:a16="http://schemas.microsoft.com/office/drawing/2014/main" id="{1BC104DF-F781-D83E-57FA-50D965F2FF25}"/>
+                </a:ext>
+              </a:extLst>
+            </p:cNvPr>
+            <p:cNvSpPr/>
+            <p:nvPr/>
+          </p:nvSpPr>
+          <p:spPr>
+            <a:xfrm>
+              <a:off x="473554" y="1933074"/>
+              <a:ext cx="5845390" cy="4518367"/>
+            </a:xfrm>
+            <a:prstGeom prst="roundRect">
+              <a:avLst>
+                <a:gd name="adj" fmla="val 8081"/>
+              </a:avLst>
+            </a:prstGeom>
+            <a:solidFill>
+              <a:srgbClr val="191A1C"/>
+            </a:solidFill>
+            <a:ln/>
+          </p:spPr>
+          <p:txBody>
+            <a:bodyPr/>
+            <a:lstStyle/>
+            <a:p>
+              <a:endParaRPr lang="pt-BR" dirty="0"/>
+            </a:p>
+          </p:txBody>
+        </p:sp>
+        <p:sp>
+          <p:nvSpPr>
+            <p:cNvPr id="12" name="CaixaDeTexto 11">
+              <a:extLst>
+                <a:ext uri="{FF2B5EF4-FFF2-40B4-BE49-F238E27FC236}">
+                  <a16:creationId xmlns:a16="http://schemas.microsoft.com/office/drawing/2014/main" id="{B37E06B0-ACE2-659A-4D2C-11B827D2D46D}"/>
+                </a:ext>
+              </a:extLst>
+            </p:cNvPr>
+            <p:cNvSpPr txBox="1"/>
+            <p:nvPr/>
+          </p:nvSpPr>
+          <p:spPr>
+            <a:xfrm>
+              <a:off x="689087" y="2345353"/>
+              <a:ext cx="5414324" cy="3693808"/>
+            </a:xfrm>
+            <a:prstGeom prst="rect">
+              <a:avLst/>
+            </a:prstGeom>
+            <a:noFill/>
+          </p:spPr>
+          <p:txBody>
+            <a:bodyPr wrap="square">
+              <a:spAutoFit/>
+            </a:bodyPr>
+            <a:lstStyle/>
+            <a:p>
+              <a:pPr>
+                <a:buNone/>
+              </a:pPr>
+              <a:r>
+                <a:rPr lang="pt-BR" sz="1500" dirty="0" err="1">
+                  <a:solidFill>
+                    <a:srgbClr val="CF8E6D"/>
+                  </a:solidFill>
+                  <a:effectLst/>
+                  <a:latin typeface="JetBrains Mono"/>
+                </a:rPr>
+                <a:t>public</a:t>
+              </a:r>
+              <a:r>
+                <a:rPr lang="pt-BR" sz="1500" dirty="0">
+                  <a:solidFill>
+                    <a:srgbClr val="CF8E6D"/>
+                  </a:solidFill>
+                  <a:effectLst/>
+                  <a:latin typeface="JetBrains Mono"/>
+                </a:rPr>
+                <a:t> </a:t>
+              </a:r>
+              <a:r>
+                <a:rPr lang="pt-BR" sz="1500" dirty="0" err="1">
+                  <a:solidFill>
+                    <a:srgbClr val="CF8E6D"/>
+                  </a:solidFill>
+                  <a:effectLst/>
+                  <a:latin typeface="JetBrains Mono"/>
+                </a:rPr>
+                <a:t>class</a:t>
+              </a:r>
+              <a:r>
+                <a:rPr lang="pt-BR" sz="1500" dirty="0">
+                  <a:solidFill>
+                    <a:srgbClr val="CF8E6D"/>
+                  </a:solidFill>
+                  <a:effectLst/>
+                  <a:latin typeface="JetBrains Mono"/>
+                </a:rPr>
+                <a:t> </a:t>
+              </a:r>
+              <a:r>
+                <a:rPr lang="pt-BR" sz="1500" dirty="0">
+                  <a:solidFill>
+                    <a:srgbClr val="BCBEC4"/>
+                  </a:solidFill>
+                  <a:effectLst/>
+                  <a:latin typeface="JetBrains Mono"/>
+                </a:rPr>
+                <a:t>Usuario </a:t>
+              </a:r>
+              <a:r>
+                <a:rPr lang="pt-BR" sz="1500" dirty="0" err="1">
+                  <a:solidFill>
+                    <a:srgbClr val="CF8E6D"/>
+                  </a:solidFill>
+                  <a:effectLst/>
+                  <a:latin typeface="JetBrains Mono"/>
+                </a:rPr>
+                <a:t>implements</a:t>
+              </a:r>
+              <a:r>
+                <a:rPr lang="pt-BR" sz="1500" dirty="0">
+                  <a:solidFill>
+                    <a:srgbClr val="CF8E6D"/>
+                  </a:solidFill>
+                  <a:effectLst/>
+                  <a:latin typeface="JetBrains Mono"/>
+                </a:rPr>
+                <a:t> </a:t>
+              </a:r>
+              <a:r>
+                <a:rPr lang="pt-BR" sz="1500" dirty="0" err="1">
+                  <a:solidFill>
+                    <a:srgbClr val="BCBEC4"/>
+                  </a:solidFill>
+                  <a:effectLst/>
+                  <a:latin typeface="JetBrains Mono"/>
+                </a:rPr>
+                <a:t>UserDetails</a:t>
+              </a:r>
+              <a:r>
+                <a:rPr lang="pt-BR" sz="1500" dirty="0">
+                  <a:solidFill>
+                    <a:srgbClr val="BCBEC4"/>
+                  </a:solidFill>
+                  <a:effectLst/>
+                  <a:latin typeface="JetBrains Mono"/>
+                </a:rPr>
+                <a:t> {</a:t>
+              </a:r>
+              <a:br>
+                <a:rPr lang="pt-BR" sz="1500" dirty="0">
+                  <a:solidFill>
+                    <a:srgbClr val="BCBEC4"/>
+                  </a:solidFill>
+                  <a:effectLst/>
+                  <a:latin typeface="JetBrains Mono"/>
+                </a:rPr>
+              </a:br>
+              <a:r>
+                <a:rPr lang="pt-BR" sz="1500" dirty="0">
+                  <a:solidFill>
+                    <a:srgbClr val="BCBEC4"/>
+                  </a:solidFill>
+                  <a:effectLst/>
+                  <a:latin typeface="JetBrains Mono"/>
+                </a:rPr>
+                <a:t>   </a:t>
+              </a:r>
+              <a:br>
+                <a:rPr lang="pt-BR" sz="1500" dirty="0">
+                  <a:solidFill>
+                    <a:srgbClr val="BCBEC4"/>
+                  </a:solidFill>
+                  <a:effectLst/>
+                  <a:latin typeface="JetBrains Mono"/>
+                </a:rPr>
+              </a:br>
+              <a:r>
+                <a:rPr lang="pt-BR" sz="1500" dirty="0">
+                  <a:solidFill>
+                    <a:srgbClr val="BCBEC4"/>
+                  </a:solidFill>
+                  <a:effectLst/>
+                  <a:latin typeface="JetBrains Mono"/>
+                </a:rPr>
+                <a:t>    </a:t>
+              </a:r>
+              <a:r>
+                <a:rPr lang="pt-BR" sz="1500" dirty="0">
+                  <a:solidFill>
+                    <a:srgbClr val="B3AE60"/>
+                  </a:solidFill>
+                  <a:effectLst/>
+                  <a:latin typeface="JetBrains Mono"/>
+                </a:rPr>
+                <a:t>@Override</a:t>
+              </a:r>
+              <a:br>
+                <a:rPr lang="pt-BR" sz="1500" dirty="0">
+                  <a:solidFill>
+                    <a:srgbClr val="B3AE60"/>
+                  </a:solidFill>
+                  <a:effectLst/>
+                  <a:latin typeface="JetBrains Mono"/>
+                </a:rPr>
+              </a:br>
+              <a:r>
+                <a:rPr lang="pt-BR" sz="1500" dirty="0">
+                  <a:solidFill>
+                    <a:srgbClr val="B3AE60"/>
+                  </a:solidFill>
+                  <a:effectLst/>
+                  <a:latin typeface="JetBrains Mono"/>
+                </a:rPr>
+                <a:t>    </a:t>
+              </a:r>
+              <a:r>
+                <a:rPr lang="pt-BR" sz="1500" dirty="0" err="1">
+                  <a:solidFill>
+                    <a:srgbClr val="CF8E6D"/>
+                  </a:solidFill>
+                  <a:effectLst/>
+                  <a:latin typeface="JetBrains Mono"/>
+                </a:rPr>
+                <a:t>public</a:t>
+              </a:r>
+              <a:r>
+                <a:rPr lang="pt-BR" sz="1500" dirty="0">
+                  <a:solidFill>
+                    <a:srgbClr val="CF8E6D"/>
+                  </a:solidFill>
+                  <a:effectLst/>
+                  <a:latin typeface="JetBrains Mono"/>
+                </a:rPr>
+                <a:t> </a:t>
+              </a:r>
+              <a:r>
+                <a:rPr lang="pt-BR" sz="1500" dirty="0" err="1">
+                  <a:solidFill>
+                    <a:srgbClr val="BCBEC4"/>
+                  </a:solidFill>
+                  <a:effectLst/>
+                  <a:latin typeface="JetBrains Mono"/>
+                </a:rPr>
+                <a:t>Collection</a:t>
+              </a:r>
+              <a:r>
+                <a:rPr lang="pt-BR" sz="1500" dirty="0">
+                  <a:solidFill>
+                    <a:srgbClr val="BCBEC4"/>
+                  </a:solidFill>
+                  <a:effectLst/>
+                  <a:latin typeface="JetBrains Mono"/>
+                </a:rPr>
+                <a:t>&lt;? </a:t>
+              </a:r>
+              <a:r>
+                <a:rPr lang="pt-BR" sz="1500" dirty="0" err="1">
+                  <a:solidFill>
+                    <a:srgbClr val="CF8E6D"/>
+                  </a:solidFill>
+                  <a:effectLst/>
+                  <a:latin typeface="JetBrains Mono"/>
+                </a:rPr>
+                <a:t>extends</a:t>
+              </a:r>
+              <a:r>
+                <a:rPr lang="pt-BR" sz="1500" dirty="0">
+                  <a:solidFill>
+                    <a:srgbClr val="CF8E6D"/>
+                  </a:solidFill>
+                  <a:effectLst/>
+                  <a:latin typeface="JetBrains Mono"/>
+                </a:rPr>
+                <a:t> </a:t>
+              </a:r>
+              <a:r>
+                <a:rPr lang="pt-BR" sz="1500" dirty="0" err="1">
+                  <a:solidFill>
+                    <a:srgbClr val="BCBEC4"/>
+                  </a:solidFill>
+                  <a:effectLst/>
+                  <a:latin typeface="JetBrains Mono"/>
+                </a:rPr>
+                <a:t>GrantedAuthority</a:t>
+              </a:r>
+              <a:r>
+                <a:rPr lang="pt-BR" sz="1500" dirty="0">
+                  <a:solidFill>
+                    <a:srgbClr val="BCBEC4"/>
+                  </a:solidFill>
+                  <a:effectLst/>
+                  <a:latin typeface="JetBrains Mono"/>
+                </a:rPr>
+                <a:t>&gt; </a:t>
+              </a:r>
+              <a:r>
+                <a:rPr lang="pt-BR" sz="1500" dirty="0" err="1">
+                  <a:solidFill>
+                    <a:srgbClr val="56A8F5"/>
+                  </a:solidFill>
+                  <a:effectLst/>
+                  <a:latin typeface="JetBrains Mono"/>
+                </a:rPr>
+                <a:t>getAuthorities</a:t>
+              </a:r>
+              <a:r>
+                <a:rPr lang="pt-BR" sz="1500" dirty="0">
+                  <a:solidFill>
+                    <a:srgbClr val="BCBEC4"/>
+                  </a:solidFill>
+                  <a:effectLst/>
+                  <a:latin typeface="JetBrains Mono"/>
+                </a:rPr>
+                <a:t>() {</a:t>
+              </a:r>
+              <a:br>
+                <a:rPr lang="pt-BR" sz="1500" dirty="0">
+                  <a:solidFill>
+                    <a:srgbClr val="BCBEC4"/>
+                  </a:solidFill>
+                  <a:effectLst/>
+                  <a:latin typeface="JetBrains Mono"/>
+                </a:rPr>
+              </a:br>
+              <a:r>
+                <a:rPr lang="pt-BR" sz="1500" dirty="0">
+                  <a:solidFill>
+                    <a:srgbClr val="BCBEC4"/>
+                  </a:solidFill>
+                  <a:effectLst/>
+                  <a:latin typeface="JetBrains Mono"/>
+                </a:rPr>
+                <a:t>        </a:t>
+              </a:r>
+              <a:r>
+                <a:rPr lang="pt-BR" sz="1500" dirty="0" err="1">
+                  <a:solidFill>
+                    <a:srgbClr val="CF8E6D"/>
+                  </a:solidFill>
+                  <a:effectLst/>
+                  <a:latin typeface="JetBrains Mono"/>
+                </a:rPr>
+                <a:t>return</a:t>
+              </a:r>
+              <a:r>
+                <a:rPr lang="pt-BR" sz="1500" dirty="0">
+                  <a:solidFill>
+                    <a:srgbClr val="CF8E6D"/>
+                  </a:solidFill>
+                  <a:effectLst/>
+                  <a:latin typeface="JetBrains Mono"/>
+                </a:rPr>
+                <a:t> </a:t>
+              </a:r>
+              <a:r>
+                <a:rPr lang="pt-BR" sz="1500" dirty="0" err="1">
+                  <a:solidFill>
+                    <a:srgbClr val="BCBEC4"/>
+                  </a:solidFill>
+                  <a:effectLst/>
+                  <a:latin typeface="JetBrains Mono"/>
+                </a:rPr>
+                <a:t>List.</a:t>
+              </a:r>
+              <a:r>
+                <a:rPr lang="pt-BR" sz="1500" i="1" dirty="0" err="1">
+                  <a:solidFill>
+                    <a:srgbClr val="BCBEC4"/>
+                  </a:solidFill>
+                  <a:effectLst/>
+                  <a:latin typeface="JetBrains Mono"/>
+                </a:rPr>
+                <a:t>of</a:t>
+              </a:r>
+              <a:r>
+                <a:rPr lang="pt-BR" sz="1500" dirty="0">
+                  <a:solidFill>
+                    <a:srgbClr val="BCBEC4"/>
+                  </a:solidFill>
+                  <a:effectLst/>
+                  <a:latin typeface="JetBrains Mono"/>
+                </a:rPr>
+                <a:t>(</a:t>
+              </a:r>
+              <a:r>
+                <a:rPr lang="pt-BR" sz="1500" dirty="0">
+                  <a:solidFill>
+                    <a:srgbClr val="CF8E6D"/>
+                  </a:solidFill>
+                  <a:effectLst/>
+                  <a:latin typeface="JetBrains Mono"/>
+                </a:rPr>
+                <a:t>new </a:t>
+              </a:r>
+              <a:r>
+                <a:rPr lang="pt-BR" sz="1500" dirty="0" err="1">
+                  <a:solidFill>
+                    <a:srgbClr val="BCBEC4"/>
+                  </a:solidFill>
+                  <a:effectLst/>
+                  <a:latin typeface="JetBrains Mono"/>
+                </a:rPr>
+                <a:t>SimpleGrantedAuthority</a:t>
+              </a:r>
+              <a:r>
+                <a:rPr lang="pt-BR" sz="1500" dirty="0">
+                  <a:solidFill>
+                    <a:srgbClr val="BCBEC4"/>
+                  </a:solidFill>
+                  <a:effectLst/>
+                  <a:latin typeface="JetBrains Mono"/>
+                </a:rPr>
+                <a:t>(</a:t>
+              </a:r>
+              <a:r>
+                <a:rPr lang="pt-BR" sz="1500" dirty="0">
+                  <a:solidFill>
+                    <a:srgbClr val="6AAB73"/>
+                  </a:solidFill>
+                  <a:effectLst/>
+                  <a:latin typeface="JetBrains Mono"/>
+                </a:rPr>
+                <a:t>"ROLE_USER"</a:t>
+              </a:r>
+              <a:r>
+                <a:rPr lang="pt-BR" sz="1500" dirty="0">
+                  <a:solidFill>
+                    <a:srgbClr val="BCBEC4"/>
+                  </a:solidFill>
+                  <a:effectLst/>
+                  <a:latin typeface="JetBrains Mono"/>
+                </a:rPr>
+                <a:t>));</a:t>
+              </a:r>
+              <a:br>
+                <a:rPr lang="pt-BR" sz="1500" dirty="0">
+                  <a:solidFill>
+                    <a:srgbClr val="BCBEC4"/>
+                  </a:solidFill>
+                  <a:effectLst/>
+                  <a:latin typeface="JetBrains Mono"/>
+                </a:rPr>
+              </a:br>
+              <a:r>
+                <a:rPr lang="pt-BR" sz="1500" dirty="0">
+                  <a:solidFill>
+                    <a:srgbClr val="BCBEC4"/>
+                  </a:solidFill>
+                  <a:effectLst/>
+                  <a:latin typeface="JetBrains Mono"/>
+                </a:rPr>
+                <a:t>    }</a:t>
+              </a:r>
+              <a:br>
+                <a:rPr lang="pt-BR" sz="1500" dirty="0">
+                  <a:solidFill>
+                    <a:srgbClr val="BCBEC4"/>
+                  </a:solidFill>
+                  <a:effectLst/>
+                  <a:latin typeface="JetBrains Mono"/>
+                </a:rPr>
+              </a:br>
+              <a:br>
+                <a:rPr lang="pt-BR" sz="1500" dirty="0">
+                  <a:solidFill>
+                    <a:srgbClr val="BCBEC4"/>
+                  </a:solidFill>
+                  <a:effectLst/>
+                  <a:latin typeface="JetBrains Mono"/>
+                </a:rPr>
+              </a:br>
+              <a:r>
+                <a:rPr lang="pt-BR" sz="1500" dirty="0">
+                  <a:solidFill>
+                    <a:srgbClr val="BCBEC4"/>
+                  </a:solidFill>
+                  <a:effectLst/>
+                  <a:latin typeface="JetBrains Mono"/>
+                </a:rPr>
+                <a:t>    </a:t>
+              </a:r>
+              <a:r>
+                <a:rPr lang="pt-BR" sz="1500" dirty="0">
+                  <a:solidFill>
+                    <a:srgbClr val="B3AE60"/>
+                  </a:solidFill>
+                  <a:effectLst/>
+                  <a:latin typeface="JetBrains Mono"/>
+                </a:rPr>
+                <a:t>@Override</a:t>
+              </a:r>
+              <a:br>
+                <a:rPr lang="pt-BR" sz="1500" dirty="0">
+                  <a:solidFill>
+                    <a:srgbClr val="B3AE60"/>
+                  </a:solidFill>
+                  <a:effectLst/>
+                  <a:latin typeface="JetBrains Mono"/>
+                </a:rPr>
+              </a:br>
+              <a:r>
+                <a:rPr lang="pt-BR" sz="1500" dirty="0">
+                  <a:solidFill>
+                    <a:srgbClr val="B3AE60"/>
+                  </a:solidFill>
+                  <a:effectLst/>
+                  <a:latin typeface="JetBrains Mono"/>
+                </a:rPr>
+                <a:t>    </a:t>
+              </a:r>
+              <a:r>
+                <a:rPr lang="pt-BR" sz="1500" dirty="0" err="1">
+                  <a:solidFill>
+                    <a:srgbClr val="CF8E6D"/>
+                  </a:solidFill>
+                  <a:effectLst/>
+                  <a:latin typeface="JetBrains Mono"/>
+                </a:rPr>
+                <a:t>public</a:t>
+              </a:r>
+              <a:r>
+                <a:rPr lang="pt-BR" sz="1500" dirty="0">
+                  <a:solidFill>
+                    <a:srgbClr val="CF8E6D"/>
+                  </a:solidFill>
+                  <a:effectLst/>
+                  <a:latin typeface="JetBrains Mono"/>
+                </a:rPr>
+                <a:t> </a:t>
+              </a:r>
+              <a:r>
+                <a:rPr lang="pt-BR" sz="1500" dirty="0">
+                  <a:solidFill>
+                    <a:srgbClr val="B3AE60"/>
+                  </a:solidFill>
+                  <a:effectLst/>
+                  <a:latin typeface="JetBrains Mono"/>
+                </a:rPr>
+                <a:t>@Nullable </a:t>
+              </a:r>
+              <a:r>
+                <a:rPr lang="pt-BR" sz="1500" dirty="0" err="1">
+                  <a:solidFill>
+                    <a:srgbClr val="BCBEC4"/>
+                  </a:solidFill>
+                  <a:effectLst/>
+                  <a:latin typeface="JetBrains Mono"/>
+                </a:rPr>
+                <a:t>String</a:t>
+              </a:r>
+              <a:r>
+                <a:rPr lang="pt-BR" sz="1500" dirty="0">
+                  <a:solidFill>
+                    <a:srgbClr val="BCBEC4"/>
+                  </a:solidFill>
+                  <a:effectLst/>
+                  <a:latin typeface="JetBrains Mono"/>
+                </a:rPr>
+                <a:t> </a:t>
+              </a:r>
+              <a:r>
+                <a:rPr lang="pt-BR" sz="1500" dirty="0" err="1">
+                  <a:solidFill>
+                    <a:srgbClr val="56A8F5"/>
+                  </a:solidFill>
+                  <a:effectLst/>
+                  <a:latin typeface="JetBrains Mono"/>
+                </a:rPr>
+                <a:t>getPassword</a:t>
+              </a:r>
+              <a:r>
+                <a:rPr lang="pt-BR" sz="1500" dirty="0">
+                  <a:solidFill>
+                    <a:srgbClr val="BCBEC4"/>
+                  </a:solidFill>
+                  <a:effectLst/>
+                  <a:latin typeface="JetBrains Mono"/>
+                </a:rPr>
+                <a:t>() {</a:t>
+              </a:r>
+              <a:br>
+                <a:rPr lang="pt-BR" sz="1500" dirty="0">
+                  <a:solidFill>
+                    <a:srgbClr val="BCBEC4"/>
+                  </a:solidFill>
+                  <a:effectLst/>
+                  <a:latin typeface="JetBrains Mono"/>
+                </a:rPr>
+              </a:br>
+              <a:r>
+                <a:rPr lang="pt-BR" sz="1500" dirty="0">
+                  <a:solidFill>
+                    <a:srgbClr val="BCBEC4"/>
+                  </a:solidFill>
+                  <a:effectLst/>
+                  <a:latin typeface="JetBrains Mono"/>
+                </a:rPr>
+                <a:t>        </a:t>
+              </a:r>
+              <a:r>
+                <a:rPr lang="pt-BR" sz="1500" dirty="0" err="1">
+                  <a:solidFill>
+                    <a:srgbClr val="CF8E6D"/>
+                  </a:solidFill>
+                  <a:effectLst/>
+                  <a:latin typeface="JetBrains Mono"/>
+                </a:rPr>
+                <a:t>return</a:t>
+              </a:r>
+              <a:r>
+                <a:rPr lang="pt-BR" sz="1500" dirty="0">
+                  <a:solidFill>
+                    <a:srgbClr val="CF8E6D"/>
+                  </a:solidFill>
+                  <a:effectLst/>
+                  <a:latin typeface="JetBrains Mono"/>
+                </a:rPr>
+                <a:t> </a:t>
+              </a:r>
+              <a:r>
+                <a:rPr lang="pt-BR" sz="1500" dirty="0">
+                  <a:solidFill>
+                    <a:srgbClr val="BCBEC4"/>
+                  </a:solidFill>
+                  <a:effectLst/>
+                  <a:latin typeface="JetBrains Mono"/>
+                </a:rPr>
+                <a:t>senha;</a:t>
+              </a:r>
+              <a:br>
+                <a:rPr lang="pt-BR" sz="1500" dirty="0">
+                  <a:solidFill>
+                    <a:srgbClr val="BCBEC4"/>
+                  </a:solidFill>
+                  <a:effectLst/>
+                  <a:latin typeface="JetBrains Mono"/>
+                </a:rPr>
+              </a:br>
+              <a:r>
+                <a:rPr lang="pt-BR" sz="1500" dirty="0">
+                  <a:solidFill>
+                    <a:srgbClr val="BCBEC4"/>
+                  </a:solidFill>
+                  <a:effectLst/>
+                  <a:latin typeface="JetBrains Mono"/>
+                </a:rPr>
+                <a:t>    }</a:t>
+              </a:r>
+              <a:br>
+                <a:rPr lang="pt-BR" sz="1500" dirty="0">
+                  <a:solidFill>
+                    <a:srgbClr val="BCBEC4"/>
+                  </a:solidFill>
+                  <a:effectLst/>
+                  <a:latin typeface="JetBrains Mono"/>
+                </a:rPr>
+              </a:br>
+              <a:br>
+                <a:rPr lang="pt-BR" sz="1500" dirty="0">
+                  <a:solidFill>
+                    <a:srgbClr val="BCBEC4"/>
+                  </a:solidFill>
+                  <a:effectLst/>
+                  <a:latin typeface="JetBrains Mono"/>
+                </a:rPr>
+              </a:br>
+              <a:r>
+                <a:rPr lang="pt-BR" sz="1500" dirty="0">
+                  <a:solidFill>
+                    <a:srgbClr val="BCBEC4"/>
+                  </a:solidFill>
+                  <a:effectLst/>
+                  <a:latin typeface="JetBrains Mono"/>
+                </a:rPr>
+                <a:t>    </a:t>
+              </a:r>
+              <a:r>
+                <a:rPr lang="pt-BR" sz="1500" dirty="0">
+                  <a:solidFill>
+                    <a:srgbClr val="B3AE60"/>
+                  </a:solidFill>
+                  <a:effectLst/>
+                  <a:latin typeface="JetBrains Mono"/>
+                </a:rPr>
+                <a:t>@Override</a:t>
+              </a:r>
+              <a:br>
+                <a:rPr lang="pt-BR" sz="1500" dirty="0">
+                  <a:solidFill>
+                    <a:srgbClr val="B3AE60"/>
+                  </a:solidFill>
+                  <a:effectLst/>
+                  <a:latin typeface="JetBrains Mono"/>
+                </a:rPr>
+              </a:br>
+              <a:r>
+                <a:rPr lang="pt-BR" sz="1500" dirty="0">
+                  <a:solidFill>
+                    <a:srgbClr val="B3AE60"/>
+                  </a:solidFill>
+                  <a:effectLst/>
+                  <a:latin typeface="JetBrains Mono"/>
+                </a:rPr>
+                <a:t>    </a:t>
+              </a:r>
+              <a:r>
+                <a:rPr lang="pt-BR" sz="1500" dirty="0" err="1">
+                  <a:solidFill>
+                    <a:srgbClr val="CF8E6D"/>
+                  </a:solidFill>
+                  <a:effectLst/>
+                  <a:latin typeface="JetBrains Mono"/>
+                </a:rPr>
+                <a:t>public</a:t>
+              </a:r>
+              <a:r>
+                <a:rPr lang="pt-BR" sz="1500" dirty="0">
+                  <a:solidFill>
+                    <a:srgbClr val="CF8E6D"/>
+                  </a:solidFill>
+                  <a:effectLst/>
+                  <a:latin typeface="JetBrains Mono"/>
+                </a:rPr>
+                <a:t> </a:t>
+              </a:r>
+              <a:r>
+                <a:rPr lang="pt-BR" sz="1500" dirty="0" err="1">
+                  <a:solidFill>
+                    <a:srgbClr val="BCBEC4"/>
+                  </a:solidFill>
+                  <a:effectLst/>
+                  <a:latin typeface="JetBrains Mono"/>
+                </a:rPr>
+                <a:t>String</a:t>
+              </a:r>
+              <a:r>
+                <a:rPr lang="pt-BR" sz="1500" dirty="0">
+                  <a:solidFill>
+                    <a:srgbClr val="BCBEC4"/>
+                  </a:solidFill>
+                  <a:effectLst/>
+                  <a:latin typeface="JetBrains Mono"/>
+                </a:rPr>
+                <a:t> </a:t>
+              </a:r>
+              <a:r>
+                <a:rPr lang="pt-BR" sz="1500" dirty="0" err="1">
+                  <a:solidFill>
+                    <a:srgbClr val="56A8F5"/>
+                  </a:solidFill>
+                  <a:effectLst/>
+                  <a:latin typeface="JetBrains Mono"/>
+                </a:rPr>
+                <a:t>getUsername</a:t>
+              </a:r>
+              <a:r>
+                <a:rPr lang="pt-BR" sz="1500" dirty="0">
+                  <a:solidFill>
+                    <a:srgbClr val="BCBEC4"/>
+                  </a:solidFill>
+                  <a:effectLst/>
+                  <a:latin typeface="JetBrains Mono"/>
+                </a:rPr>
+                <a:t>() {</a:t>
+              </a:r>
+              <a:br>
+                <a:rPr lang="pt-BR" sz="1500" dirty="0">
+                  <a:solidFill>
+                    <a:srgbClr val="BCBEC4"/>
+                  </a:solidFill>
+                  <a:effectLst/>
+                  <a:latin typeface="JetBrains Mono"/>
+                </a:rPr>
+              </a:br>
+              <a:r>
+                <a:rPr lang="pt-BR" sz="1500" dirty="0">
+                  <a:solidFill>
+                    <a:srgbClr val="BCBEC4"/>
+                  </a:solidFill>
+                  <a:effectLst/>
+                  <a:latin typeface="JetBrains Mono"/>
+                </a:rPr>
+                <a:t>        </a:t>
+              </a:r>
+              <a:r>
+                <a:rPr lang="pt-BR" sz="1500" dirty="0" err="1">
+                  <a:solidFill>
+                    <a:srgbClr val="CF8E6D"/>
+                  </a:solidFill>
+                  <a:effectLst/>
+                  <a:latin typeface="JetBrains Mono"/>
+                </a:rPr>
+                <a:t>return</a:t>
+              </a:r>
+              <a:r>
+                <a:rPr lang="pt-BR" sz="1500" dirty="0">
+                  <a:solidFill>
+                    <a:srgbClr val="CF8E6D"/>
+                  </a:solidFill>
+                  <a:effectLst/>
+                  <a:latin typeface="JetBrains Mono"/>
+                </a:rPr>
+                <a:t> </a:t>
+              </a:r>
+              <a:r>
+                <a:rPr lang="pt-BR" sz="1500" dirty="0">
+                  <a:solidFill>
+                    <a:srgbClr val="BCBEC4"/>
+                  </a:solidFill>
+                  <a:effectLst/>
+                  <a:latin typeface="JetBrains Mono"/>
+                </a:rPr>
+                <a:t>login;</a:t>
+              </a:r>
+              <a:br>
+                <a:rPr lang="pt-BR" sz="1500" dirty="0">
+                  <a:solidFill>
+                    <a:srgbClr val="BCBEC4"/>
+                  </a:solidFill>
+                  <a:effectLst/>
+                  <a:latin typeface="JetBrains Mono"/>
+                </a:rPr>
+              </a:br>
+              <a:r>
+                <a:rPr lang="pt-BR" sz="1500" dirty="0">
+                  <a:solidFill>
+                    <a:srgbClr val="BCBEC4"/>
+                  </a:solidFill>
+                  <a:effectLst/>
+                  <a:latin typeface="JetBrains Mono"/>
+                </a:rPr>
+                <a:t>    }</a:t>
+              </a:r>
+              <a:br>
+                <a:rPr lang="pt-BR" sz="1500" dirty="0">
+                  <a:solidFill>
+                    <a:srgbClr val="BCBEC4"/>
+                  </a:solidFill>
+                  <a:effectLst/>
+                  <a:latin typeface="JetBrains Mono"/>
+                </a:rPr>
+              </a:br>
+              <a:r>
+                <a:rPr lang="pt-BR" sz="1500" dirty="0">
+                  <a:solidFill>
+                    <a:srgbClr val="BCBEC4"/>
+                  </a:solidFill>
+                  <a:effectLst/>
+                  <a:latin typeface="JetBrains Mono"/>
+                </a:rPr>
+                <a:t>}</a:t>
+              </a:r>
+            </a:p>
+          </p:txBody>
+        </p:sp>
+      </p:grpSp>
+      <p:sp>
+        <p:nvSpPr>
+          <p:cNvPr id="18" name="CaixaDeTexto 17">
+            <a:extLst>
+              <a:ext uri="{FF2B5EF4-FFF2-40B4-BE49-F238E27FC236}">
+                <a16:creationId xmlns:a16="http://schemas.microsoft.com/office/drawing/2014/main" id="{A35A5F52-A328-3E72-7A4F-3E31EA588E9F}"/>
+              </a:ext>
+            </a:extLst>
+          </p:cNvPr>
+          <p:cNvSpPr txBox="1"/>
+          <p:nvPr/>
+        </p:nvSpPr>
+        <p:spPr>
+          <a:xfrm>
+            <a:off x="434228" y="1759504"/>
+            <a:ext cx="5043925" cy="1669496"/>
+          </a:xfrm>
+          <a:prstGeom prst="rect">
+            <a:avLst/>
+          </a:prstGeom>
+          <a:noFill/>
+        </p:spPr>
+        <p:txBody>
+          <a:bodyPr wrap="square">
+            <a:spAutoFit/>
+          </a:bodyPr>
+          <a:lstStyle/>
+          <a:p>
+            <a:pPr algn="just">
+              <a:lnSpc>
+                <a:spcPct val="150000"/>
+              </a:lnSpc>
+            </a:pPr>
+            <a:r>
+              <a:rPr lang="pt-BR" sz="1400" dirty="0">
+                <a:latin typeface="Times New Roman" panose="02020603050405020304" pitchFamily="18" charset="0"/>
+                <a:cs typeface="Times New Roman" panose="02020603050405020304" pitchFamily="18" charset="0"/>
+              </a:rPr>
+              <a:t>A interface </a:t>
+            </a:r>
+            <a:r>
+              <a:rPr lang="pt-BR" sz="1400" dirty="0" err="1">
+                <a:latin typeface="Times New Roman" panose="02020603050405020304" pitchFamily="18" charset="0"/>
+                <a:cs typeface="Times New Roman" panose="02020603050405020304" pitchFamily="18" charset="0"/>
+              </a:rPr>
+              <a:t>UserDetails</a:t>
+            </a:r>
+            <a:r>
+              <a:rPr lang="pt-BR" sz="1400" dirty="0">
+                <a:latin typeface="Times New Roman" panose="02020603050405020304" pitchFamily="18" charset="0"/>
+                <a:cs typeface="Times New Roman" panose="02020603050405020304" pitchFamily="18" charset="0"/>
+              </a:rPr>
+              <a:t> permite que o Spring Security acesse o login, o </a:t>
+            </a:r>
+            <a:r>
+              <a:rPr lang="pt-BR" sz="1400" dirty="0" err="1">
+                <a:latin typeface="Times New Roman" panose="02020603050405020304" pitchFamily="18" charset="0"/>
+                <a:cs typeface="Times New Roman" panose="02020603050405020304" pitchFamily="18" charset="0"/>
+              </a:rPr>
+              <a:t>hash</a:t>
+            </a:r>
+            <a:r>
+              <a:rPr lang="pt-BR" sz="1400" dirty="0">
+                <a:latin typeface="Times New Roman" panose="02020603050405020304" pitchFamily="18" charset="0"/>
+                <a:cs typeface="Times New Roman" panose="02020603050405020304" pitchFamily="18" charset="0"/>
+              </a:rPr>
+              <a:t> da senha e as permissões do usuário. O JPA cria e preenche o objeto com os dados do banco, enquanto o Spring Security consulta essas informações para autenticar o usuário e controlar seu acesso.</a:t>
+            </a:r>
+          </a:p>
+        </p:txBody>
+      </p:sp>
+    </p:spTree>
+    <p:extLst>
+      <p:ext uri="{BB962C8B-B14F-4D97-AF65-F5344CB8AC3E}">
+        <p14:creationId xmlns:p14="http://schemas.microsoft.com/office/powerpoint/2010/main" val="2943527375"/>
       </p:ext>
     </p:extLst>
   </p:cSld>
@@ -13055,10 +14641,10 @@
       </p:sp>
       <p:pic>
         <p:nvPicPr>
-          <p:cNvPr id="5" name="Imagem 4">
-            <a:extLst>
-              <a:ext uri="{FF2B5EF4-FFF2-40B4-BE49-F238E27FC236}">
-                <a16:creationId xmlns:a16="http://schemas.microsoft.com/office/drawing/2014/main" id="{09BEE009-2E98-0957-5528-D7A06FB57BC1}"/>
+          <p:cNvPr id="6" name="Imagem 5" descr="Linha do tempo&#10;&#10;O conteúdo gerado por IA pode estar incorreto.">
+            <a:extLst>
+              <a:ext uri="{FF2B5EF4-FFF2-40B4-BE49-F238E27FC236}">
+                <a16:creationId xmlns:a16="http://schemas.microsoft.com/office/drawing/2014/main" id="{31F125DC-33F4-F40F-637D-62268A8D464C}"/>
               </a:ext>
             </a:extLst>
           </p:cNvPr>
@@ -13081,8 +14667,8 @@
         </p:blipFill>
         <p:spPr>
           <a:xfrm>
-            <a:off x="3508144" y="3176529"/>
-            <a:ext cx="5175712" cy="3450475"/>
+            <a:off x="1544053" y="2907102"/>
+            <a:ext cx="9103894" cy="3792509"/>
           </a:xfrm>
           <a:prstGeom prst="rect">
             <a:avLst/>

--- a/engenharia-software/software-corporativo/boas-praticas/aula-06-spring-security/spring-security.pptx
+++ b/engenharia-software/software-corporativo/boas-praticas/aula-06-spring-security/spring-security.pptx
@@ -4785,7 +4785,7 @@
           <p:spPr>
             <a:xfrm>
               <a:off x="1098364" y="2538081"/>
-              <a:ext cx="6096256" cy="3420000"/>
+              <a:ext cx="6096256" cy="2956066"/>
             </a:xfrm>
             <a:prstGeom prst="rect">
               <a:avLst/>
@@ -4904,7 +4904,43 @@
                   </a:solidFill>
                   <a:latin typeface="JetBrains Mono"/>
                 </a:rPr>
-                <a:t> http){</a:t>
+                <a:t> http) </a:t>
+              </a:r>
+              <a:r>
+                <a:rPr lang="pt-BR" dirty="0" err="1">
+                  <a:solidFill>
+                    <a:srgbClr val="BCBEC4"/>
+                  </a:solidFill>
+                  <a:latin typeface="JetBrains Mono"/>
+                </a:rPr>
+                <a:t>throws</a:t>
+              </a:r>
+              <a:r>
+                <a:rPr lang="pt-BR" dirty="0">
+                  <a:solidFill>
+                    <a:srgbClr val="BCBEC4"/>
+                  </a:solidFill>
+                  <a:latin typeface="JetBrains Mono"/>
+                </a:rPr>
+                <a:t> </a:t>
+              </a:r>
+              <a:r>
+                <a:rPr lang="pt-BR" dirty="0" err="1">
+                  <a:solidFill>
+                    <a:srgbClr val="BCBEC4"/>
+                  </a:solidFill>
+                  <a:latin typeface="JetBrains Mono"/>
+                </a:rPr>
+                <a:t>Exception</a:t>
+              </a:r>
+              <a:r>
+                <a:rPr lang="pt-BR" altLang="pt-BR" dirty="0">
+                  <a:solidFill>
+                    <a:srgbClr val="BCBEC4"/>
+                  </a:solidFill>
+                  <a:latin typeface="JetBrains Mono"/>
+                </a:rPr>
+                <a:t>{</a:t>
               </a:r>
               <a:br>
                 <a:rPr lang="pt-BR" altLang="pt-BR" dirty="0">
@@ -6886,7 +6922,7 @@
             </a:r>
             <a:r>
               <a:rPr lang="pt-BR" dirty="0" err="1"/>
-              <a:t>UsernamePasswordAuthenticationToken</a:t>
+              <a:t>DaoAuthenticationProvider</a:t>
             </a:r>
             <a:r>
               <a:rPr lang="pt-BR" dirty="0"/>
@@ -8593,7 +8629,7 @@
                   </a:solidFill>
                   <a:latin typeface="JetBrains Mono"/>
                 </a:rPr>
-                <a:t>authenticaon</a:t>
+                <a:t>autenticacao</a:t>
               </a:r>
               <a:r>
                 <a:rPr lang="pt-BR" altLang="pt-BR" dirty="0">
@@ -8995,7 +9031,7 @@
           <a:p>
             <a:r>
               <a:rPr lang="pt-BR" dirty="0"/>
-              <a:t>As senhas não devem ser salvas diretamente no banco de dados, pois um vazamento poderia expor as credenciais dos usuários.</a:t>
+              <a:t>As senhas não devem ser salvas em texto puro, pois um vazamento poderia expor as credenciais dos usuários.</a:t>
             </a:r>
           </a:p>
           <a:p>
@@ -12371,11 +12407,11 @@
           <a:p>
             <a:r>
               <a:rPr lang="pt-BR" dirty="0" err="1"/>
-              <a:t>Stateful</a:t>
+              <a:t>Stateless</a:t>
             </a:r>
             <a:r>
               <a:rPr lang="pt-BR" dirty="0"/>
-              <a:t> – API </a:t>
+              <a:t>  – API </a:t>
             </a:r>
             <a:r>
               <a:rPr lang="pt-BR" dirty="0" err="1"/>
@@ -13095,11 +13131,11 @@
           <a:p>
             <a:r>
               <a:rPr lang="pt-BR" dirty="0" err="1"/>
-              <a:t>Stateful</a:t>
+              <a:t>Stateless</a:t>
             </a:r>
             <a:r>
               <a:rPr lang="pt-BR" dirty="0"/>
-              <a:t> – API </a:t>
+              <a:t>  – API </a:t>
             </a:r>
             <a:r>
               <a:rPr lang="pt-BR" dirty="0" err="1"/>
